--- a/PowerView_Billing_Presentation.pptx
+++ b/PowerView_Billing_Presentation.pptx
@@ -15,6 +15,16 @@
     <p:sldId id="263" r:id="rId14"/>
     <p:sldId id="264" r:id="rId15"/>
     <p:sldId id="265" r:id="rId16"/>
+    <p:sldId id="266" r:id="rId17"/>
+    <p:sldId id="267" r:id="rId18"/>
+    <p:sldId id="268" r:id="rId19"/>
+    <p:sldId id="269" r:id="rId20"/>
+    <p:sldId id="270" r:id="rId21"/>
+    <p:sldId id="271" r:id="rId22"/>
+    <p:sldId id="272" r:id="rId23"/>
+    <p:sldId id="273" r:id="rId24"/>
+    <p:sldId id="274" r:id="rId25"/>
+    <p:sldId id="275" r:id="rId26"/>
   </p:sldIdLst>
   <p:sldSz cx="12188952" cy="6858000" type="screen4x3"/>
   <p:notesSz cx="6858000" cy="9144000"/>
@@ -4721,6 +4731,6148 @@
 </p:sld>
 </file>
 
+<file path=ppt/slides/slide11.xml><?xml version="1.0" encoding="utf-8"?>
+<p:sld xmlns:a="http://schemas.openxmlformats.org/drawingml/2006/main" xmlns:p="http://schemas.openxmlformats.org/presentationml/2006/main" xmlns:r="http://schemas.openxmlformats.org/officeDocument/2006/relationships">
+  <p:cSld>
+    <p:bg>
+      <p:bgPr>
+        <a:solidFill>
+          <a:srgbClr val="0D1B2A"/>
+        </a:solidFill>
+        <a:effectLst/>
+      </p:bgPr>
+    </p:bg>
+    <p:spTree>
+      <p:nvGrpSpPr>
+        <p:cNvPr id="1" name=""/>
+        <p:cNvGrpSpPr/>
+        <p:nvPr/>
+      </p:nvGrpSpPr>
+      <p:grpSpPr/>
+      <p:sp>
+        <p:nvSpPr>
+          <p:cNvPr id="2" name="Rectangle 1"/>
+          <p:cNvSpPr/>
+          <p:nvPr/>
+        </p:nvSpPr>
+        <p:spPr>
+          <a:xfrm>
+            <a:off x="0" y="0"/>
+            <a:ext cx="12188952" cy="1097280"/>
+          </a:xfrm>
+          <a:prstGeom prst="rect">
+            <a:avLst/>
+          </a:prstGeom>
+          <a:solidFill>
+            <a:srgbClr val="1E3A5F"/>
+          </a:solidFill>
+          <a:ln>
+            <a:noFill/>
+          </a:ln>
+        </p:spPr>
+        <p:style>
+          <a:lnRef idx="1">
+            <a:schemeClr val="accent1"/>
+          </a:lnRef>
+          <a:fillRef idx="3">
+            <a:schemeClr val="accent1"/>
+          </a:fillRef>
+          <a:effectRef idx="2">
+            <a:schemeClr val="accent1"/>
+          </a:effectRef>
+          <a:fontRef idx="minor">
+            <a:schemeClr val="lt1"/>
+          </a:fontRef>
+        </p:style>
+        <p:txBody>
+          <a:bodyPr rtlCol="0" anchor="ctr"/>
+          <a:lstStyle/>
+          <a:p>
+            <a:pPr algn="ctr"/>
+          </a:p>
+        </p:txBody>
+      </p:sp>
+      <p:sp>
+        <p:nvSpPr>
+          <p:cNvPr id="3" name="Rectangle 2"/>
+          <p:cNvSpPr/>
+          <p:nvPr/>
+        </p:nvSpPr>
+        <p:spPr>
+          <a:xfrm>
+            <a:off x="0" y="0"/>
+            <a:ext cx="73152" cy="1097280"/>
+          </a:xfrm>
+          <a:prstGeom prst="rect">
+            <a:avLst/>
+          </a:prstGeom>
+          <a:solidFill>
+            <a:srgbClr val="008BFF"/>
+          </a:solidFill>
+          <a:ln>
+            <a:noFill/>
+          </a:ln>
+        </p:spPr>
+        <p:style>
+          <a:lnRef idx="1">
+            <a:schemeClr val="accent1"/>
+          </a:lnRef>
+          <a:fillRef idx="3">
+            <a:schemeClr val="accent1"/>
+          </a:fillRef>
+          <a:effectRef idx="2">
+            <a:schemeClr val="accent1"/>
+          </a:effectRef>
+          <a:fontRef idx="minor">
+            <a:schemeClr val="lt1"/>
+          </a:fontRef>
+        </p:style>
+        <p:txBody>
+          <a:bodyPr rtlCol="0" anchor="ctr"/>
+          <a:lstStyle/>
+          <a:p>
+            <a:pPr algn="ctr"/>
+          </a:p>
+        </p:txBody>
+      </p:sp>
+      <p:sp>
+        <p:nvSpPr>
+          <p:cNvPr id="4" name="Rectangle 3"/>
+          <p:cNvSpPr/>
+          <p:nvPr/>
+        </p:nvSpPr>
+        <p:spPr>
+          <a:xfrm>
+            <a:off x="137160" y="137160"/>
+            <a:ext cx="640080" cy="502920"/>
+          </a:xfrm>
+          <a:prstGeom prst="rect">
+            <a:avLst/>
+          </a:prstGeom>
+          <a:solidFill>
+            <a:srgbClr val="008BFF"/>
+          </a:solidFill>
+          <a:ln>
+            <a:noFill/>
+          </a:ln>
+        </p:spPr>
+        <p:style>
+          <a:lnRef idx="1">
+            <a:schemeClr val="accent1"/>
+          </a:lnRef>
+          <a:fillRef idx="3">
+            <a:schemeClr val="accent1"/>
+          </a:fillRef>
+          <a:effectRef idx="2">
+            <a:schemeClr val="accent1"/>
+          </a:effectRef>
+          <a:fontRef idx="minor">
+            <a:schemeClr val="lt1"/>
+          </a:fontRef>
+        </p:style>
+        <p:txBody>
+          <a:bodyPr rtlCol="0" anchor="ctr"/>
+          <a:lstStyle/>
+          <a:p>
+            <a:pPr algn="ctr"/>
+          </a:p>
+        </p:txBody>
+      </p:sp>
+      <p:sp>
+        <p:nvSpPr>
+          <p:cNvPr id="5" name="TextBox 4"/>
+          <p:cNvSpPr txBox="1"/>
+          <p:nvPr/>
+        </p:nvSpPr>
+        <p:spPr>
+          <a:xfrm>
+            <a:off x="137160" y="137160"/>
+            <a:ext cx="640080" cy="502920"/>
+          </a:xfrm>
+          <a:prstGeom prst="rect">
+            <a:avLst/>
+          </a:prstGeom>
+          <a:noFill/>
+        </p:spPr>
+        <p:txBody>
+          <a:bodyPr wrap="square">
+            <a:spAutoFit/>
+          </a:bodyPr>
+          <a:lstStyle/>
+          <a:p>
+            <a:pPr algn="ctr"/>
+            <a:r>
+              <a:rPr sz="2000" b="1">
+                <a:solidFill>
+                  <a:srgbClr val="0D1B2A"/>
+                </a:solidFill>
+                <a:latin typeface="Segoe UI"/>
+              </a:rPr>
+              <a:t>A1</a:t>
+            </a:r>
+          </a:p>
+        </p:txBody>
+      </p:sp>
+      <p:sp>
+        <p:nvSpPr>
+          <p:cNvPr id="6" name="TextBox 5"/>
+          <p:cNvSpPr txBox="1"/>
+          <p:nvPr/>
+        </p:nvSpPr>
+        <p:spPr>
+          <a:xfrm>
+            <a:off x="137160" y="621792"/>
+            <a:ext cx="640080" cy="274320"/>
+          </a:xfrm>
+          <a:prstGeom prst="rect">
+            <a:avLst/>
+          </a:prstGeom>
+          <a:noFill/>
+        </p:spPr>
+        <p:txBody>
+          <a:bodyPr wrap="square">
+            <a:spAutoFit/>
+          </a:bodyPr>
+          <a:lstStyle/>
+          <a:p>
+            <a:pPr algn="ctr"/>
+            <a:r>
+              <a:rPr sz="800" b="0">
+                <a:solidFill>
+                  <a:srgbClr val="008BFF"/>
+                </a:solidFill>
+                <a:latin typeface="Segoe UI"/>
+              </a:rPr>
+              <a:t>APPENDIX</a:t>
+            </a:r>
+          </a:p>
+        </p:txBody>
+      </p:sp>
+      <p:sp>
+        <p:nvSpPr>
+          <p:cNvPr id="7" name="TextBox 6"/>
+          <p:cNvSpPr txBox="1"/>
+          <p:nvPr/>
+        </p:nvSpPr>
+        <p:spPr>
+          <a:xfrm>
+            <a:off x="914400" y="73152"/>
+            <a:ext cx="10515600" cy="640080"/>
+          </a:xfrm>
+          <a:prstGeom prst="rect">
+            <a:avLst/>
+          </a:prstGeom>
+          <a:noFill/>
+        </p:spPr>
+        <p:txBody>
+          <a:bodyPr wrap="square">
+            <a:spAutoFit/>
+          </a:bodyPr>
+          <a:lstStyle/>
+          <a:p>
+            <a:pPr algn="l"/>
+            <a:r>
+              <a:rPr sz="2600" b="1">
+                <a:solidFill>
+                  <a:srgbClr val="FFFFFF"/>
+                </a:solidFill>
+                <a:latin typeface="Segoe UI"/>
+              </a:rPr>
+              <a:t>Full System Architecture</a:t>
+            </a:r>
+          </a:p>
+        </p:txBody>
+      </p:sp>
+      <p:sp>
+        <p:nvSpPr>
+          <p:cNvPr id="8" name="TextBox 7"/>
+          <p:cNvSpPr txBox="1"/>
+          <p:nvPr/>
+        </p:nvSpPr>
+        <p:spPr>
+          <a:xfrm>
+            <a:off x="914400" y="713232"/>
+            <a:ext cx="10515600" cy="347472"/>
+          </a:xfrm>
+          <a:prstGeom prst="rect">
+            <a:avLst/>
+          </a:prstGeom>
+          <a:noFill/>
+        </p:spPr>
+        <p:txBody>
+          <a:bodyPr wrap="square">
+            <a:spAutoFit/>
+          </a:bodyPr>
+          <a:lstStyle/>
+          <a:p>
+            <a:pPr algn="l"/>
+            <a:r>
+              <a:rPr sz="1300" b="0">
+                <a:solidFill>
+                  <a:srgbClr val="B0C4DE"/>
+                </a:solidFill>
+                <a:latin typeface="Sarabun"/>
+              </a:rPr>
+              <a:t>โครงสร้างสถาปัตยกรรมระบบทั้งหมด — Hardware to Application</a:t>
+            </a:r>
+          </a:p>
+        </p:txBody>
+      </p:sp>
+      <p:pic>
+        <p:nvPicPr>
+          <p:cNvPr id="9" name="Picture 8" descr="diag_A1.png"/>
+          <p:cNvPicPr>
+            <a:picLocks noChangeAspect="1"/>
+          </p:cNvPicPr>
+          <p:nvPr/>
+        </p:nvPicPr>
+        <p:blipFill>
+          <a:blip r:embed="rId2"/>
+          <a:stretch>
+            <a:fillRect/>
+          </a:stretch>
+        </p:blipFill>
+        <p:spPr>
+          <a:xfrm>
+            <a:off x="182880" y="1403814"/>
+            <a:ext cx="7772400" cy="4781890"/>
+          </a:xfrm>
+          <a:prstGeom prst="rect">
+            <a:avLst/>
+          </a:prstGeom>
+        </p:spPr>
+      </p:pic>
+      <p:sp>
+        <p:nvSpPr>
+          <p:cNvPr id="10" name="Rectangle 9"/>
+          <p:cNvSpPr/>
+          <p:nvPr/>
+        </p:nvSpPr>
+        <p:spPr>
+          <a:xfrm>
+            <a:off x="8138160" y="1143000"/>
+            <a:ext cx="3840480" cy="5303520"/>
+          </a:xfrm>
+          <a:prstGeom prst="rect">
+            <a:avLst/>
+          </a:prstGeom>
+          <a:solidFill>
+            <a:srgbClr val="162A44"/>
+          </a:solidFill>
+          <a:ln>
+            <a:noFill/>
+          </a:ln>
+        </p:spPr>
+        <p:style>
+          <a:lnRef idx="1">
+            <a:schemeClr val="accent1"/>
+          </a:lnRef>
+          <a:fillRef idx="3">
+            <a:schemeClr val="accent1"/>
+          </a:fillRef>
+          <a:effectRef idx="2">
+            <a:schemeClr val="accent1"/>
+          </a:effectRef>
+          <a:fontRef idx="minor">
+            <a:schemeClr val="lt1"/>
+          </a:fontRef>
+        </p:style>
+        <p:txBody>
+          <a:bodyPr rtlCol="0" anchor="ctr"/>
+          <a:lstStyle/>
+          <a:p>
+            <a:pPr algn="ctr"/>
+          </a:p>
+        </p:txBody>
+      </p:sp>
+      <p:sp>
+        <p:nvSpPr>
+          <p:cNvPr id="11" name="Rectangle 10"/>
+          <p:cNvSpPr/>
+          <p:nvPr/>
+        </p:nvSpPr>
+        <p:spPr>
+          <a:xfrm>
+            <a:off x="8138160" y="1143000"/>
+            <a:ext cx="3840480" cy="54864"/>
+          </a:xfrm>
+          <a:prstGeom prst="rect">
+            <a:avLst/>
+          </a:prstGeom>
+          <a:solidFill>
+            <a:srgbClr val="008BFF"/>
+          </a:solidFill>
+          <a:ln>
+            <a:noFill/>
+          </a:ln>
+        </p:spPr>
+        <p:style>
+          <a:lnRef idx="1">
+            <a:schemeClr val="accent1"/>
+          </a:lnRef>
+          <a:fillRef idx="3">
+            <a:schemeClr val="accent1"/>
+          </a:fillRef>
+          <a:effectRef idx="2">
+            <a:schemeClr val="accent1"/>
+          </a:effectRef>
+          <a:fontRef idx="minor">
+            <a:schemeClr val="lt1"/>
+          </a:fontRef>
+        </p:style>
+        <p:txBody>
+          <a:bodyPr rtlCol="0" anchor="ctr"/>
+          <a:lstStyle/>
+          <a:p>
+            <a:pPr algn="ctr"/>
+          </a:p>
+        </p:txBody>
+      </p:sp>
+      <p:sp>
+        <p:nvSpPr>
+          <p:cNvPr id="12" name="TextBox 11"/>
+          <p:cNvSpPr txBox="1"/>
+          <p:nvPr/>
+        </p:nvSpPr>
+        <p:spPr>
+          <a:xfrm>
+            <a:off x="8275320" y="1207008"/>
+            <a:ext cx="3611880" cy="5120640"/>
+          </a:xfrm>
+          <a:prstGeom prst="rect">
+            <a:avLst/>
+          </a:prstGeom>
+          <a:noFill/>
+        </p:spPr>
+        <p:txBody>
+          <a:bodyPr wrap="square">
+            <a:spAutoFit/>
+          </a:bodyPr>
+          <a:lstStyle/>
+          <a:p>
+            <a:r>
+              <a:rPr sz="1400" b="1">
+                <a:solidFill>
+                  <a:srgbClr val="008BFF"/>
+                </a:solidFill>
+                <a:latin typeface="Sarabun"/>
+              </a:rPr>
+              <a:t>Key Points</a:t>
+            </a:r>
+          </a:p>
+          <a:p>
+            <a:pPr algn="l"/>
+            <a:r>
+              <a:rPr sz="1200" b="0">
+                <a:solidFill>
+                  <a:srgbClr val="FFFFFF"/>
+                </a:solidFill>
+                <a:latin typeface="Segoe UI"/>
+              </a:rPr>
+              <a:t>• Hardware publish JSON 33 fields/sec via MQTT</a:t>
+            </a:r>
+          </a:p>
+          <a:p>
+            <a:pPr algn="l"/>
+            <a:r>
+              <a:rPr sz="1200" b="0">
+                <a:solidFill>
+                  <a:srgbClr val="FFFFFF"/>
+                </a:solidFill>
+                <a:latin typeface="Sarabun"/>
+              </a:rPr>
+              <a:t>• Telegraf subscribe MQTT และ parse JSON</a:t>
+            </a:r>
+          </a:p>
+          <a:p>
+            <a:pPr algn="l"/>
+            <a:r>
+              <a:rPr sz="1200" b="0">
+                <a:solidFill>
+                  <a:srgbClr val="FFFFFF"/>
+                </a:solidFill>
+                <a:latin typeface="Sarabun"/>
+              </a:rPr>
+              <a:t>• Telegraf check Tier จาก Redis ก่อนเลือก Bucket</a:t>
+            </a:r>
+          </a:p>
+          <a:p>
+            <a:pPr algn="l"/>
+            <a:r>
+              <a:rPr sz="1200" b="0">
+                <a:solidFill>
+                  <a:srgbClr val="FFFFFF"/>
+                </a:solidFill>
+                <a:latin typeface="Sarabun"/>
+              </a:rPr>
+              <a:t>• Core API คำนวณ Billing on-demand (ไม่มี Worker แยก)</a:t>
+            </a:r>
+          </a:p>
+          <a:p>
+            <a:pPr algn="l"/>
+            <a:r>
+              <a:rPr sz="1200" b="0">
+                <a:solidFill>
+                  <a:srgbClr val="FFFFFF"/>
+                </a:solidFill>
+                <a:latin typeface="Sarabun"/>
+              </a:rPr>
+              <a:t>• PostgreSQL เก็บ User/Subscription/Payment (ACID)</a:t>
+            </a:r>
+          </a:p>
+          <a:p>
+            <a:pPr algn="l"/>
+            <a:r>
+              <a:rPr sz="1200" b="0">
+                <a:solidFill>
+                  <a:srgbClr val="FFFFFF"/>
+                </a:solidFill>
+                <a:latin typeface="Sarabun"/>
+              </a:rPr>
+              <a:t>• InfluxDB เก็บ Time-Series IoT data (High Throughput)</a:t>
+            </a:r>
+          </a:p>
+          <a:p>
+            <a:pPr algn="l"/>
+            <a:r>
+              <a:rPr sz="1200" b="0">
+                <a:solidFill>
+                  <a:srgbClr val="FFFFFF"/>
+                </a:solidFill>
+                <a:latin typeface="Sarabun"/>
+              </a:rPr>
+              <a:t>• Redis เป็นทั้ง Cache Tier และ Queue สำหรับ Worker</a:t>
+            </a:r>
+          </a:p>
+          <a:p>
+            <a:pPr algn="l"/>
+            <a:r>
+              <a:rPr sz="1200" b="0">
+                <a:solidFill>
+                  <a:srgbClr val="FFFFFF"/>
+                </a:solidFill>
+                <a:latin typeface="Sarabun"/>
+              </a:rPr>
+              <a:t>• ทุก service รันบน Docker บน Hostinger KVM VPS เดียว</a:t>
+            </a:r>
+          </a:p>
+        </p:txBody>
+      </p:sp>
+    </p:spTree>
+  </p:cSld>
+  <p:clrMapOvr>
+    <a:masterClrMapping/>
+  </p:clrMapOvr>
+</p:sld>
+</file>
+
+<file path=ppt/slides/slide12.xml><?xml version="1.0" encoding="utf-8"?>
+<p:sld xmlns:a="http://schemas.openxmlformats.org/drawingml/2006/main" xmlns:p="http://schemas.openxmlformats.org/presentationml/2006/main" xmlns:r="http://schemas.openxmlformats.org/officeDocument/2006/relationships">
+  <p:cSld>
+    <p:bg>
+      <p:bgPr>
+        <a:solidFill>
+          <a:srgbClr val="0D1B2A"/>
+        </a:solidFill>
+        <a:effectLst/>
+      </p:bgPr>
+    </p:bg>
+    <p:spTree>
+      <p:nvGrpSpPr>
+        <p:cNvPr id="1" name=""/>
+        <p:cNvGrpSpPr/>
+        <p:nvPr/>
+      </p:nvGrpSpPr>
+      <p:grpSpPr/>
+      <p:sp>
+        <p:nvSpPr>
+          <p:cNvPr id="2" name="Rectangle 1"/>
+          <p:cNvSpPr/>
+          <p:nvPr/>
+        </p:nvSpPr>
+        <p:spPr>
+          <a:xfrm>
+            <a:off x="0" y="0"/>
+            <a:ext cx="12188952" cy="1097280"/>
+          </a:xfrm>
+          <a:prstGeom prst="rect">
+            <a:avLst/>
+          </a:prstGeom>
+          <a:solidFill>
+            <a:srgbClr val="1E3A5F"/>
+          </a:solidFill>
+          <a:ln>
+            <a:noFill/>
+          </a:ln>
+        </p:spPr>
+        <p:style>
+          <a:lnRef idx="1">
+            <a:schemeClr val="accent1"/>
+          </a:lnRef>
+          <a:fillRef idx="3">
+            <a:schemeClr val="accent1"/>
+          </a:fillRef>
+          <a:effectRef idx="2">
+            <a:schemeClr val="accent1"/>
+          </a:effectRef>
+          <a:fontRef idx="minor">
+            <a:schemeClr val="lt1"/>
+          </a:fontRef>
+        </p:style>
+        <p:txBody>
+          <a:bodyPr rtlCol="0" anchor="ctr"/>
+          <a:lstStyle/>
+          <a:p>
+            <a:pPr algn="ctr"/>
+          </a:p>
+        </p:txBody>
+      </p:sp>
+      <p:sp>
+        <p:nvSpPr>
+          <p:cNvPr id="3" name="Rectangle 2"/>
+          <p:cNvSpPr/>
+          <p:nvPr/>
+        </p:nvSpPr>
+        <p:spPr>
+          <a:xfrm>
+            <a:off x="0" y="0"/>
+            <a:ext cx="73152" cy="1097280"/>
+          </a:xfrm>
+          <a:prstGeom prst="rect">
+            <a:avLst/>
+          </a:prstGeom>
+          <a:solidFill>
+            <a:srgbClr val="00D4E8"/>
+          </a:solidFill>
+          <a:ln>
+            <a:noFill/>
+          </a:ln>
+        </p:spPr>
+        <p:style>
+          <a:lnRef idx="1">
+            <a:schemeClr val="accent1"/>
+          </a:lnRef>
+          <a:fillRef idx="3">
+            <a:schemeClr val="accent1"/>
+          </a:fillRef>
+          <a:effectRef idx="2">
+            <a:schemeClr val="accent1"/>
+          </a:effectRef>
+          <a:fontRef idx="minor">
+            <a:schemeClr val="lt1"/>
+          </a:fontRef>
+        </p:style>
+        <p:txBody>
+          <a:bodyPr rtlCol="0" anchor="ctr"/>
+          <a:lstStyle/>
+          <a:p>
+            <a:pPr algn="ctr"/>
+          </a:p>
+        </p:txBody>
+      </p:sp>
+      <p:sp>
+        <p:nvSpPr>
+          <p:cNvPr id="4" name="Rectangle 3"/>
+          <p:cNvSpPr/>
+          <p:nvPr/>
+        </p:nvSpPr>
+        <p:spPr>
+          <a:xfrm>
+            <a:off x="137160" y="137160"/>
+            <a:ext cx="640080" cy="502920"/>
+          </a:xfrm>
+          <a:prstGeom prst="rect">
+            <a:avLst/>
+          </a:prstGeom>
+          <a:solidFill>
+            <a:srgbClr val="00D4E8"/>
+          </a:solidFill>
+          <a:ln>
+            <a:noFill/>
+          </a:ln>
+        </p:spPr>
+        <p:style>
+          <a:lnRef idx="1">
+            <a:schemeClr val="accent1"/>
+          </a:lnRef>
+          <a:fillRef idx="3">
+            <a:schemeClr val="accent1"/>
+          </a:fillRef>
+          <a:effectRef idx="2">
+            <a:schemeClr val="accent1"/>
+          </a:effectRef>
+          <a:fontRef idx="minor">
+            <a:schemeClr val="lt1"/>
+          </a:fontRef>
+        </p:style>
+        <p:txBody>
+          <a:bodyPr rtlCol="0" anchor="ctr"/>
+          <a:lstStyle/>
+          <a:p>
+            <a:pPr algn="ctr"/>
+          </a:p>
+        </p:txBody>
+      </p:sp>
+      <p:sp>
+        <p:nvSpPr>
+          <p:cNvPr id="5" name="TextBox 4"/>
+          <p:cNvSpPr txBox="1"/>
+          <p:nvPr/>
+        </p:nvSpPr>
+        <p:spPr>
+          <a:xfrm>
+            <a:off x="137160" y="137160"/>
+            <a:ext cx="640080" cy="502920"/>
+          </a:xfrm>
+          <a:prstGeom prst="rect">
+            <a:avLst/>
+          </a:prstGeom>
+          <a:noFill/>
+        </p:spPr>
+        <p:txBody>
+          <a:bodyPr wrap="square">
+            <a:spAutoFit/>
+          </a:bodyPr>
+          <a:lstStyle/>
+          <a:p>
+            <a:pPr algn="ctr"/>
+            <a:r>
+              <a:rPr sz="2000" b="1">
+                <a:solidFill>
+                  <a:srgbClr val="0D1B2A"/>
+                </a:solidFill>
+                <a:latin typeface="Segoe UI"/>
+              </a:rPr>
+              <a:t>A2</a:t>
+            </a:r>
+          </a:p>
+        </p:txBody>
+      </p:sp>
+      <p:sp>
+        <p:nvSpPr>
+          <p:cNvPr id="6" name="TextBox 5"/>
+          <p:cNvSpPr txBox="1"/>
+          <p:nvPr/>
+        </p:nvSpPr>
+        <p:spPr>
+          <a:xfrm>
+            <a:off x="137160" y="621792"/>
+            <a:ext cx="640080" cy="274320"/>
+          </a:xfrm>
+          <a:prstGeom prst="rect">
+            <a:avLst/>
+          </a:prstGeom>
+          <a:noFill/>
+        </p:spPr>
+        <p:txBody>
+          <a:bodyPr wrap="square">
+            <a:spAutoFit/>
+          </a:bodyPr>
+          <a:lstStyle/>
+          <a:p>
+            <a:pPr algn="ctr"/>
+            <a:r>
+              <a:rPr sz="800" b="0">
+                <a:solidFill>
+                  <a:srgbClr val="00D4E8"/>
+                </a:solidFill>
+                <a:latin typeface="Segoe UI"/>
+              </a:rPr>
+              <a:t>APPENDIX</a:t>
+            </a:r>
+          </a:p>
+        </p:txBody>
+      </p:sp>
+      <p:sp>
+        <p:nvSpPr>
+          <p:cNvPr id="7" name="TextBox 6"/>
+          <p:cNvSpPr txBox="1"/>
+          <p:nvPr/>
+        </p:nvSpPr>
+        <p:spPr>
+          <a:xfrm>
+            <a:off x="914400" y="73152"/>
+            <a:ext cx="10515600" cy="640080"/>
+          </a:xfrm>
+          <a:prstGeom prst="rect">
+            <a:avLst/>
+          </a:prstGeom>
+          <a:noFill/>
+        </p:spPr>
+        <p:txBody>
+          <a:bodyPr wrap="square">
+            <a:spAutoFit/>
+          </a:bodyPr>
+          <a:lstStyle/>
+          <a:p>
+            <a:pPr algn="l"/>
+            <a:r>
+              <a:rPr sz="2600" b="1">
+                <a:solidFill>
+                  <a:srgbClr val="FFFFFF"/>
+                </a:solidFill>
+                <a:latin typeface="Segoe UI"/>
+              </a:rPr>
+              <a:t>PostgreSQL Schema (ER Diagram)</a:t>
+            </a:r>
+          </a:p>
+        </p:txBody>
+      </p:sp>
+      <p:sp>
+        <p:nvSpPr>
+          <p:cNvPr id="8" name="TextBox 7"/>
+          <p:cNvSpPr txBox="1"/>
+          <p:nvPr/>
+        </p:nvSpPr>
+        <p:spPr>
+          <a:xfrm>
+            <a:off x="914400" y="713232"/>
+            <a:ext cx="10515600" cy="347472"/>
+          </a:xfrm>
+          <a:prstGeom prst="rect">
+            <a:avLst/>
+          </a:prstGeom>
+          <a:noFill/>
+        </p:spPr>
+        <p:txBody>
+          <a:bodyPr wrap="square">
+            <a:spAutoFit/>
+          </a:bodyPr>
+          <a:lstStyle/>
+          <a:p>
+            <a:pPr algn="l"/>
+            <a:r>
+              <a:rPr sz="1300" b="0">
+                <a:solidFill>
+                  <a:srgbClr val="B0C4DE"/>
+                </a:solidFill>
+                <a:latin typeface="Sarabun"/>
+              </a:rPr>
+              <a:t>ตารางฐานข้อมูลระบบ Billing ทั้งหมด — 6 Tables</a:t>
+            </a:r>
+          </a:p>
+        </p:txBody>
+      </p:sp>
+      <p:pic>
+        <p:nvPicPr>
+          <p:cNvPr id="9" name="Picture 8" descr="diag_A2.png"/>
+          <p:cNvPicPr>
+            <a:picLocks noChangeAspect="1"/>
+          </p:cNvPicPr>
+          <p:nvPr/>
+        </p:nvPicPr>
+        <p:blipFill>
+          <a:blip r:embed="rId2"/>
+          <a:stretch>
+            <a:fillRect/>
+          </a:stretch>
+        </p:blipFill>
+        <p:spPr>
+          <a:xfrm>
+            <a:off x="182880" y="1142999"/>
+            <a:ext cx="2933335" cy="5303520"/>
+          </a:xfrm>
+          <a:prstGeom prst="rect">
+            <a:avLst/>
+          </a:prstGeom>
+        </p:spPr>
+      </p:pic>
+      <p:sp>
+        <p:nvSpPr>
+          <p:cNvPr id="10" name="Rectangle 9"/>
+          <p:cNvSpPr/>
+          <p:nvPr/>
+        </p:nvSpPr>
+        <p:spPr>
+          <a:xfrm>
+            <a:off x="8138160" y="1143000"/>
+            <a:ext cx="3840480" cy="5303520"/>
+          </a:xfrm>
+          <a:prstGeom prst="rect">
+            <a:avLst/>
+          </a:prstGeom>
+          <a:solidFill>
+            <a:srgbClr val="162A44"/>
+          </a:solidFill>
+          <a:ln>
+            <a:noFill/>
+          </a:ln>
+        </p:spPr>
+        <p:style>
+          <a:lnRef idx="1">
+            <a:schemeClr val="accent1"/>
+          </a:lnRef>
+          <a:fillRef idx="3">
+            <a:schemeClr val="accent1"/>
+          </a:fillRef>
+          <a:effectRef idx="2">
+            <a:schemeClr val="accent1"/>
+          </a:effectRef>
+          <a:fontRef idx="minor">
+            <a:schemeClr val="lt1"/>
+          </a:fontRef>
+        </p:style>
+        <p:txBody>
+          <a:bodyPr rtlCol="0" anchor="ctr"/>
+          <a:lstStyle/>
+          <a:p>
+            <a:pPr algn="ctr"/>
+          </a:p>
+        </p:txBody>
+      </p:sp>
+      <p:sp>
+        <p:nvSpPr>
+          <p:cNvPr id="11" name="Rectangle 10"/>
+          <p:cNvSpPr/>
+          <p:nvPr/>
+        </p:nvSpPr>
+        <p:spPr>
+          <a:xfrm>
+            <a:off x="8138160" y="1143000"/>
+            <a:ext cx="3840480" cy="54864"/>
+          </a:xfrm>
+          <a:prstGeom prst="rect">
+            <a:avLst/>
+          </a:prstGeom>
+          <a:solidFill>
+            <a:srgbClr val="00D4E8"/>
+          </a:solidFill>
+          <a:ln>
+            <a:noFill/>
+          </a:ln>
+        </p:spPr>
+        <p:style>
+          <a:lnRef idx="1">
+            <a:schemeClr val="accent1"/>
+          </a:lnRef>
+          <a:fillRef idx="3">
+            <a:schemeClr val="accent1"/>
+          </a:fillRef>
+          <a:effectRef idx="2">
+            <a:schemeClr val="accent1"/>
+          </a:effectRef>
+          <a:fontRef idx="minor">
+            <a:schemeClr val="lt1"/>
+          </a:fontRef>
+        </p:style>
+        <p:txBody>
+          <a:bodyPr rtlCol="0" anchor="ctr"/>
+          <a:lstStyle/>
+          <a:p>
+            <a:pPr algn="ctr"/>
+          </a:p>
+        </p:txBody>
+      </p:sp>
+      <p:sp>
+        <p:nvSpPr>
+          <p:cNvPr id="12" name="TextBox 11"/>
+          <p:cNvSpPr txBox="1"/>
+          <p:nvPr/>
+        </p:nvSpPr>
+        <p:spPr>
+          <a:xfrm>
+            <a:off x="8275320" y="1207008"/>
+            <a:ext cx="3611880" cy="5120640"/>
+          </a:xfrm>
+          <a:prstGeom prst="rect">
+            <a:avLst/>
+          </a:prstGeom>
+          <a:noFill/>
+        </p:spPr>
+        <p:txBody>
+          <a:bodyPr wrap="square">
+            <a:spAutoFit/>
+          </a:bodyPr>
+          <a:lstStyle/>
+          <a:p>
+            <a:r>
+              <a:rPr sz="1400" b="1">
+                <a:solidFill>
+                  <a:srgbClr val="00D4E8"/>
+                </a:solidFill>
+                <a:latin typeface="Sarabun"/>
+              </a:rPr>
+              <a:t>Schema Notes</a:t>
+            </a:r>
+          </a:p>
+          <a:p>
+            <a:pPr algn="l"/>
+            <a:r>
+              <a:rPr sz="1200" b="0">
+                <a:solidFill>
+                  <a:srgbClr val="FFFFFF"/>
+                </a:solidFill>
+                <a:latin typeface="Sarabun"/>
+              </a:rPr>
+              <a:t>• ## USERS (มีอยู่แล้ว)</a:t>
+            </a:r>
+          </a:p>
+          <a:p>
+            <a:pPr algn="l"/>
+            <a:r>
+              <a:rPr sz="1200" b="0">
+                <a:solidFill>
+                  <a:srgbClr val="FFFFFF"/>
+                </a:solidFill>
+                <a:latin typeface="Segoe UI"/>
+              </a:rPr>
+              <a:t>• id, email, display_name, role</a:t>
+            </a:r>
+          </a:p>
+          <a:p>
+            <a:pPr algn="l"/>
+            <a:r>
+              <a:rPr sz="1200" b="0">
+                <a:solidFill>
+                  <a:srgbClr val="FFFFFF"/>
+                </a:solidFill>
+                <a:latin typeface="Segoe UI"/>
+              </a:rPr>
+              <a:t>• google_id: Google OAuth Sign-In</a:t>
+            </a:r>
+          </a:p>
+          <a:p>
+            <a:pPr algn="l"/>
+            <a:r>
+              <a:rPr sz="1200" b="0">
+                <a:solidFill>
+                  <a:srgbClr val="FFFFFF"/>
+                </a:solidFill>
+                <a:latin typeface="Segoe UI"/>
+              </a:rPr>
+              <a:t>• password_hash: Email/Pass login</a:t>
+            </a:r>
+          </a:p>
+          <a:p>
+            <a:pPr algn="l"/>
+            <a:r>
+              <a:rPr sz="1200" b="0">
+                <a:solidFill>
+                  <a:srgbClr val="FFFFFF"/>
+                </a:solidFill>
+                <a:latin typeface="Sarabun"/>
+              </a:rPr>
+              <a:t>• ## DEVICES (มีอยู่แล้ว)</a:t>
+            </a:r>
+          </a:p>
+          <a:p>
+            <a:pPr algn="l"/>
+            <a:r>
+              <a:rPr sz="1200" b="0">
+                <a:solidFill>
+                  <a:srgbClr val="FFFFFF"/>
+                </a:solidFill>
+                <a:latin typeface="Segoe UI"/>
+              </a:rPr>
+              <a:t>• id = Device ID = MQTT Topic prefix</a:t>
+            </a:r>
+          </a:p>
+          <a:p>
+            <a:pPr algn="l"/>
+            <a:r>
+              <a:rPr sz="1200" b="0">
+                <a:solidFill>
+                  <a:srgbClr val="FFFFFF"/>
+                </a:solidFill>
+                <a:latin typeface="Segoe UI"/>
+              </a:rPr>
+              <a:t>• secret_key: MQTT authentication</a:t>
+            </a:r>
+          </a:p>
+          <a:p>
+            <a:pPr algn="l"/>
+            <a:r>
+              <a:rPr sz="1200" b="0">
+                <a:solidFill>
+                  <a:srgbClr val="FFFFFF"/>
+                </a:solidFill>
+                <a:latin typeface="Sarabun"/>
+              </a:rPr>
+              <a:t>• ## TIERS (ตารางใหม่)</a:t>
+            </a:r>
+          </a:p>
+          <a:p>
+            <a:pPr algn="l"/>
+            <a:r>
+              <a:rPr sz="1200" b="0">
+                <a:solidFill>
+                  <a:srgbClr val="FFFFFF"/>
+                </a:solidFill>
+                <a:latin typeface="Sarabun"/>
+              </a:rPr>
+              <a:t>• เก็บ config ราคา+สิทธิ์ ของแต่ละ Tier</a:t>
+            </a:r>
+          </a:p>
+          <a:p>
+            <a:pPr algn="l"/>
+            <a:r>
+              <a:rPr sz="1200" b="0">
+                <a:solidFill>
+                  <a:srgbClr val="FFFFFF"/>
+                </a:solidFill>
+                <a:latin typeface="Sarabun"/>
+              </a:rPr>
+              <a:t>• price_*_thb: หน่วยสตางค์ (9900 = 99 บาท)</a:t>
+            </a:r>
+          </a:p>
+          <a:p>
+            <a:pPr algn="l"/>
+            <a:r>
+              <a:rPr sz="1200" b="0">
+                <a:solidFill>
+                  <a:srgbClr val="FFFFFF"/>
+                </a:solidFill>
+                <a:latin typeface="Sarabun"/>
+              </a:rPr>
+              <a:t>• raw/ds1m/ds1h_retention_days: จำนวนวันเก็บ</a:t>
+            </a:r>
+          </a:p>
+          <a:p>
+            <a:pPr algn="l"/>
+            <a:r>
+              <a:rPr sz="1200" b="0">
+                <a:solidFill>
+                  <a:srgbClr val="FFFFFF"/>
+                </a:solidFill>
+                <a:latin typeface="Sarabun"/>
+              </a:rPr>
+              <a:t>• max_devices: 3 สำหรับ Free, 0 = ไม่จำกัด</a:t>
+            </a:r>
+          </a:p>
+          <a:p>
+            <a:pPr algn="l"/>
+            <a:r>
+              <a:rPr sz="1200" b="0">
+                <a:solidFill>
+                  <a:srgbClr val="FFFFFF"/>
+                </a:solidFill>
+                <a:latin typeface="Sarabun"/>
+              </a:rPr>
+              <a:t>• ## DEVICE_SUBSCRIPTIONS (ตารางใหม่)</a:t>
+            </a:r>
+          </a:p>
+          <a:p>
+            <a:pPr algn="l"/>
+            <a:r>
+              <a:rPr sz="1200" b="0">
+                <a:solidFill>
+                  <a:srgbClr val="FFFFFF"/>
+                </a:solidFill>
+                <a:latin typeface="Sarabun"/>
+              </a:rPr>
+              <a:t>• tier_id FK -&gt; TIERS (ไม่ hardcode string)</a:t>
+            </a:r>
+          </a:p>
+          <a:p>
+            <a:pPr algn="l"/>
+            <a:r>
+              <a:rPr sz="1200" b="0">
+                <a:solidFill>
+                  <a:srgbClr val="FFFFFF"/>
+                </a:solidFill>
+                <a:latin typeface="Sarabun"/>
+              </a:rPr>
+              <a:t>• subscribed_by FK -&gt; USERS (ใครจ่าย)</a:t>
+            </a:r>
+          </a:p>
+          <a:p>
+            <a:pPr algn="l"/>
+            <a:r>
+              <a:rPr sz="1200" b="0">
+                <a:solidFill>
+                  <a:srgbClr val="FFFFFF"/>
+                </a:solidFill>
+                <a:latin typeface="Segoe UI"/>
+              </a:rPr>
+              <a:t>• billing_cycle: monthly / yearly</a:t>
+            </a:r>
+          </a:p>
+          <a:p>
+            <a:pPr algn="l"/>
+            <a:r>
+              <a:rPr sz="1200" b="0">
+                <a:solidFill>
+                  <a:srgbClr val="FFFFFF"/>
+                </a:solidFill>
+                <a:latin typeface="Segoe UI"/>
+              </a:rPr>
+              <a:t>• status: active, expired, cancelled, trial</a:t>
+            </a:r>
+          </a:p>
+          <a:p>
+            <a:pPr algn="l"/>
+            <a:r>
+              <a:rPr sz="1200" b="0">
+                <a:solidFill>
+                  <a:srgbClr val="FFFFFF"/>
+                </a:solidFill>
+                <a:latin typeface="Sarabun"/>
+              </a:rPr>
+              <a:t>• ## PAYMENTS (ตารางใหม่)</a:t>
+            </a:r>
+          </a:p>
+          <a:p>
+            <a:pPr algn="l"/>
+            <a:r>
+              <a:rPr sz="1200" b="0">
+                <a:solidFill>
+                  <a:srgbClr val="FFFFFF"/>
+                </a:solidFill>
+                <a:latin typeface="Segoe UI"/>
+              </a:rPr>
+              <a:t>• subscription_id FK -&gt; DEVICE_SUBSCRIPTIONS</a:t>
+            </a:r>
+          </a:p>
+          <a:p>
+            <a:pPr algn="l"/>
+            <a:r>
+              <a:rPr sz="1200" b="0">
+                <a:solidFill>
+                  <a:srgbClr val="FFFFFF"/>
+                </a:solidFill>
+                <a:latin typeface="Segoe UI"/>
+              </a:rPr>
+              <a:t>• provider_ref: Stripe Payment Intent ID</a:t>
+            </a:r>
+          </a:p>
+          <a:p>
+            <a:pPr algn="l"/>
+            <a:r>
+              <a:rPr sz="1200" b="0">
+                <a:solidFill>
+                  <a:srgbClr val="FFFFFF"/>
+                </a:solidFill>
+                <a:latin typeface="Segoe UI"/>
+              </a:rPr>
+              <a:t>• status: pending, completed, failed, refunded</a:t>
+            </a:r>
+          </a:p>
+        </p:txBody>
+      </p:sp>
+    </p:spTree>
+  </p:cSld>
+  <p:clrMapOvr>
+    <a:masterClrMapping/>
+  </p:clrMapOvr>
+</p:sld>
+</file>
+
+<file path=ppt/slides/slide13.xml><?xml version="1.0" encoding="utf-8"?>
+<p:sld xmlns:a="http://schemas.openxmlformats.org/drawingml/2006/main" xmlns:p="http://schemas.openxmlformats.org/presentationml/2006/main" xmlns:r="http://schemas.openxmlformats.org/officeDocument/2006/relationships">
+  <p:cSld>
+    <p:bg>
+      <p:bgPr>
+        <a:solidFill>
+          <a:srgbClr val="0D1B2A"/>
+        </a:solidFill>
+        <a:effectLst/>
+      </p:bgPr>
+    </p:bg>
+    <p:spTree>
+      <p:nvGrpSpPr>
+        <p:cNvPr id="1" name=""/>
+        <p:cNvGrpSpPr/>
+        <p:nvPr/>
+      </p:nvGrpSpPr>
+      <p:grpSpPr/>
+      <p:sp>
+        <p:nvSpPr>
+          <p:cNvPr id="2" name="Rectangle 1"/>
+          <p:cNvSpPr/>
+          <p:nvPr/>
+        </p:nvSpPr>
+        <p:spPr>
+          <a:xfrm>
+            <a:off x="0" y="0"/>
+            <a:ext cx="12188952" cy="1097280"/>
+          </a:xfrm>
+          <a:prstGeom prst="rect">
+            <a:avLst/>
+          </a:prstGeom>
+          <a:solidFill>
+            <a:srgbClr val="1E3A5F"/>
+          </a:solidFill>
+          <a:ln>
+            <a:noFill/>
+          </a:ln>
+        </p:spPr>
+        <p:style>
+          <a:lnRef idx="1">
+            <a:schemeClr val="accent1"/>
+          </a:lnRef>
+          <a:fillRef idx="3">
+            <a:schemeClr val="accent1"/>
+          </a:fillRef>
+          <a:effectRef idx="2">
+            <a:schemeClr val="accent1"/>
+          </a:effectRef>
+          <a:fontRef idx="minor">
+            <a:schemeClr val="lt1"/>
+          </a:fontRef>
+        </p:style>
+        <p:txBody>
+          <a:bodyPr rtlCol="0" anchor="ctr"/>
+          <a:lstStyle/>
+          <a:p>
+            <a:pPr algn="ctr"/>
+          </a:p>
+        </p:txBody>
+      </p:sp>
+      <p:sp>
+        <p:nvSpPr>
+          <p:cNvPr id="3" name="Rectangle 2"/>
+          <p:cNvSpPr/>
+          <p:nvPr/>
+        </p:nvSpPr>
+        <p:spPr>
+          <a:xfrm>
+            <a:off x="0" y="0"/>
+            <a:ext cx="73152" cy="1097280"/>
+          </a:xfrm>
+          <a:prstGeom prst="rect">
+            <a:avLst/>
+          </a:prstGeom>
+          <a:solidFill>
+            <a:srgbClr val="00E596"/>
+          </a:solidFill>
+          <a:ln>
+            <a:noFill/>
+          </a:ln>
+        </p:spPr>
+        <p:style>
+          <a:lnRef idx="1">
+            <a:schemeClr val="accent1"/>
+          </a:lnRef>
+          <a:fillRef idx="3">
+            <a:schemeClr val="accent1"/>
+          </a:fillRef>
+          <a:effectRef idx="2">
+            <a:schemeClr val="accent1"/>
+          </a:effectRef>
+          <a:fontRef idx="minor">
+            <a:schemeClr val="lt1"/>
+          </a:fontRef>
+        </p:style>
+        <p:txBody>
+          <a:bodyPr rtlCol="0" anchor="ctr"/>
+          <a:lstStyle/>
+          <a:p>
+            <a:pPr algn="ctr"/>
+          </a:p>
+        </p:txBody>
+      </p:sp>
+      <p:sp>
+        <p:nvSpPr>
+          <p:cNvPr id="4" name="Rectangle 3"/>
+          <p:cNvSpPr/>
+          <p:nvPr/>
+        </p:nvSpPr>
+        <p:spPr>
+          <a:xfrm>
+            <a:off x="137160" y="137160"/>
+            <a:ext cx="640080" cy="502920"/>
+          </a:xfrm>
+          <a:prstGeom prst="rect">
+            <a:avLst/>
+          </a:prstGeom>
+          <a:solidFill>
+            <a:srgbClr val="00E596"/>
+          </a:solidFill>
+          <a:ln>
+            <a:noFill/>
+          </a:ln>
+        </p:spPr>
+        <p:style>
+          <a:lnRef idx="1">
+            <a:schemeClr val="accent1"/>
+          </a:lnRef>
+          <a:fillRef idx="3">
+            <a:schemeClr val="accent1"/>
+          </a:fillRef>
+          <a:effectRef idx="2">
+            <a:schemeClr val="accent1"/>
+          </a:effectRef>
+          <a:fontRef idx="minor">
+            <a:schemeClr val="lt1"/>
+          </a:fontRef>
+        </p:style>
+        <p:txBody>
+          <a:bodyPr rtlCol="0" anchor="ctr"/>
+          <a:lstStyle/>
+          <a:p>
+            <a:pPr algn="ctr"/>
+          </a:p>
+        </p:txBody>
+      </p:sp>
+      <p:sp>
+        <p:nvSpPr>
+          <p:cNvPr id="5" name="TextBox 4"/>
+          <p:cNvSpPr txBox="1"/>
+          <p:nvPr/>
+        </p:nvSpPr>
+        <p:spPr>
+          <a:xfrm>
+            <a:off x="137160" y="137160"/>
+            <a:ext cx="640080" cy="502920"/>
+          </a:xfrm>
+          <a:prstGeom prst="rect">
+            <a:avLst/>
+          </a:prstGeom>
+          <a:noFill/>
+        </p:spPr>
+        <p:txBody>
+          <a:bodyPr wrap="square">
+            <a:spAutoFit/>
+          </a:bodyPr>
+          <a:lstStyle/>
+          <a:p>
+            <a:pPr algn="ctr"/>
+            <a:r>
+              <a:rPr sz="2000" b="1">
+                <a:solidFill>
+                  <a:srgbClr val="0D1B2A"/>
+                </a:solidFill>
+                <a:latin typeface="Segoe UI"/>
+              </a:rPr>
+              <a:t>A3</a:t>
+            </a:r>
+          </a:p>
+        </p:txBody>
+      </p:sp>
+      <p:sp>
+        <p:nvSpPr>
+          <p:cNvPr id="6" name="TextBox 5"/>
+          <p:cNvSpPr txBox="1"/>
+          <p:nvPr/>
+        </p:nvSpPr>
+        <p:spPr>
+          <a:xfrm>
+            <a:off x="137160" y="621792"/>
+            <a:ext cx="640080" cy="274320"/>
+          </a:xfrm>
+          <a:prstGeom prst="rect">
+            <a:avLst/>
+          </a:prstGeom>
+          <a:noFill/>
+        </p:spPr>
+        <p:txBody>
+          <a:bodyPr wrap="square">
+            <a:spAutoFit/>
+          </a:bodyPr>
+          <a:lstStyle/>
+          <a:p>
+            <a:pPr algn="ctr"/>
+            <a:r>
+              <a:rPr sz="800" b="0">
+                <a:solidFill>
+                  <a:srgbClr val="00E596"/>
+                </a:solidFill>
+                <a:latin typeface="Segoe UI"/>
+              </a:rPr>
+              <a:t>APPENDIX</a:t>
+            </a:r>
+          </a:p>
+        </p:txBody>
+      </p:sp>
+      <p:sp>
+        <p:nvSpPr>
+          <p:cNvPr id="7" name="TextBox 6"/>
+          <p:cNvSpPr txBox="1"/>
+          <p:nvPr/>
+        </p:nvSpPr>
+        <p:spPr>
+          <a:xfrm>
+            <a:off x="914400" y="73152"/>
+            <a:ext cx="10515600" cy="640080"/>
+          </a:xfrm>
+          <a:prstGeom prst="rect">
+            <a:avLst/>
+          </a:prstGeom>
+          <a:noFill/>
+        </p:spPr>
+        <p:txBody>
+          <a:bodyPr wrap="square">
+            <a:spAutoFit/>
+          </a:bodyPr>
+          <a:lstStyle/>
+          <a:p>
+            <a:pPr algn="l"/>
+            <a:r>
+              <a:rPr sz="2600" b="1">
+                <a:solidFill>
+                  <a:srgbClr val="FFFFFF"/>
+                </a:solidFill>
+                <a:latin typeface="Segoe UI"/>
+              </a:rPr>
+              <a:t>9-Bucket Architecture + Downsampling Flow</a:t>
+            </a:r>
+          </a:p>
+        </p:txBody>
+      </p:sp>
+      <p:sp>
+        <p:nvSpPr>
+          <p:cNvPr id="8" name="TextBox 7"/>
+          <p:cNvSpPr txBox="1"/>
+          <p:nvPr/>
+        </p:nvSpPr>
+        <p:spPr>
+          <a:xfrm>
+            <a:off x="914400" y="713232"/>
+            <a:ext cx="10515600" cy="347472"/>
+          </a:xfrm>
+          <a:prstGeom prst="rect">
+            <a:avLst/>
+          </a:prstGeom>
+          <a:noFill/>
+        </p:spPr>
+        <p:txBody>
+          <a:bodyPr wrap="square">
+            <a:spAutoFit/>
+          </a:bodyPr>
+          <a:lstStyle/>
+          <a:p>
+            <a:pPr algn="l"/>
+            <a:r>
+              <a:rPr sz="1300" b="0">
+                <a:solidFill>
+                  <a:srgbClr val="B0C4DE"/>
+                </a:solidFill>
+                <a:latin typeface="Sarabun"/>
+              </a:rPr>
+              <a:t>การแบ่ง Bucket ตาม Tier และการบีบอัดข้อมูล (Flux Tasks)</a:t>
+            </a:r>
+          </a:p>
+        </p:txBody>
+      </p:sp>
+      <p:pic>
+        <p:nvPicPr>
+          <p:cNvPr id="9" name="Picture 8" descr="diag_A3.png"/>
+          <p:cNvPicPr>
+            <a:picLocks noChangeAspect="1"/>
+          </p:cNvPicPr>
+          <p:nvPr/>
+        </p:nvPicPr>
+        <p:blipFill>
+          <a:blip r:embed="rId2"/>
+          <a:stretch>
+            <a:fillRect/>
+          </a:stretch>
+        </p:blipFill>
+        <p:spPr>
+          <a:xfrm>
+            <a:off x="182880" y="1143000"/>
+            <a:ext cx="5694006" cy="5303520"/>
+          </a:xfrm>
+          <a:prstGeom prst="rect">
+            <a:avLst/>
+          </a:prstGeom>
+        </p:spPr>
+      </p:pic>
+      <p:sp>
+        <p:nvSpPr>
+          <p:cNvPr id="10" name="Rectangle 9"/>
+          <p:cNvSpPr/>
+          <p:nvPr/>
+        </p:nvSpPr>
+        <p:spPr>
+          <a:xfrm>
+            <a:off x="8138160" y="1143000"/>
+            <a:ext cx="3840480" cy="5303520"/>
+          </a:xfrm>
+          <a:prstGeom prst="rect">
+            <a:avLst/>
+          </a:prstGeom>
+          <a:solidFill>
+            <a:srgbClr val="162A44"/>
+          </a:solidFill>
+          <a:ln>
+            <a:noFill/>
+          </a:ln>
+        </p:spPr>
+        <p:style>
+          <a:lnRef idx="1">
+            <a:schemeClr val="accent1"/>
+          </a:lnRef>
+          <a:fillRef idx="3">
+            <a:schemeClr val="accent1"/>
+          </a:fillRef>
+          <a:effectRef idx="2">
+            <a:schemeClr val="accent1"/>
+          </a:effectRef>
+          <a:fontRef idx="minor">
+            <a:schemeClr val="lt1"/>
+          </a:fontRef>
+        </p:style>
+        <p:txBody>
+          <a:bodyPr rtlCol="0" anchor="ctr"/>
+          <a:lstStyle/>
+          <a:p>
+            <a:pPr algn="ctr"/>
+          </a:p>
+        </p:txBody>
+      </p:sp>
+      <p:sp>
+        <p:nvSpPr>
+          <p:cNvPr id="11" name="Rectangle 10"/>
+          <p:cNvSpPr/>
+          <p:nvPr/>
+        </p:nvSpPr>
+        <p:spPr>
+          <a:xfrm>
+            <a:off x="8138160" y="1143000"/>
+            <a:ext cx="3840480" cy="54864"/>
+          </a:xfrm>
+          <a:prstGeom prst="rect">
+            <a:avLst/>
+          </a:prstGeom>
+          <a:solidFill>
+            <a:srgbClr val="00E596"/>
+          </a:solidFill>
+          <a:ln>
+            <a:noFill/>
+          </a:ln>
+        </p:spPr>
+        <p:style>
+          <a:lnRef idx="1">
+            <a:schemeClr val="accent1"/>
+          </a:lnRef>
+          <a:fillRef idx="3">
+            <a:schemeClr val="accent1"/>
+          </a:fillRef>
+          <a:effectRef idx="2">
+            <a:schemeClr val="accent1"/>
+          </a:effectRef>
+          <a:fontRef idx="minor">
+            <a:schemeClr val="lt1"/>
+          </a:fontRef>
+        </p:style>
+        <p:txBody>
+          <a:bodyPr rtlCol="0" anchor="ctr"/>
+          <a:lstStyle/>
+          <a:p>
+            <a:pPr algn="ctr"/>
+          </a:p>
+        </p:txBody>
+      </p:sp>
+      <p:sp>
+        <p:nvSpPr>
+          <p:cNvPr id="12" name="TextBox 11"/>
+          <p:cNvSpPr txBox="1"/>
+          <p:nvPr/>
+        </p:nvSpPr>
+        <p:spPr>
+          <a:xfrm>
+            <a:off x="8275320" y="1207008"/>
+            <a:ext cx="3611880" cy="5120640"/>
+          </a:xfrm>
+          <a:prstGeom prst="rect">
+            <a:avLst/>
+          </a:prstGeom>
+          <a:noFill/>
+        </p:spPr>
+        <p:txBody>
+          <a:bodyPr wrap="square">
+            <a:spAutoFit/>
+          </a:bodyPr>
+          <a:lstStyle/>
+          <a:p>
+            <a:r>
+              <a:rPr sz="1400" b="1">
+                <a:solidFill>
+                  <a:srgbClr val="00E596"/>
+                </a:solidFill>
+                <a:latin typeface="Sarabun"/>
+              </a:rPr>
+              <a:t>Bucket Reference</a:t>
+            </a:r>
+          </a:p>
+          <a:p>
+            <a:pPr algn="l"/>
+            <a:r>
+              <a:rPr sz="1200" b="0">
+                <a:solidFill>
+                  <a:srgbClr val="FFFFFF"/>
+                </a:solidFill>
+                <a:latin typeface="Segoe UI"/>
+              </a:rPr>
+              <a:t>• ## Raw Buckets (1 second)</a:t>
+            </a:r>
+          </a:p>
+          <a:p>
+            <a:pPr algn="l"/>
+            <a:r>
+              <a:rPr sz="1200" b="0">
+                <a:solidFill>
+                  <a:srgbClr val="FFFFFF"/>
+                </a:solidFill>
+                <a:latin typeface="Segoe UI"/>
+              </a:rPr>
+              <a:t>• power_data_free: Retention 7d</a:t>
+            </a:r>
+          </a:p>
+          <a:p>
+            <a:pPr algn="l"/>
+            <a:r>
+              <a:rPr sz="1200" b="0">
+                <a:solidFill>
+                  <a:srgbClr val="FFFFFF"/>
+                </a:solidFill>
+                <a:latin typeface="Segoe UI"/>
+              </a:rPr>
+              <a:t>• power_data_pro: Retention 90d</a:t>
+            </a:r>
+          </a:p>
+          <a:p>
+            <a:pPr algn="l"/>
+            <a:r>
+              <a:rPr sz="1200" b="0">
+                <a:solidFill>
+                  <a:srgbClr val="FFFFFF"/>
+                </a:solidFill>
+                <a:latin typeface="Segoe UI"/>
+              </a:rPr>
+              <a:t>• power_data_enterprise: Retention 365d</a:t>
+            </a:r>
+          </a:p>
+          <a:p>
+            <a:pPr algn="l"/>
+            <a:r>
+              <a:rPr sz="1200" b="0">
+                <a:solidFill>
+                  <a:srgbClr val="FFFFFF"/>
+                </a:solidFill>
+                <a:latin typeface="Segoe UI"/>
+              </a:rPr>
+              <a:t>• ## 1-minute Buckets</a:t>
+            </a:r>
+          </a:p>
+          <a:p>
+            <a:pPr algn="l"/>
+            <a:r>
+              <a:rPr sz="1200" b="0">
+                <a:solidFill>
+                  <a:srgbClr val="FFFFFF"/>
+                </a:solidFill>
+                <a:latin typeface="Segoe UI"/>
+              </a:rPr>
+              <a:t>• power_data_1m_free: Retention 30d</a:t>
+            </a:r>
+          </a:p>
+          <a:p>
+            <a:pPr algn="l"/>
+            <a:r>
+              <a:rPr sz="1200" b="0">
+                <a:solidFill>
+                  <a:srgbClr val="FFFFFF"/>
+                </a:solidFill>
+                <a:latin typeface="Segoe UI"/>
+              </a:rPr>
+              <a:t>• power_data_1m_pro: Retention 1yr</a:t>
+            </a:r>
+          </a:p>
+          <a:p>
+            <a:pPr algn="l"/>
+            <a:r>
+              <a:rPr sz="1200" b="0">
+                <a:solidFill>
+                  <a:srgbClr val="FFFFFF"/>
+                </a:solidFill>
+                <a:latin typeface="Segoe UI"/>
+              </a:rPr>
+              <a:t>• power_data_1m_enterprise: Retention inf</a:t>
+            </a:r>
+          </a:p>
+          <a:p>
+            <a:pPr algn="l"/>
+            <a:r>
+              <a:rPr sz="1200" b="0">
+                <a:solidFill>
+                  <a:srgbClr val="FFFFFF"/>
+                </a:solidFill>
+                <a:latin typeface="Segoe UI"/>
+              </a:rPr>
+              <a:t>• ## 1-hour Buckets</a:t>
+            </a:r>
+          </a:p>
+          <a:p>
+            <a:pPr algn="l"/>
+            <a:r>
+              <a:rPr sz="1200" b="0">
+                <a:solidFill>
+                  <a:srgbClr val="FFFFFF"/>
+                </a:solidFill>
+                <a:latin typeface="Segoe UI"/>
+              </a:rPr>
+              <a:t>• power_data_1h_free: Retention 1yr</a:t>
+            </a:r>
+          </a:p>
+          <a:p>
+            <a:pPr algn="l"/>
+            <a:r>
+              <a:rPr sz="1200" b="0">
+                <a:solidFill>
+                  <a:srgbClr val="FFFFFF"/>
+                </a:solidFill>
+                <a:latin typeface="Segoe UI"/>
+              </a:rPr>
+              <a:t>• power_data_1h_pro: Retention 3yr</a:t>
+            </a:r>
+          </a:p>
+          <a:p>
+            <a:pPr algn="l"/>
+            <a:r>
+              <a:rPr sz="1200" b="0">
+                <a:solidFill>
+                  <a:srgbClr val="FFFFFF"/>
+                </a:solidFill>
+                <a:latin typeface="Segoe UI"/>
+              </a:rPr>
+              <a:t>• power_data_1h_enterprise: Retention inf</a:t>
+            </a:r>
+          </a:p>
+          <a:p>
+            <a:pPr algn="l"/>
+            <a:r>
+              <a:rPr sz="1200" b="0">
+                <a:solidFill>
+                  <a:srgbClr val="FFFFFF"/>
+                </a:solidFill>
+                <a:latin typeface="Sarabun"/>
+              </a:rPr>
+              <a:t>• ## Total: 9 Buckets fixed ไม่ว่า Scale เท่าไหร่</a:t>
+            </a:r>
+          </a:p>
+        </p:txBody>
+      </p:sp>
+    </p:spTree>
+  </p:cSld>
+  <p:clrMapOvr>
+    <a:masterClrMapping/>
+  </p:clrMapOvr>
+</p:sld>
+</file>
+
+<file path=ppt/slides/slide14.xml><?xml version="1.0" encoding="utf-8"?>
+<p:sld xmlns:a="http://schemas.openxmlformats.org/drawingml/2006/main" xmlns:p="http://schemas.openxmlformats.org/presentationml/2006/main" xmlns:r="http://schemas.openxmlformats.org/officeDocument/2006/relationships">
+  <p:cSld>
+    <p:bg>
+      <p:bgPr>
+        <a:solidFill>
+          <a:srgbClr val="0D1B2A"/>
+        </a:solidFill>
+        <a:effectLst/>
+      </p:bgPr>
+    </p:bg>
+    <p:spTree>
+      <p:nvGrpSpPr>
+        <p:cNvPr id="1" name=""/>
+        <p:cNvGrpSpPr/>
+        <p:nvPr/>
+      </p:nvGrpSpPr>
+      <p:grpSpPr/>
+      <p:sp>
+        <p:nvSpPr>
+          <p:cNvPr id="2" name="Rectangle 1"/>
+          <p:cNvSpPr/>
+          <p:nvPr/>
+        </p:nvSpPr>
+        <p:spPr>
+          <a:xfrm>
+            <a:off x="0" y="0"/>
+            <a:ext cx="12188952" cy="1097280"/>
+          </a:xfrm>
+          <a:prstGeom prst="rect">
+            <a:avLst/>
+          </a:prstGeom>
+          <a:solidFill>
+            <a:srgbClr val="1E3A5F"/>
+          </a:solidFill>
+          <a:ln>
+            <a:noFill/>
+          </a:ln>
+        </p:spPr>
+        <p:style>
+          <a:lnRef idx="1">
+            <a:schemeClr val="accent1"/>
+          </a:lnRef>
+          <a:fillRef idx="3">
+            <a:schemeClr val="accent1"/>
+          </a:fillRef>
+          <a:effectRef idx="2">
+            <a:schemeClr val="accent1"/>
+          </a:effectRef>
+          <a:fontRef idx="minor">
+            <a:schemeClr val="lt1"/>
+          </a:fontRef>
+        </p:style>
+        <p:txBody>
+          <a:bodyPr rtlCol="0" anchor="ctr"/>
+          <a:lstStyle/>
+          <a:p>
+            <a:pPr algn="ctr"/>
+          </a:p>
+        </p:txBody>
+      </p:sp>
+      <p:sp>
+        <p:nvSpPr>
+          <p:cNvPr id="3" name="Rectangle 2"/>
+          <p:cNvSpPr/>
+          <p:nvPr/>
+        </p:nvSpPr>
+        <p:spPr>
+          <a:xfrm>
+            <a:off x="0" y="0"/>
+            <a:ext cx="73152" cy="1097280"/>
+          </a:xfrm>
+          <a:prstGeom prst="rect">
+            <a:avLst/>
+          </a:prstGeom>
+          <a:solidFill>
+            <a:srgbClr val="FFC800"/>
+          </a:solidFill>
+          <a:ln>
+            <a:noFill/>
+          </a:ln>
+        </p:spPr>
+        <p:style>
+          <a:lnRef idx="1">
+            <a:schemeClr val="accent1"/>
+          </a:lnRef>
+          <a:fillRef idx="3">
+            <a:schemeClr val="accent1"/>
+          </a:fillRef>
+          <a:effectRef idx="2">
+            <a:schemeClr val="accent1"/>
+          </a:effectRef>
+          <a:fontRef idx="minor">
+            <a:schemeClr val="lt1"/>
+          </a:fontRef>
+        </p:style>
+        <p:txBody>
+          <a:bodyPr rtlCol="0" anchor="ctr"/>
+          <a:lstStyle/>
+          <a:p>
+            <a:pPr algn="ctr"/>
+          </a:p>
+        </p:txBody>
+      </p:sp>
+      <p:sp>
+        <p:nvSpPr>
+          <p:cNvPr id="4" name="Rectangle 3"/>
+          <p:cNvSpPr/>
+          <p:nvPr/>
+        </p:nvSpPr>
+        <p:spPr>
+          <a:xfrm>
+            <a:off x="137160" y="137160"/>
+            <a:ext cx="640080" cy="502920"/>
+          </a:xfrm>
+          <a:prstGeom prst="rect">
+            <a:avLst/>
+          </a:prstGeom>
+          <a:solidFill>
+            <a:srgbClr val="FFC800"/>
+          </a:solidFill>
+          <a:ln>
+            <a:noFill/>
+          </a:ln>
+        </p:spPr>
+        <p:style>
+          <a:lnRef idx="1">
+            <a:schemeClr val="accent1"/>
+          </a:lnRef>
+          <a:fillRef idx="3">
+            <a:schemeClr val="accent1"/>
+          </a:fillRef>
+          <a:effectRef idx="2">
+            <a:schemeClr val="accent1"/>
+          </a:effectRef>
+          <a:fontRef idx="minor">
+            <a:schemeClr val="lt1"/>
+          </a:fontRef>
+        </p:style>
+        <p:txBody>
+          <a:bodyPr rtlCol="0" anchor="ctr"/>
+          <a:lstStyle/>
+          <a:p>
+            <a:pPr algn="ctr"/>
+          </a:p>
+        </p:txBody>
+      </p:sp>
+      <p:sp>
+        <p:nvSpPr>
+          <p:cNvPr id="5" name="TextBox 4"/>
+          <p:cNvSpPr txBox="1"/>
+          <p:nvPr/>
+        </p:nvSpPr>
+        <p:spPr>
+          <a:xfrm>
+            <a:off x="137160" y="137160"/>
+            <a:ext cx="640080" cy="502920"/>
+          </a:xfrm>
+          <a:prstGeom prst="rect">
+            <a:avLst/>
+          </a:prstGeom>
+          <a:noFill/>
+        </p:spPr>
+        <p:txBody>
+          <a:bodyPr wrap="square">
+            <a:spAutoFit/>
+          </a:bodyPr>
+          <a:lstStyle/>
+          <a:p>
+            <a:pPr algn="ctr"/>
+            <a:r>
+              <a:rPr sz="2000" b="1">
+                <a:solidFill>
+                  <a:srgbClr val="0D1B2A"/>
+                </a:solidFill>
+                <a:latin typeface="Segoe UI"/>
+              </a:rPr>
+              <a:t>A4</a:t>
+            </a:r>
+          </a:p>
+        </p:txBody>
+      </p:sp>
+      <p:sp>
+        <p:nvSpPr>
+          <p:cNvPr id="6" name="TextBox 5"/>
+          <p:cNvSpPr txBox="1"/>
+          <p:nvPr/>
+        </p:nvSpPr>
+        <p:spPr>
+          <a:xfrm>
+            <a:off x="137160" y="621792"/>
+            <a:ext cx="640080" cy="274320"/>
+          </a:xfrm>
+          <a:prstGeom prst="rect">
+            <a:avLst/>
+          </a:prstGeom>
+          <a:noFill/>
+        </p:spPr>
+        <p:txBody>
+          <a:bodyPr wrap="square">
+            <a:spAutoFit/>
+          </a:bodyPr>
+          <a:lstStyle/>
+          <a:p>
+            <a:pPr algn="ctr"/>
+            <a:r>
+              <a:rPr sz="800" b="0">
+                <a:solidFill>
+                  <a:srgbClr val="FFC800"/>
+                </a:solidFill>
+                <a:latin typeface="Segoe UI"/>
+              </a:rPr>
+              <a:t>APPENDIX</a:t>
+            </a:r>
+          </a:p>
+        </p:txBody>
+      </p:sp>
+      <p:sp>
+        <p:nvSpPr>
+          <p:cNvPr id="7" name="TextBox 6"/>
+          <p:cNvSpPr txBox="1"/>
+          <p:nvPr/>
+        </p:nvSpPr>
+        <p:spPr>
+          <a:xfrm>
+            <a:off x="914400" y="73152"/>
+            <a:ext cx="10515600" cy="640080"/>
+          </a:xfrm>
+          <a:prstGeom prst="rect">
+            <a:avLst/>
+          </a:prstGeom>
+          <a:noFill/>
+        </p:spPr>
+        <p:txBody>
+          <a:bodyPr wrap="square">
+            <a:spAutoFit/>
+          </a:bodyPr>
+          <a:lstStyle/>
+          <a:p>
+            <a:pPr algn="l"/>
+            <a:r>
+              <a:rPr sz="2600" b="1">
+                <a:solidFill>
+                  <a:srgbClr val="FFFFFF"/>
+                </a:solidFill>
+                <a:latin typeface="Segoe UI"/>
+              </a:rPr>
+              <a:t>Data Migration Flow (Upgrade / Downgrade)</a:t>
+            </a:r>
+          </a:p>
+        </p:txBody>
+      </p:sp>
+      <p:sp>
+        <p:nvSpPr>
+          <p:cNvPr id="8" name="TextBox 7"/>
+          <p:cNvSpPr txBox="1"/>
+          <p:nvPr/>
+        </p:nvSpPr>
+        <p:spPr>
+          <a:xfrm>
+            <a:off x="914400" y="713232"/>
+            <a:ext cx="10515600" cy="347472"/>
+          </a:xfrm>
+          <a:prstGeom prst="rect">
+            <a:avLst/>
+          </a:prstGeom>
+          <a:noFill/>
+        </p:spPr>
+        <p:txBody>
+          <a:bodyPr wrap="square">
+            <a:spAutoFit/>
+          </a:bodyPr>
+          <a:lstStyle/>
+          <a:p>
+            <a:pPr algn="l"/>
+            <a:r>
+              <a:rPr sz="1300" b="0">
+                <a:solidFill>
+                  <a:srgbClr val="B0C4DE"/>
+                </a:solidFill>
+                <a:latin typeface="Sarabun"/>
+              </a:rPr>
+              <a:t>ขั้นตอนการย้ายข้อมูล Background Job และ union() API</a:t>
+            </a:r>
+          </a:p>
+        </p:txBody>
+      </p:sp>
+      <p:pic>
+        <p:nvPicPr>
+          <p:cNvPr id="9" name="Picture 8" descr="diag_A4.png"/>
+          <p:cNvPicPr>
+            <a:picLocks noChangeAspect="1"/>
+          </p:cNvPicPr>
+          <p:nvPr/>
+        </p:nvPicPr>
+        <p:blipFill>
+          <a:blip r:embed="rId2"/>
+          <a:stretch>
+            <a:fillRect/>
+          </a:stretch>
+        </p:blipFill>
+        <p:spPr>
+          <a:xfrm>
+            <a:off x="182880" y="1805882"/>
+            <a:ext cx="7772400" cy="3977754"/>
+          </a:xfrm>
+          <a:prstGeom prst="rect">
+            <a:avLst/>
+          </a:prstGeom>
+        </p:spPr>
+      </p:pic>
+      <p:sp>
+        <p:nvSpPr>
+          <p:cNvPr id="10" name="Rectangle 9"/>
+          <p:cNvSpPr/>
+          <p:nvPr/>
+        </p:nvSpPr>
+        <p:spPr>
+          <a:xfrm>
+            <a:off x="8138160" y="1143000"/>
+            <a:ext cx="3840480" cy="5303520"/>
+          </a:xfrm>
+          <a:prstGeom prst="rect">
+            <a:avLst/>
+          </a:prstGeom>
+          <a:solidFill>
+            <a:srgbClr val="162A44"/>
+          </a:solidFill>
+          <a:ln>
+            <a:noFill/>
+          </a:ln>
+        </p:spPr>
+        <p:style>
+          <a:lnRef idx="1">
+            <a:schemeClr val="accent1"/>
+          </a:lnRef>
+          <a:fillRef idx="3">
+            <a:schemeClr val="accent1"/>
+          </a:fillRef>
+          <a:effectRef idx="2">
+            <a:schemeClr val="accent1"/>
+          </a:effectRef>
+          <a:fontRef idx="minor">
+            <a:schemeClr val="lt1"/>
+          </a:fontRef>
+        </p:style>
+        <p:txBody>
+          <a:bodyPr rtlCol="0" anchor="ctr"/>
+          <a:lstStyle/>
+          <a:p>
+            <a:pPr algn="ctr"/>
+          </a:p>
+        </p:txBody>
+      </p:sp>
+      <p:sp>
+        <p:nvSpPr>
+          <p:cNvPr id="11" name="Rectangle 10"/>
+          <p:cNvSpPr/>
+          <p:nvPr/>
+        </p:nvSpPr>
+        <p:spPr>
+          <a:xfrm>
+            <a:off x="8138160" y="1143000"/>
+            <a:ext cx="3840480" cy="54864"/>
+          </a:xfrm>
+          <a:prstGeom prst="rect">
+            <a:avLst/>
+          </a:prstGeom>
+          <a:solidFill>
+            <a:srgbClr val="FFC800"/>
+          </a:solidFill>
+          <a:ln>
+            <a:noFill/>
+          </a:ln>
+        </p:spPr>
+        <p:style>
+          <a:lnRef idx="1">
+            <a:schemeClr val="accent1"/>
+          </a:lnRef>
+          <a:fillRef idx="3">
+            <a:schemeClr val="accent1"/>
+          </a:fillRef>
+          <a:effectRef idx="2">
+            <a:schemeClr val="accent1"/>
+          </a:effectRef>
+          <a:fontRef idx="minor">
+            <a:schemeClr val="lt1"/>
+          </a:fontRef>
+        </p:style>
+        <p:txBody>
+          <a:bodyPr rtlCol="0" anchor="ctr"/>
+          <a:lstStyle/>
+          <a:p>
+            <a:pPr algn="ctr"/>
+          </a:p>
+        </p:txBody>
+      </p:sp>
+      <p:sp>
+        <p:nvSpPr>
+          <p:cNvPr id="12" name="TextBox 11"/>
+          <p:cNvSpPr txBox="1"/>
+          <p:nvPr/>
+        </p:nvSpPr>
+        <p:spPr>
+          <a:xfrm>
+            <a:off x="8275320" y="1207008"/>
+            <a:ext cx="3611880" cy="5120640"/>
+          </a:xfrm>
+          <a:prstGeom prst="rect">
+            <a:avLst/>
+          </a:prstGeom>
+          <a:noFill/>
+        </p:spPr>
+        <p:txBody>
+          <a:bodyPr wrap="square">
+            <a:spAutoFit/>
+          </a:bodyPr>
+          <a:lstStyle/>
+          <a:p>
+            <a:r>
+              <a:rPr sz="1400" b="1">
+                <a:solidFill>
+                  <a:srgbClr val="FFC800"/>
+                </a:solidFill>
+                <a:latin typeface="Sarabun"/>
+              </a:rPr>
+              <a:t>Migration Notes</a:t>
+            </a:r>
+          </a:p>
+          <a:p>
+            <a:pPr algn="l"/>
+            <a:r>
+              <a:rPr sz="1200" b="0">
+                <a:solidFill>
+                  <a:srgbClr val="FFFFFF"/>
+                </a:solidFill>
+                <a:latin typeface="Sarabun"/>
+              </a:rPr>
+              <a:t>• ## Upgrade Free → Pro</a:t>
+            </a:r>
+          </a:p>
+          <a:p>
+            <a:pPr algn="l"/>
+            <a:r>
+              <a:rPr sz="1200" b="0">
+                <a:solidFill>
+                  <a:srgbClr val="FFFFFF"/>
+                </a:solidFill>
+                <a:latin typeface="Sarabun"/>
+              </a:rPr>
+              <a:t>• ข้อมูลใหม่ไหลถัง Pro ทันทีผ่าน Redis cache</a:t>
+            </a:r>
+          </a:p>
+          <a:p>
+            <a:pPr algn="l"/>
+            <a:r>
+              <a:rPr sz="1200" b="0">
+                <a:solidFill>
+                  <a:srgbClr val="FFFFFF"/>
+                </a:solidFill>
+                <a:latin typeface="Sarabun"/>
+              </a:rPr>
+              <a:t>• Background Job ก๊อปปี้ 7d ข้อมูลจาก Free (~48 MB)</a:t>
+            </a:r>
+          </a:p>
+          <a:p>
+            <a:pPr algn="l"/>
+            <a:r>
+              <a:rPr sz="1200" b="0">
+                <a:solidFill>
+                  <a:srgbClr val="FFFFFF"/>
+                </a:solidFill>
+                <a:latin typeface="Sarabun"/>
+              </a:rPr>
+              <a:t>• union() ป้องกันกราฟแหว่งระหว่างรอ Job</a:t>
+            </a:r>
+          </a:p>
+          <a:p>
+            <a:pPr algn="l"/>
+            <a:r>
+              <a:rPr sz="1200" b="0">
+                <a:solidFill>
+                  <a:srgbClr val="FFFFFF"/>
+                </a:solidFill>
+                <a:latin typeface="Sarabun"/>
+              </a:rPr>
+              <a:t>• ## Upgrade Pro → Enterprise</a:t>
+            </a:r>
+          </a:p>
+          <a:p>
+            <a:pPr algn="l"/>
+            <a:r>
+              <a:rPr sz="1200" b="0">
+                <a:solidFill>
+                  <a:srgbClr val="FFFFFF"/>
+                </a:solidFill>
+                <a:latin typeface="Sarabun"/>
+              </a:rPr>
+              <a:t>• Job ก๊อปปี้ 90d ข้อมูล (~658 MB per device)</a:t>
+            </a:r>
+          </a:p>
+          <a:p>
+            <a:pPr algn="l"/>
+            <a:r>
+              <a:rPr sz="1200" b="0">
+                <a:solidFill>
+                  <a:srgbClr val="FFFFFF"/>
+                </a:solidFill>
+                <a:latin typeface="Sarabun"/>
+              </a:rPr>
+              <a:t>• ใช้ Queue ทยอยทำเพื่อไม่กระทบ API performance</a:t>
+            </a:r>
+          </a:p>
+          <a:p>
+            <a:pPr algn="l"/>
+            <a:r>
+              <a:rPr sz="1200" b="0">
+                <a:solidFill>
+                  <a:srgbClr val="FFFFFF"/>
+                </a:solidFill>
+                <a:latin typeface="Segoe UI"/>
+              </a:rPr>
+              <a:t>• ## Downgrade / Expire</a:t>
+            </a:r>
+          </a:p>
+          <a:p>
+            <a:pPr algn="l"/>
+            <a:r>
+              <a:rPr sz="1200" b="0">
+                <a:solidFill>
+                  <a:srgbClr val="FFFFFF"/>
+                </a:solidFill>
+                <a:latin typeface="Sarabun"/>
+              </a:rPr>
+              <a:t>• ปล่อยข้อมูลเก่าทิ้ง InfluxDB ลบเองตาม Retention</a:t>
+            </a:r>
+          </a:p>
+          <a:p>
+            <a:pPr algn="l"/>
+            <a:r>
+              <a:rPr sz="1200" b="0">
+                <a:solidFill>
+                  <a:srgbClr val="FFFFFF"/>
+                </a:solidFill>
+                <a:latin typeface="Sarabun"/>
+              </a:rPr>
+              <a:t>• union() ดึงทั้ง 2 ถังอีก 7 วันเพื่อกราฟต่อเนื่อง</a:t>
+            </a:r>
+          </a:p>
+          <a:p>
+            <a:pPr algn="l"/>
+            <a:r>
+              <a:rPr sz="1200" b="0">
+                <a:solidFill>
+                  <a:srgbClr val="FFFFFF"/>
+                </a:solidFill>
+                <a:latin typeface="Segoe UI"/>
+              </a:rPr>
+              <a:t>• ## API Paywall</a:t>
+            </a:r>
+          </a:p>
+          <a:p>
+            <a:pPr algn="l"/>
+            <a:r>
+              <a:rPr sz="1200" b="0">
+                <a:solidFill>
+                  <a:srgbClr val="FFFFFF"/>
+                </a:solidFill>
+                <a:latin typeface="Sarabun"/>
+              </a:rPr>
+              <a:t>• range(start: -7d) ทำให้ข้อมูลเก่ากว่า 7d ไม่ถูกดึง</a:t>
+            </a:r>
+          </a:p>
+        </p:txBody>
+      </p:sp>
+    </p:spTree>
+  </p:cSld>
+  <p:clrMapOvr>
+    <a:masterClrMapping/>
+  </p:clrMapOvr>
+</p:sld>
+</file>
+
+<file path=ppt/slides/slide15.xml><?xml version="1.0" encoding="utf-8"?>
+<p:sld xmlns:a="http://schemas.openxmlformats.org/drawingml/2006/main" xmlns:p="http://schemas.openxmlformats.org/presentationml/2006/main" xmlns:r="http://schemas.openxmlformats.org/officeDocument/2006/relationships">
+  <p:cSld>
+    <p:bg>
+      <p:bgPr>
+        <a:solidFill>
+          <a:srgbClr val="0D1B2A"/>
+        </a:solidFill>
+        <a:effectLst/>
+      </p:bgPr>
+    </p:bg>
+    <p:spTree>
+      <p:nvGrpSpPr>
+        <p:cNvPr id="1" name=""/>
+        <p:cNvGrpSpPr/>
+        <p:nvPr/>
+      </p:nvGrpSpPr>
+      <p:grpSpPr/>
+      <p:sp>
+        <p:nvSpPr>
+          <p:cNvPr id="2" name="Rectangle 1"/>
+          <p:cNvSpPr/>
+          <p:nvPr/>
+        </p:nvSpPr>
+        <p:spPr>
+          <a:xfrm>
+            <a:off x="0" y="0"/>
+            <a:ext cx="12188952" cy="1097280"/>
+          </a:xfrm>
+          <a:prstGeom prst="rect">
+            <a:avLst/>
+          </a:prstGeom>
+          <a:solidFill>
+            <a:srgbClr val="1E3A5F"/>
+          </a:solidFill>
+          <a:ln>
+            <a:noFill/>
+          </a:ln>
+        </p:spPr>
+        <p:style>
+          <a:lnRef idx="1">
+            <a:schemeClr val="accent1"/>
+          </a:lnRef>
+          <a:fillRef idx="3">
+            <a:schemeClr val="accent1"/>
+          </a:fillRef>
+          <a:effectRef idx="2">
+            <a:schemeClr val="accent1"/>
+          </a:effectRef>
+          <a:fontRef idx="minor">
+            <a:schemeClr val="lt1"/>
+          </a:fontRef>
+        </p:style>
+        <p:txBody>
+          <a:bodyPr rtlCol="0" anchor="ctr"/>
+          <a:lstStyle/>
+          <a:p>
+            <a:pPr algn="ctr"/>
+          </a:p>
+        </p:txBody>
+      </p:sp>
+      <p:sp>
+        <p:nvSpPr>
+          <p:cNvPr id="3" name="Rectangle 2"/>
+          <p:cNvSpPr/>
+          <p:nvPr/>
+        </p:nvSpPr>
+        <p:spPr>
+          <a:xfrm>
+            <a:off x="0" y="0"/>
+            <a:ext cx="73152" cy="1097280"/>
+          </a:xfrm>
+          <a:prstGeom prst="rect">
+            <a:avLst/>
+          </a:prstGeom>
+          <a:solidFill>
+            <a:srgbClr val="008BFF"/>
+          </a:solidFill>
+          <a:ln>
+            <a:noFill/>
+          </a:ln>
+        </p:spPr>
+        <p:style>
+          <a:lnRef idx="1">
+            <a:schemeClr val="accent1"/>
+          </a:lnRef>
+          <a:fillRef idx="3">
+            <a:schemeClr val="accent1"/>
+          </a:fillRef>
+          <a:effectRef idx="2">
+            <a:schemeClr val="accent1"/>
+          </a:effectRef>
+          <a:fontRef idx="minor">
+            <a:schemeClr val="lt1"/>
+          </a:fontRef>
+        </p:style>
+        <p:txBody>
+          <a:bodyPr rtlCol="0" anchor="ctr"/>
+          <a:lstStyle/>
+          <a:p>
+            <a:pPr algn="ctr"/>
+          </a:p>
+        </p:txBody>
+      </p:sp>
+      <p:sp>
+        <p:nvSpPr>
+          <p:cNvPr id="4" name="Rectangle 3"/>
+          <p:cNvSpPr/>
+          <p:nvPr/>
+        </p:nvSpPr>
+        <p:spPr>
+          <a:xfrm>
+            <a:off x="137160" y="137160"/>
+            <a:ext cx="640080" cy="502920"/>
+          </a:xfrm>
+          <a:prstGeom prst="rect">
+            <a:avLst/>
+          </a:prstGeom>
+          <a:solidFill>
+            <a:srgbClr val="008BFF"/>
+          </a:solidFill>
+          <a:ln>
+            <a:noFill/>
+          </a:ln>
+        </p:spPr>
+        <p:style>
+          <a:lnRef idx="1">
+            <a:schemeClr val="accent1"/>
+          </a:lnRef>
+          <a:fillRef idx="3">
+            <a:schemeClr val="accent1"/>
+          </a:fillRef>
+          <a:effectRef idx="2">
+            <a:schemeClr val="accent1"/>
+          </a:effectRef>
+          <a:fontRef idx="minor">
+            <a:schemeClr val="lt1"/>
+          </a:fontRef>
+        </p:style>
+        <p:txBody>
+          <a:bodyPr rtlCol="0" anchor="ctr"/>
+          <a:lstStyle/>
+          <a:p>
+            <a:pPr algn="ctr"/>
+          </a:p>
+        </p:txBody>
+      </p:sp>
+      <p:sp>
+        <p:nvSpPr>
+          <p:cNvPr id="5" name="TextBox 4"/>
+          <p:cNvSpPr txBox="1"/>
+          <p:nvPr/>
+        </p:nvSpPr>
+        <p:spPr>
+          <a:xfrm>
+            <a:off x="137160" y="137160"/>
+            <a:ext cx="640080" cy="502920"/>
+          </a:xfrm>
+          <a:prstGeom prst="rect">
+            <a:avLst/>
+          </a:prstGeom>
+          <a:noFill/>
+        </p:spPr>
+        <p:txBody>
+          <a:bodyPr wrap="square">
+            <a:spAutoFit/>
+          </a:bodyPr>
+          <a:lstStyle/>
+          <a:p>
+            <a:pPr algn="ctr"/>
+            <a:r>
+              <a:rPr sz="2000" b="1">
+                <a:solidFill>
+                  <a:srgbClr val="0D1B2A"/>
+                </a:solidFill>
+                <a:latin typeface="Segoe UI"/>
+              </a:rPr>
+              <a:t>A5</a:t>
+            </a:r>
+          </a:p>
+        </p:txBody>
+      </p:sp>
+      <p:sp>
+        <p:nvSpPr>
+          <p:cNvPr id="6" name="TextBox 5"/>
+          <p:cNvSpPr txBox="1"/>
+          <p:nvPr/>
+        </p:nvSpPr>
+        <p:spPr>
+          <a:xfrm>
+            <a:off x="137160" y="621792"/>
+            <a:ext cx="640080" cy="274320"/>
+          </a:xfrm>
+          <a:prstGeom prst="rect">
+            <a:avLst/>
+          </a:prstGeom>
+          <a:noFill/>
+        </p:spPr>
+        <p:txBody>
+          <a:bodyPr wrap="square">
+            <a:spAutoFit/>
+          </a:bodyPr>
+          <a:lstStyle/>
+          <a:p>
+            <a:pPr algn="ctr"/>
+            <a:r>
+              <a:rPr sz="800" b="0">
+                <a:solidFill>
+                  <a:srgbClr val="008BFF"/>
+                </a:solidFill>
+                <a:latin typeface="Segoe UI"/>
+              </a:rPr>
+              <a:t>APPENDIX</a:t>
+            </a:r>
+          </a:p>
+        </p:txBody>
+      </p:sp>
+      <p:sp>
+        <p:nvSpPr>
+          <p:cNvPr id="7" name="TextBox 6"/>
+          <p:cNvSpPr txBox="1"/>
+          <p:nvPr/>
+        </p:nvSpPr>
+        <p:spPr>
+          <a:xfrm>
+            <a:off x="914400" y="73152"/>
+            <a:ext cx="10515600" cy="640080"/>
+          </a:xfrm>
+          <a:prstGeom prst="rect">
+            <a:avLst/>
+          </a:prstGeom>
+          <a:noFill/>
+        </p:spPr>
+        <p:txBody>
+          <a:bodyPr wrap="square">
+            <a:spAutoFit/>
+          </a:bodyPr>
+          <a:lstStyle/>
+          <a:p>
+            <a:pPr algn="l"/>
+            <a:r>
+              <a:rPr sz="2600" b="1">
+                <a:solidFill>
+                  <a:srgbClr val="FFFFFF"/>
+                </a:solidFill>
+                <a:latin typeface="Segoe UI"/>
+              </a:rPr>
+              <a:t>Downsampling Strategy</a:t>
+            </a:r>
+          </a:p>
+        </p:txBody>
+      </p:sp>
+      <p:sp>
+        <p:nvSpPr>
+          <p:cNvPr id="8" name="TextBox 7"/>
+          <p:cNvSpPr txBox="1"/>
+          <p:nvPr/>
+        </p:nvSpPr>
+        <p:spPr>
+          <a:xfrm>
+            <a:off x="914400" y="713232"/>
+            <a:ext cx="10515600" cy="347472"/>
+          </a:xfrm>
+          <a:prstGeom prst="rect">
+            <a:avLst/>
+          </a:prstGeom>
+          <a:noFill/>
+        </p:spPr>
+        <p:txBody>
+          <a:bodyPr wrap="square">
+            <a:spAutoFit/>
+          </a:bodyPr>
+          <a:lstStyle/>
+          <a:p>
+            <a:pPr algn="l"/>
+            <a:r>
+              <a:rPr sz="1300" b="0">
+                <a:solidFill>
+                  <a:srgbClr val="B0C4DE"/>
+                </a:solidFill>
+                <a:latin typeface="Sarabun"/>
+              </a:rPr>
+              <a:t>การบีบอัดข้อมูลจาก 1 วินาที → 1 นาที → 1 ชั่วโมง</a:t>
+            </a:r>
+          </a:p>
+        </p:txBody>
+      </p:sp>
+      <p:pic>
+        <p:nvPicPr>
+          <p:cNvPr id="9" name="Picture 8" descr="diag_A5.png"/>
+          <p:cNvPicPr>
+            <a:picLocks noChangeAspect="1"/>
+          </p:cNvPicPr>
+          <p:nvPr/>
+        </p:nvPicPr>
+        <p:blipFill>
+          <a:blip r:embed="rId2"/>
+          <a:stretch>
+            <a:fillRect/>
+          </a:stretch>
+        </p:blipFill>
+        <p:spPr>
+          <a:xfrm>
+            <a:off x="182880" y="3295068"/>
+            <a:ext cx="7772400" cy="999382"/>
+          </a:xfrm>
+          <a:prstGeom prst="rect">
+            <a:avLst/>
+          </a:prstGeom>
+        </p:spPr>
+      </p:pic>
+      <p:sp>
+        <p:nvSpPr>
+          <p:cNvPr id="10" name="Rectangle 9"/>
+          <p:cNvSpPr/>
+          <p:nvPr/>
+        </p:nvSpPr>
+        <p:spPr>
+          <a:xfrm>
+            <a:off x="8138160" y="1143000"/>
+            <a:ext cx="3840480" cy="5303520"/>
+          </a:xfrm>
+          <a:prstGeom prst="rect">
+            <a:avLst/>
+          </a:prstGeom>
+          <a:solidFill>
+            <a:srgbClr val="162A44"/>
+          </a:solidFill>
+          <a:ln>
+            <a:noFill/>
+          </a:ln>
+        </p:spPr>
+        <p:style>
+          <a:lnRef idx="1">
+            <a:schemeClr val="accent1"/>
+          </a:lnRef>
+          <a:fillRef idx="3">
+            <a:schemeClr val="accent1"/>
+          </a:fillRef>
+          <a:effectRef idx="2">
+            <a:schemeClr val="accent1"/>
+          </a:effectRef>
+          <a:fontRef idx="minor">
+            <a:schemeClr val="lt1"/>
+          </a:fontRef>
+        </p:style>
+        <p:txBody>
+          <a:bodyPr rtlCol="0" anchor="ctr"/>
+          <a:lstStyle/>
+          <a:p>
+            <a:pPr algn="ctr"/>
+          </a:p>
+        </p:txBody>
+      </p:sp>
+      <p:sp>
+        <p:nvSpPr>
+          <p:cNvPr id="11" name="Rectangle 10"/>
+          <p:cNvSpPr/>
+          <p:nvPr/>
+        </p:nvSpPr>
+        <p:spPr>
+          <a:xfrm>
+            <a:off x="8138160" y="1143000"/>
+            <a:ext cx="3840480" cy="54864"/>
+          </a:xfrm>
+          <a:prstGeom prst="rect">
+            <a:avLst/>
+          </a:prstGeom>
+          <a:solidFill>
+            <a:srgbClr val="008BFF"/>
+          </a:solidFill>
+          <a:ln>
+            <a:noFill/>
+          </a:ln>
+        </p:spPr>
+        <p:style>
+          <a:lnRef idx="1">
+            <a:schemeClr val="accent1"/>
+          </a:lnRef>
+          <a:fillRef idx="3">
+            <a:schemeClr val="accent1"/>
+          </a:fillRef>
+          <a:effectRef idx="2">
+            <a:schemeClr val="accent1"/>
+          </a:effectRef>
+          <a:fontRef idx="minor">
+            <a:schemeClr val="lt1"/>
+          </a:fontRef>
+        </p:style>
+        <p:txBody>
+          <a:bodyPr rtlCol="0" anchor="ctr"/>
+          <a:lstStyle/>
+          <a:p>
+            <a:pPr algn="ctr"/>
+          </a:p>
+        </p:txBody>
+      </p:sp>
+      <p:sp>
+        <p:nvSpPr>
+          <p:cNvPr id="12" name="TextBox 11"/>
+          <p:cNvSpPr txBox="1"/>
+          <p:nvPr/>
+        </p:nvSpPr>
+        <p:spPr>
+          <a:xfrm>
+            <a:off x="8275320" y="1207008"/>
+            <a:ext cx="3611880" cy="5120640"/>
+          </a:xfrm>
+          <a:prstGeom prst="rect">
+            <a:avLst/>
+          </a:prstGeom>
+          <a:noFill/>
+        </p:spPr>
+        <p:txBody>
+          <a:bodyPr wrap="square">
+            <a:spAutoFit/>
+          </a:bodyPr>
+          <a:lstStyle/>
+          <a:p>
+            <a:r>
+              <a:rPr sz="1400" b="1">
+                <a:solidFill>
+                  <a:srgbClr val="008BFF"/>
+                </a:solidFill>
+                <a:latin typeface="Sarabun"/>
+              </a:rPr>
+              <a:t>Downsampling Facts</a:t>
+            </a:r>
+          </a:p>
+          <a:p>
+            <a:pPr algn="l"/>
+            <a:r>
+              <a:rPr sz="1200" b="0">
+                <a:solidFill>
+                  <a:srgbClr val="FFFFFF"/>
+                </a:solidFill>
+                <a:latin typeface="Segoe UI"/>
+              </a:rPr>
+              <a:t>• ## Data Volume per Device/Month</a:t>
+            </a:r>
+          </a:p>
+          <a:p>
+            <a:pPr algn="l"/>
+            <a:r>
+              <a:rPr sz="1200" b="0">
+                <a:solidFill>
+                  <a:srgbClr val="FFFFFF"/>
+                </a:solidFill>
+                <a:latin typeface="Segoe UI"/>
+              </a:rPr>
+              <a:t>• Raw 1s: ~205 MB (compressed)</a:t>
+            </a:r>
+          </a:p>
+          <a:p>
+            <a:pPr algn="l"/>
+            <a:r>
+              <a:rPr sz="1200" b="0">
+                <a:solidFill>
+                  <a:srgbClr val="FFFFFF"/>
+                </a:solidFill>
+                <a:latin typeface="Segoe UI"/>
+              </a:rPr>
+              <a:t>• 1-min avg: ~3.4 MB (60x smaller)</a:t>
+            </a:r>
+          </a:p>
+          <a:p>
+            <a:pPr algn="l"/>
+            <a:r>
+              <a:rPr sz="1200" b="0">
+                <a:solidFill>
+                  <a:srgbClr val="FFFFFF"/>
+                </a:solidFill>
+                <a:latin typeface="Segoe UI"/>
+              </a:rPr>
+              <a:t>• 1-hour avg: ~57 KB (3,600x smaller)</a:t>
+            </a:r>
+          </a:p>
+          <a:p>
+            <a:pPr algn="l"/>
+            <a:r>
+              <a:rPr sz="1200" b="0">
+                <a:solidFill>
+                  <a:srgbClr val="FFFFFF"/>
+                </a:solidFill>
+                <a:latin typeface="Segoe UI"/>
+              </a:rPr>
+              <a:t>• ## Flux Task Details</a:t>
+            </a:r>
+          </a:p>
+          <a:p>
+            <a:pPr algn="l"/>
+            <a:r>
+              <a:rPr sz="1200" b="0">
+                <a:solidFill>
+                  <a:srgbClr val="FFFFFF"/>
+                </a:solidFill>
+                <a:latin typeface="Sarabun"/>
+              </a:rPr>
+              <a:t>• ใช้ mean() aggregate function</a:t>
+            </a:r>
+          </a:p>
+          <a:p>
+            <a:pPr algn="l"/>
+            <a:r>
+              <a:rPr sz="1200" b="0">
+                <a:solidFill>
+                  <a:srgbClr val="FFFFFF"/>
+                </a:solidFill>
+                <a:latin typeface="Sarabun"/>
+              </a:rPr>
+              <a:t>• Task 1: ทุก 1 ชม. — Raw → 1m bucket</a:t>
+            </a:r>
+          </a:p>
+          <a:p>
+            <a:pPr algn="l"/>
+            <a:r>
+              <a:rPr sz="1200" b="0">
+                <a:solidFill>
+                  <a:srgbClr val="FFFFFF"/>
+                </a:solidFill>
+                <a:latin typeface="Sarabun"/>
+              </a:rPr>
+              <a:t>• Task 2: ทุก 24 ชม. — 1m → 1h bucket</a:t>
+            </a:r>
+          </a:p>
+          <a:p>
+            <a:pPr algn="l"/>
+            <a:r>
+              <a:rPr sz="1200" b="0">
+                <a:solidFill>
+                  <a:srgbClr val="FFFFFF"/>
+                </a:solidFill>
+                <a:latin typeface="Segoe UI"/>
+              </a:rPr>
+              <a:t>• ## Why Flux Tasks not Python Cron?</a:t>
+            </a:r>
+          </a:p>
+          <a:p>
+            <a:pPr algn="l"/>
+            <a:r>
+              <a:rPr sz="1200" b="0">
+                <a:solidFill>
+                  <a:srgbClr val="FFFFFF"/>
+                </a:solidFill>
+                <a:latin typeface="Sarabun"/>
+              </a:rPr>
+              <a:t>• Built-in InfluxDB engine — ไม่ดึงข้อมูลออกมา</a:t>
+            </a:r>
+          </a:p>
+          <a:p>
+            <a:pPr algn="l"/>
+            <a:r>
+              <a:rPr sz="1200" b="0">
+                <a:solidFill>
+                  <a:srgbClr val="FFFFFF"/>
+                </a:solidFill>
+                <a:latin typeface="Sarabun"/>
+              </a:rPr>
+              <a:t>• ประหยัด Network I/O และ RAM มหาศาล</a:t>
+            </a:r>
+          </a:p>
+          <a:p>
+            <a:pPr algn="l"/>
+            <a:r>
+              <a:rPr sz="1200" b="0">
+                <a:solidFill>
+                  <a:srgbClr val="FFFFFF"/>
+                </a:solidFill>
+                <a:latin typeface="Sarabun"/>
+              </a:rPr>
+              <a:t>• ไม่มี Single Point of Failure เพิ่ม</a:t>
+            </a:r>
+          </a:p>
+          <a:p>
+            <a:pPr algn="l"/>
+            <a:r>
+              <a:rPr sz="1200" b="0">
+                <a:solidFill>
+                  <a:srgbClr val="FFFFFF"/>
+                </a:solidFill>
+                <a:latin typeface="Segoe UI"/>
+              </a:rPr>
+              <a:t>• ## Free Tier Benefit</a:t>
+            </a:r>
+          </a:p>
+          <a:p>
+            <a:pPr algn="l"/>
+            <a:r>
+              <a:rPr sz="1200" b="0">
+                <a:solidFill>
+                  <a:srgbClr val="FFFFFF"/>
+                </a:solidFill>
+                <a:latin typeface="Sarabun"/>
+              </a:rPr>
+              <a:t>• 1h data 1 ปี = ~680 KB ต่อเครื่อง (ถูกมาก)</a:t>
+            </a:r>
+          </a:p>
+        </p:txBody>
+      </p:sp>
+    </p:spTree>
+  </p:cSld>
+  <p:clrMapOvr>
+    <a:masterClrMapping/>
+  </p:clrMapOvr>
+</p:sld>
+</file>
+
+<file path=ppt/slides/slide16.xml><?xml version="1.0" encoding="utf-8"?>
+<p:sld xmlns:a="http://schemas.openxmlformats.org/drawingml/2006/main" xmlns:p="http://schemas.openxmlformats.org/presentationml/2006/main" xmlns:r="http://schemas.openxmlformats.org/officeDocument/2006/relationships">
+  <p:cSld>
+    <p:bg>
+      <p:bgPr>
+        <a:solidFill>
+          <a:srgbClr val="0D1B2A"/>
+        </a:solidFill>
+        <a:effectLst/>
+      </p:bgPr>
+    </p:bg>
+    <p:spTree>
+      <p:nvGrpSpPr>
+        <p:cNvPr id="1" name=""/>
+        <p:cNvGrpSpPr/>
+        <p:nvPr/>
+      </p:nvGrpSpPr>
+      <p:grpSpPr/>
+      <p:sp>
+        <p:nvSpPr>
+          <p:cNvPr id="2" name="Rectangle 1"/>
+          <p:cNvSpPr/>
+          <p:nvPr/>
+        </p:nvSpPr>
+        <p:spPr>
+          <a:xfrm>
+            <a:off x="0" y="0"/>
+            <a:ext cx="12188952" cy="1097280"/>
+          </a:xfrm>
+          <a:prstGeom prst="rect">
+            <a:avLst/>
+          </a:prstGeom>
+          <a:solidFill>
+            <a:srgbClr val="1E3A5F"/>
+          </a:solidFill>
+          <a:ln>
+            <a:noFill/>
+          </a:ln>
+        </p:spPr>
+        <p:style>
+          <a:lnRef idx="1">
+            <a:schemeClr val="accent1"/>
+          </a:lnRef>
+          <a:fillRef idx="3">
+            <a:schemeClr val="accent1"/>
+          </a:fillRef>
+          <a:effectRef idx="2">
+            <a:schemeClr val="accent1"/>
+          </a:effectRef>
+          <a:fontRef idx="minor">
+            <a:schemeClr val="lt1"/>
+          </a:fontRef>
+        </p:style>
+        <p:txBody>
+          <a:bodyPr rtlCol="0" anchor="ctr"/>
+          <a:lstStyle/>
+          <a:p>
+            <a:pPr algn="ctr"/>
+          </a:p>
+        </p:txBody>
+      </p:sp>
+      <p:sp>
+        <p:nvSpPr>
+          <p:cNvPr id="3" name="Rectangle 2"/>
+          <p:cNvSpPr/>
+          <p:nvPr/>
+        </p:nvSpPr>
+        <p:spPr>
+          <a:xfrm>
+            <a:off x="0" y="0"/>
+            <a:ext cx="73152" cy="1097280"/>
+          </a:xfrm>
+          <a:prstGeom prst="rect">
+            <a:avLst/>
+          </a:prstGeom>
+          <a:solidFill>
+            <a:srgbClr val="008BFF"/>
+          </a:solidFill>
+          <a:ln>
+            <a:noFill/>
+          </a:ln>
+        </p:spPr>
+        <p:style>
+          <a:lnRef idx="1">
+            <a:schemeClr val="accent1"/>
+          </a:lnRef>
+          <a:fillRef idx="3">
+            <a:schemeClr val="accent1"/>
+          </a:fillRef>
+          <a:effectRef idx="2">
+            <a:schemeClr val="accent1"/>
+          </a:effectRef>
+          <a:fontRef idx="minor">
+            <a:schemeClr val="lt1"/>
+          </a:fontRef>
+        </p:style>
+        <p:txBody>
+          <a:bodyPr rtlCol="0" anchor="ctr"/>
+          <a:lstStyle/>
+          <a:p>
+            <a:pPr algn="ctr"/>
+          </a:p>
+        </p:txBody>
+      </p:sp>
+      <p:sp>
+        <p:nvSpPr>
+          <p:cNvPr id="4" name="Rectangle 3"/>
+          <p:cNvSpPr/>
+          <p:nvPr/>
+        </p:nvSpPr>
+        <p:spPr>
+          <a:xfrm>
+            <a:off x="137160" y="137160"/>
+            <a:ext cx="640080" cy="502920"/>
+          </a:xfrm>
+          <a:prstGeom prst="rect">
+            <a:avLst/>
+          </a:prstGeom>
+          <a:solidFill>
+            <a:srgbClr val="008BFF"/>
+          </a:solidFill>
+          <a:ln>
+            <a:noFill/>
+          </a:ln>
+        </p:spPr>
+        <p:style>
+          <a:lnRef idx="1">
+            <a:schemeClr val="accent1"/>
+          </a:lnRef>
+          <a:fillRef idx="3">
+            <a:schemeClr val="accent1"/>
+          </a:fillRef>
+          <a:effectRef idx="2">
+            <a:schemeClr val="accent1"/>
+          </a:effectRef>
+          <a:fontRef idx="minor">
+            <a:schemeClr val="lt1"/>
+          </a:fontRef>
+        </p:style>
+        <p:txBody>
+          <a:bodyPr rtlCol="0" anchor="ctr"/>
+          <a:lstStyle/>
+          <a:p>
+            <a:pPr algn="ctr"/>
+          </a:p>
+        </p:txBody>
+      </p:sp>
+      <p:sp>
+        <p:nvSpPr>
+          <p:cNvPr id="5" name="TextBox 4"/>
+          <p:cNvSpPr txBox="1"/>
+          <p:nvPr/>
+        </p:nvSpPr>
+        <p:spPr>
+          <a:xfrm>
+            <a:off x="137160" y="137160"/>
+            <a:ext cx="640080" cy="502920"/>
+          </a:xfrm>
+          <a:prstGeom prst="rect">
+            <a:avLst/>
+          </a:prstGeom>
+          <a:noFill/>
+        </p:spPr>
+        <p:txBody>
+          <a:bodyPr wrap="square">
+            <a:spAutoFit/>
+          </a:bodyPr>
+          <a:lstStyle/>
+          <a:p>
+            <a:pPr algn="ctr"/>
+            <a:r>
+              <a:rPr sz="2000" b="1">
+                <a:solidFill>
+                  <a:srgbClr val="0D1B2A"/>
+                </a:solidFill>
+                <a:latin typeface="Segoe UI"/>
+              </a:rPr>
+              <a:t>A6</a:t>
+            </a:r>
+          </a:p>
+        </p:txBody>
+      </p:sp>
+      <p:sp>
+        <p:nvSpPr>
+          <p:cNvPr id="6" name="TextBox 5"/>
+          <p:cNvSpPr txBox="1"/>
+          <p:nvPr/>
+        </p:nvSpPr>
+        <p:spPr>
+          <a:xfrm>
+            <a:off x="137160" y="621792"/>
+            <a:ext cx="640080" cy="274320"/>
+          </a:xfrm>
+          <a:prstGeom prst="rect">
+            <a:avLst/>
+          </a:prstGeom>
+          <a:noFill/>
+        </p:spPr>
+        <p:txBody>
+          <a:bodyPr wrap="square">
+            <a:spAutoFit/>
+          </a:bodyPr>
+          <a:lstStyle/>
+          <a:p>
+            <a:pPr algn="ctr"/>
+            <a:r>
+              <a:rPr sz="800" b="0">
+                <a:solidFill>
+                  <a:srgbClr val="008BFF"/>
+                </a:solidFill>
+                <a:latin typeface="Segoe UI"/>
+              </a:rPr>
+              <a:t>APPENDIX</a:t>
+            </a:r>
+          </a:p>
+        </p:txBody>
+      </p:sp>
+      <p:sp>
+        <p:nvSpPr>
+          <p:cNvPr id="7" name="TextBox 6"/>
+          <p:cNvSpPr txBox="1"/>
+          <p:nvPr/>
+        </p:nvSpPr>
+        <p:spPr>
+          <a:xfrm>
+            <a:off x="914400" y="73152"/>
+            <a:ext cx="10515600" cy="640080"/>
+          </a:xfrm>
+          <a:prstGeom prst="rect">
+            <a:avLst/>
+          </a:prstGeom>
+          <a:noFill/>
+        </p:spPr>
+        <p:txBody>
+          <a:bodyPr wrap="square">
+            <a:spAutoFit/>
+          </a:bodyPr>
+          <a:lstStyle/>
+          <a:p>
+            <a:pPr algn="l"/>
+            <a:r>
+              <a:rPr sz="2600" b="1">
+                <a:solidFill>
+                  <a:srgbClr val="FFFFFF"/>
+                </a:solidFill>
+                <a:latin typeface="Segoe UI"/>
+              </a:rPr>
+              <a:t>Stripe Payment Gateway Flow</a:t>
+            </a:r>
+          </a:p>
+        </p:txBody>
+      </p:sp>
+      <p:sp>
+        <p:nvSpPr>
+          <p:cNvPr id="8" name="TextBox 7"/>
+          <p:cNvSpPr txBox="1"/>
+          <p:nvPr/>
+        </p:nvSpPr>
+        <p:spPr>
+          <a:xfrm>
+            <a:off x="914400" y="713232"/>
+            <a:ext cx="10515600" cy="347472"/>
+          </a:xfrm>
+          <a:prstGeom prst="rect">
+            <a:avLst/>
+          </a:prstGeom>
+          <a:noFill/>
+        </p:spPr>
+        <p:txBody>
+          <a:bodyPr wrap="square">
+            <a:spAutoFit/>
+          </a:bodyPr>
+          <a:lstStyle/>
+          <a:p>
+            <a:pPr algn="l"/>
+            <a:r>
+              <a:rPr sz="1300" b="0">
+                <a:solidFill>
+                  <a:srgbClr val="B0C4DE"/>
+                </a:solidFill>
+                <a:latin typeface="Sarabun"/>
+              </a:rPr>
+              <a:t>ขั้นตอนการชำระเงินและ Subscription Renewal แบบ Async Webhook</a:t>
+            </a:r>
+          </a:p>
+        </p:txBody>
+      </p:sp>
+      <p:pic>
+        <p:nvPicPr>
+          <p:cNvPr id="9" name="Picture 8" descr="diag_A6.png"/>
+          <p:cNvPicPr>
+            <a:picLocks noChangeAspect="1"/>
+          </p:cNvPicPr>
+          <p:nvPr/>
+        </p:nvPicPr>
+        <p:blipFill>
+          <a:blip r:embed="rId2"/>
+          <a:stretch>
+            <a:fillRect/>
+          </a:stretch>
+        </p:blipFill>
+        <p:spPr>
+          <a:xfrm>
+            <a:off x="182880" y="1496214"/>
+            <a:ext cx="7772400" cy="4597090"/>
+          </a:xfrm>
+          <a:prstGeom prst="rect">
+            <a:avLst/>
+          </a:prstGeom>
+        </p:spPr>
+      </p:pic>
+      <p:sp>
+        <p:nvSpPr>
+          <p:cNvPr id="10" name="Rectangle 9"/>
+          <p:cNvSpPr/>
+          <p:nvPr/>
+        </p:nvSpPr>
+        <p:spPr>
+          <a:xfrm>
+            <a:off x="8138160" y="1143000"/>
+            <a:ext cx="3840480" cy="5303520"/>
+          </a:xfrm>
+          <a:prstGeom prst="rect">
+            <a:avLst/>
+          </a:prstGeom>
+          <a:solidFill>
+            <a:srgbClr val="162A44"/>
+          </a:solidFill>
+          <a:ln>
+            <a:noFill/>
+          </a:ln>
+        </p:spPr>
+        <p:style>
+          <a:lnRef idx="1">
+            <a:schemeClr val="accent1"/>
+          </a:lnRef>
+          <a:fillRef idx="3">
+            <a:schemeClr val="accent1"/>
+          </a:fillRef>
+          <a:effectRef idx="2">
+            <a:schemeClr val="accent1"/>
+          </a:effectRef>
+          <a:fontRef idx="minor">
+            <a:schemeClr val="lt1"/>
+          </a:fontRef>
+        </p:style>
+        <p:txBody>
+          <a:bodyPr rtlCol="0" anchor="ctr"/>
+          <a:lstStyle/>
+          <a:p>
+            <a:pPr algn="ctr"/>
+          </a:p>
+        </p:txBody>
+      </p:sp>
+      <p:sp>
+        <p:nvSpPr>
+          <p:cNvPr id="11" name="Rectangle 10"/>
+          <p:cNvSpPr/>
+          <p:nvPr/>
+        </p:nvSpPr>
+        <p:spPr>
+          <a:xfrm>
+            <a:off x="8138160" y="1143000"/>
+            <a:ext cx="3840480" cy="54864"/>
+          </a:xfrm>
+          <a:prstGeom prst="rect">
+            <a:avLst/>
+          </a:prstGeom>
+          <a:solidFill>
+            <a:srgbClr val="008BFF"/>
+          </a:solidFill>
+          <a:ln>
+            <a:noFill/>
+          </a:ln>
+        </p:spPr>
+        <p:style>
+          <a:lnRef idx="1">
+            <a:schemeClr val="accent1"/>
+          </a:lnRef>
+          <a:fillRef idx="3">
+            <a:schemeClr val="accent1"/>
+          </a:fillRef>
+          <a:effectRef idx="2">
+            <a:schemeClr val="accent1"/>
+          </a:effectRef>
+          <a:fontRef idx="minor">
+            <a:schemeClr val="lt1"/>
+          </a:fontRef>
+        </p:style>
+        <p:txBody>
+          <a:bodyPr rtlCol="0" anchor="ctr"/>
+          <a:lstStyle/>
+          <a:p>
+            <a:pPr algn="ctr"/>
+          </a:p>
+        </p:txBody>
+      </p:sp>
+      <p:sp>
+        <p:nvSpPr>
+          <p:cNvPr id="12" name="TextBox 11"/>
+          <p:cNvSpPr txBox="1"/>
+          <p:nvPr/>
+        </p:nvSpPr>
+        <p:spPr>
+          <a:xfrm>
+            <a:off x="8275320" y="1207008"/>
+            <a:ext cx="3611880" cy="5120640"/>
+          </a:xfrm>
+          <a:prstGeom prst="rect">
+            <a:avLst/>
+          </a:prstGeom>
+          <a:noFill/>
+        </p:spPr>
+        <p:txBody>
+          <a:bodyPr wrap="square">
+            <a:spAutoFit/>
+          </a:bodyPr>
+          <a:lstStyle/>
+          <a:p>
+            <a:r>
+              <a:rPr sz="1400" b="1">
+                <a:solidFill>
+                  <a:srgbClr val="008BFF"/>
+                </a:solidFill>
+                <a:latin typeface="Sarabun"/>
+              </a:rPr>
+              <a:t>Stripe Notes</a:t>
+            </a:r>
+          </a:p>
+          <a:p>
+            <a:pPr algn="l"/>
+            <a:r>
+              <a:rPr sz="1200" b="0">
+                <a:solidFill>
+                  <a:srgbClr val="FFFFFF"/>
+                </a:solidFill>
+                <a:latin typeface="Sarabun"/>
+              </a:rPr>
+              <a:t>• ## ทำไมใช้ Webhook (Async)?</a:t>
+            </a:r>
+          </a:p>
+          <a:p>
+            <a:pPr algn="l"/>
+            <a:r>
+              <a:rPr sz="1200" b="0">
+                <a:solidFill>
+                  <a:srgbClr val="FFFFFF"/>
+                </a:solidFill>
+                <a:latin typeface="Sarabun"/>
+              </a:rPr>
+              <a:t>• ป้องกันกรณีเน็ตหลุด/ปิดแอประหว่างชำระ</a:t>
+            </a:r>
+          </a:p>
+          <a:p>
+            <a:pPr algn="l"/>
+            <a:r>
+              <a:rPr sz="1200" b="0">
+                <a:solidFill>
+                  <a:srgbClr val="FFFFFF"/>
+                </a:solidFill>
+                <a:latin typeface="Sarabun"/>
+              </a:rPr>
+              <a:t>• Stripe ยิง event ตรงมาที่ Backend Server</a:t>
+            </a:r>
+          </a:p>
+          <a:p>
+            <a:pPr algn="l"/>
+            <a:r>
+              <a:rPr sz="1200" b="0">
+                <a:solidFill>
+                  <a:srgbClr val="FFFFFF"/>
+                </a:solidFill>
+                <a:latin typeface="Sarabun"/>
+              </a:rPr>
+              <a:t>• ลูกค้าโดนตัดเงินแล้ว Pro ขึ้นทุกกรณี</a:t>
+            </a:r>
+          </a:p>
+          <a:p>
+            <a:pPr algn="l"/>
+            <a:r>
+              <a:rPr sz="1200" b="0">
+                <a:solidFill>
+                  <a:srgbClr val="FFFFFF"/>
+                </a:solidFill>
+                <a:latin typeface="Sarabun"/>
+              </a:rPr>
+              <a:t>• ## Webhook Events ที่ใช้</a:t>
+            </a:r>
+          </a:p>
+          <a:p>
+            <a:pPr algn="l"/>
+            <a:r>
+              <a:rPr sz="1200" b="0">
+                <a:solidFill>
+                  <a:srgbClr val="FFFFFF"/>
+                </a:solidFill>
+                <a:latin typeface="Sarabun"/>
+              </a:rPr>
+              <a:t>• checkout.session.completed: จ่ายครั้งแรก</a:t>
+            </a:r>
+          </a:p>
+          <a:p>
+            <a:pPr algn="l"/>
+            <a:r>
+              <a:rPr sz="1200" b="0">
+                <a:solidFill>
+                  <a:srgbClr val="FFFFFF"/>
+                </a:solidFill>
+                <a:latin typeface="Sarabun"/>
+              </a:rPr>
+              <a:t>• invoice.payment_succeeded: ต่ออายุรายเดือน</a:t>
+            </a:r>
+          </a:p>
+          <a:p>
+            <a:pPr algn="l"/>
+            <a:r>
+              <a:rPr sz="1200" b="0">
+                <a:solidFill>
+                  <a:srgbClr val="FFFFFF"/>
+                </a:solidFill>
+                <a:latin typeface="Sarabun"/>
+              </a:rPr>
+              <a:t>• invoice.payment_failed: ต่ออายุไม่ผ่าน</a:t>
+            </a:r>
+          </a:p>
+          <a:p>
+            <a:pPr algn="l"/>
+            <a:r>
+              <a:rPr sz="1200" b="0">
+                <a:solidFill>
+                  <a:srgbClr val="FFFFFF"/>
+                </a:solidFill>
+                <a:latin typeface="Segoe UI"/>
+              </a:rPr>
+              <a:t>• ## Security</a:t>
+            </a:r>
+          </a:p>
+          <a:p>
+            <a:pPr algn="l"/>
+            <a:r>
+              <a:rPr sz="1200" b="0">
+                <a:solidFill>
+                  <a:srgbClr val="FFFFFF"/>
+                </a:solidFill>
+                <a:latin typeface="Sarabun"/>
+              </a:rPr>
+              <a:t>• ตรวจ Stripe-Signature header ทุก Webhook</a:t>
+            </a:r>
+          </a:p>
+          <a:p>
+            <a:pPr algn="l"/>
+            <a:r>
+              <a:rPr sz="1200" b="0">
+                <a:solidFill>
+                  <a:srgbClr val="FFFFFF"/>
+                </a:solidFill>
+                <a:latin typeface="Sarabun"/>
+              </a:rPr>
+              <a:t>• ใช้ stripe.Webhook.construct_event()</a:t>
+            </a:r>
+          </a:p>
+          <a:p>
+            <a:pPr algn="l"/>
+            <a:r>
+              <a:rPr sz="1200" b="0">
+                <a:solidFill>
+                  <a:srgbClr val="FFFFFF"/>
+                </a:solidFill>
+                <a:latin typeface="Segoe UI"/>
+              </a:rPr>
+              <a:t>• ## Fees</a:t>
+            </a:r>
+          </a:p>
+          <a:p>
+            <a:pPr algn="l"/>
+            <a:r>
+              <a:rPr sz="1200" b="0">
+                <a:solidFill>
+                  <a:srgbClr val="FFFFFF"/>
+                </a:solidFill>
+                <a:latin typeface="Sarabun"/>
+              </a:rPr>
+              <a:t>• 3.65% + 10 THB ต่อรายการ</a:t>
+            </a:r>
+          </a:p>
+          <a:p>
+            <a:pPr algn="l"/>
+            <a:r>
+              <a:rPr sz="1200" b="0">
+                <a:solidFill>
+                  <a:srgbClr val="FFFFFF"/>
+                </a:solidFill>
+                <a:latin typeface="Sarabun"/>
+              </a:rPr>
+              <a:t>• Pro 99B: ค่า fee ~13.6B (profit 82.2B)</a:t>
+            </a:r>
+          </a:p>
+        </p:txBody>
+      </p:sp>
+    </p:spTree>
+  </p:cSld>
+  <p:clrMapOvr>
+    <a:masterClrMapping/>
+  </p:clrMapOvr>
+</p:sld>
+</file>
+
+<file path=ppt/slides/slide17.xml><?xml version="1.0" encoding="utf-8"?>
+<p:sld xmlns:a="http://schemas.openxmlformats.org/drawingml/2006/main" xmlns:p="http://schemas.openxmlformats.org/presentationml/2006/main" xmlns:r="http://schemas.openxmlformats.org/officeDocument/2006/relationships">
+  <p:cSld>
+    <p:bg>
+      <p:bgPr>
+        <a:solidFill>
+          <a:srgbClr val="0D1B2A"/>
+        </a:solidFill>
+        <a:effectLst/>
+      </p:bgPr>
+    </p:bg>
+    <p:spTree>
+      <p:nvGrpSpPr>
+        <p:cNvPr id="1" name=""/>
+        <p:cNvGrpSpPr/>
+        <p:nvPr/>
+      </p:nvGrpSpPr>
+      <p:grpSpPr/>
+      <p:sp>
+        <p:nvSpPr>
+          <p:cNvPr id="2" name="Rectangle 1"/>
+          <p:cNvSpPr/>
+          <p:nvPr/>
+        </p:nvSpPr>
+        <p:spPr>
+          <a:xfrm>
+            <a:off x="0" y="0"/>
+            <a:ext cx="12188952" cy="1097280"/>
+          </a:xfrm>
+          <a:prstGeom prst="rect">
+            <a:avLst/>
+          </a:prstGeom>
+          <a:solidFill>
+            <a:srgbClr val="1E3A5F"/>
+          </a:solidFill>
+          <a:ln>
+            <a:noFill/>
+          </a:ln>
+        </p:spPr>
+        <p:style>
+          <a:lnRef idx="1">
+            <a:schemeClr val="accent1"/>
+          </a:lnRef>
+          <a:fillRef idx="3">
+            <a:schemeClr val="accent1"/>
+          </a:fillRef>
+          <a:effectRef idx="2">
+            <a:schemeClr val="accent1"/>
+          </a:effectRef>
+          <a:fontRef idx="minor">
+            <a:schemeClr val="lt1"/>
+          </a:fontRef>
+        </p:style>
+        <p:txBody>
+          <a:bodyPr rtlCol="0" anchor="ctr"/>
+          <a:lstStyle/>
+          <a:p>
+            <a:pPr algn="ctr"/>
+          </a:p>
+        </p:txBody>
+      </p:sp>
+      <p:sp>
+        <p:nvSpPr>
+          <p:cNvPr id="3" name="Rectangle 2"/>
+          <p:cNvSpPr/>
+          <p:nvPr/>
+        </p:nvSpPr>
+        <p:spPr>
+          <a:xfrm>
+            <a:off x="0" y="0"/>
+            <a:ext cx="73152" cy="1097280"/>
+          </a:xfrm>
+          <a:prstGeom prst="rect">
+            <a:avLst/>
+          </a:prstGeom>
+          <a:solidFill>
+            <a:srgbClr val="FFC800"/>
+          </a:solidFill>
+          <a:ln>
+            <a:noFill/>
+          </a:ln>
+        </p:spPr>
+        <p:style>
+          <a:lnRef idx="1">
+            <a:schemeClr val="accent1"/>
+          </a:lnRef>
+          <a:fillRef idx="3">
+            <a:schemeClr val="accent1"/>
+          </a:fillRef>
+          <a:effectRef idx="2">
+            <a:schemeClr val="accent1"/>
+          </a:effectRef>
+          <a:fontRef idx="minor">
+            <a:schemeClr val="lt1"/>
+          </a:fontRef>
+        </p:style>
+        <p:txBody>
+          <a:bodyPr rtlCol="0" anchor="ctr"/>
+          <a:lstStyle/>
+          <a:p>
+            <a:pPr algn="ctr"/>
+          </a:p>
+        </p:txBody>
+      </p:sp>
+      <p:sp>
+        <p:nvSpPr>
+          <p:cNvPr id="4" name="Rectangle 3"/>
+          <p:cNvSpPr/>
+          <p:nvPr/>
+        </p:nvSpPr>
+        <p:spPr>
+          <a:xfrm>
+            <a:off x="137160" y="137160"/>
+            <a:ext cx="640080" cy="502920"/>
+          </a:xfrm>
+          <a:prstGeom prst="rect">
+            <a:avLst/>
+          </a:prstGeom>
+          <a:solidFill>
+            <a:srgbClr val="FFC800"/>
+          </a:solidFill>
+          <a:ln>
+            <a:noFill/>
+          </a:ln>
+        </p:spPr>
+        <p:style>
+          <a:lnRef idx="1">
+            <a:schemeClr val="accent1"/>
+          </a:lnRef>
+          <a:fillRef idx="3">
+            <a:schemeClr val="accent1"/>
+          </a:fillRef>
+          <a:effectRef idx="2">
+            <a:schemeClr val="accent1"/>
+          </a:effectRef>
+          <a:fontRef idx="minor">
+            <a:schemeClr val="lt1"/>
+          </a:fontRef>
+        </p:style>
+        <p:txBody>
+          <a:bodyPr rtlCol="0" anchor="ctr"/>
+          <a:lstStyle/>
+          <a:p>
+            <a:pPr algn="ctr"/>
+          </a:p>
+        </p:txBody>
+      </p:sp>
+      <p:sp>
+        <p:nvSpPr>
+          <p:cNvPr id="5" name="TextBox 4"/>
+          <p:cNvSpPr txBox="1"/>
+          <p:nvPr/>
+        </p:nvSpPr>
+        <p:spPr>
+          <a:xfrm>
+            <a:off x="137160" y="137160"/>
+            <a:ext cx="640080" cy="502920"/>
+          </a:xfrm>
+          <a:prstGeom prst="rect">
+            <a:avLst/>
+          </a:prstGeom>
+          <a:noFill/>
+        </p:spPr>
+        <p:txBody>
+          <a:bodyPr wrap="square">
+            <a:spAutoFit/>
+          </a:bodyPr>
+          <a:lstStyle/>
+          <a:p>
+            <a:pPr algn="ctr"/>
+            <a:r>
+              <a:rPr sz="2000" b="1">
+                <a:solidFill>
+                  <a:srgbClr val="0D1B2A"/>
+                </a:solidFill>
+                <a:latin typeface="Segoe UI"/>
+              </a:rPr>
+              <a:t>A7</a:t>
+            </a:r>
+          </a:p>
+        </p:txBody>
+      </p:sp>
+      <p:sp>
+        <p:nvSpPr>
+          <p:cNvPr id="6" name="TextBox 5"/>
+          <p:cNvSpPr txBox="1"/>
+          <p:nvPr/>
+        </p:nvSpPr>
+        <p:spPr>
+          <a:xfrm>
+            <a:off x="137160" y="621792"/>
+            <a:ext cx="640080" cy="274320"/>
+          </a:xfrm>
+          <a:prstGeom prst="rect">
+            <a:avLst/>
+          </a:prstGeom>
+          <a:noFill/>
+        </p:spPr>
+        <p:txBody>
+          <a:bodyPr wrap="square">
+            <a:spAutoFit/>
+          </a:bodyPr>
+          <a:lstStyle/>
+          <a:p>
+            <a:pPr algn="ctr"/>
+            <a:r>
+              <a:rPr sz="800" b="0">
+                <a:solidFill>
+                  <a:srgbClr val="FFC800"/>
+                </a:solidFill>
+                <a:latin typeface="Segoe UI"/>
+              </a:rPr>
+              <a:t>APPENDIX</a:t>
+            </a:r>
+          </a:p>
+        </p:txBody>
+      </p:sp>
+      <p:sp>
+        <p:nvSpPr>
+          <p:cNvPr id="7" name="TextBox 6"/>
+          <p:cNvSpPr txBox="1"/>
+          <p:nvPr/>
+        </p:nvSpPr>
+        <p:spPr>
+          <a:xfrm>
+            <a:off x="914400" y="73152"/>
+            <a:ext cx="10515600" cy="640080"/>
+          </a:xfrm>
+          <a:prstGeom prst="rect">
+            <a:avLst/>
+          </a:prstGeom>
+          <a:noFill/>
+        </p:spPr>
+        <p:txBody>
+          <a:bodyPr wrap="square">
+            <a:spAutoFit/>
+          </a:bodyPr>
+          <a:lstStyle/>
+          <a:p>
+            <a:pPr algn="l"/>
+            <a:r>
+              <a:rPr sz="2600" b="1">
+                <a:solidFill>
+                  <a:srgbClr val="FFFFFF"/>
+                </a:solidFill>
+                <a:latin typeface="Segoe UI"/>
+              </a:rPr>
+              <a:t>Backup &amp; Disaster Recovery</a:t>
+            </a:r>
+          </a:p>
+        </p:txBody>
+      </p:sp>
+      <p:sp>
+        <p:nvSpPr>
+          <p:cNvPr id="8" name="TextBox 7"/>
+          <p:cNvSpPr txBox="1"/>
+          <p:nvPr/>
+        </p:nvSpPr>
+        <p:spPr>
+          <a:xfrm>
+            <a:off x="914400" y="713232"/>
+            <a:ext cx="10515600" cy="347472"/>
+          </a:xfrm>
+          <a:prstGeom prst="rect">
+            <a:avLst/>
+          </a:prstGeom>
+          <a:noFill/>
+        </p:spPr>
+        <p:txBody>
+          <a:bodyPr wrap="square">
+            <a:spAutoFit/>
+          </a:bodyPr>
+          <a:lstStyle/>
+          <a:p>
+            <a:pPr algn="l"/>
+            <a:r>
+              <a:rPr sz="1300" b="0">
+                <a:solidFill>
+                  <a:srgbClr val="B0C4DE"/>
+                </a:solidFill>
+                <a:latin typeface="Sarabun"/>
+              </a:rPr>
+              <a:t>กลยุทธ์สำรองข้อมูล 3 ชั้น + Cloudflare R2</a:t>
+            </a:r>
+          </a:p>
+        </p:txBody>
+      </p:sp>
+      <p:pic>
+        <p:nvPicPr>
+          <p:cNvPr id="9" name="Picture 8" descr="diag_A7.png"/>
+          <p:cNvPicPr>
+            <a:picLocks noChangeAspect="1"/>
+          </p:cNvPicPr>
+          <p:nvPr/>
+        </p:nvPicPr>
+        <p:blipFill>
+          <a:blip r:embed="rId2"/>
+          <a:stretch>
+            <a:fillRect/>
+          </a:stretch>
+        </p:blipFill>
+        <p:spPr>
+          <a:xfrm>
+            <a:off x="182880" y="1142999"/>
+            <a:ext cx="5150386" cy="5303520"/>
+          </a:xfrm>
+          <a:prstGeom prst="rect">
+            <a:avLst/>
+          </a:prstGeom>
+        </p:spPr>
+      </p:pic>
+      <p:sp>
+        <p:nvSpPr>
+          <p:cNvPr id="10" name="Rectangle 9"/>
+          <p:cNvSpPr/>
+          <p:nvPr/>
+        </p:nvSpPr>
+        <p:spPr>
+          <a:xfrm>
+            <a:off x="8138160" y="1143000"/>
+            <a:ext cx="3840480" cy="5303520"/>
+          </a:xfrm>
+          <a:prstGeom prst="rect">
+            <a:avLst/>
+          </a:prstGeom>
+          <a:solidFill>
+            <a:srgbClr val="162A44"/>
+          </a:solidFill>
+          <a:ln>
+            <a:noFill/>
+          </a:ln>
+        </p:spPr>
+        <p:style>
+          <a:lnRef idx="1">
+            <a:schemeClr val="accent1"/>
+          </a:lnRef>
+          <a:fillRef idx="3">
+            <a:schemeClr val="accent1"/>
+          </a:fillRef>
+          <a:effectRef idx="2">
+            <a:schemeClr val="accent1"/>
+          </a:effectRef>
+          <a:fontRef idx="minor">
+            <a:schemeClr val="lt1"/>
+          </a:fontRef>
+        </p:style>
+        <p:txBody>
+          <a:bodyPr rtlCol="0" anchor="ctr"/>
+          <a:lstStyle/>
+          <a:p>
+            <a:pPr algn="ctr"/>
+          </a:p>
+        </p:txBody>
+      </p:sp>
+      <p:sp>
+        <p:nvSpPr>
+          <p:cNvPr id="11" name="Rectangle 10"/>
+          <p:cNvSpPr/>
+          <p:nvPr/>
+        </p:nvSpPr>
+        <p:spPr>
+          <a:xfrm>
+            <a:off x="8138160" y="1143000"/>
+            <a:ext cx="3840480" cy="54864"/>
+          </a:xfrm>
+          <a:prstGeom prst="rect">
+            <a:avLst/>
+          </a:prstGeom>
+          <a:solidFill>
+            <a:srgbClr val="FFC800"/>
+          </a:solidFill>
+          <a:ln>
+            <a:noFill/>
+          </a:ln>
+        </p:spPr>
+        <p:style>
+          <a:lnRef idx="1">
+            <a:schemeClr val="accent1"/>
+          </a:lnRef>
+          <a:fillRef idx="3">
+            <a:schemeClr val="accent1"/>
+          </a:fillRef>
+          <a:effectRef idx="2">
+            <a:schemeClr val="accent1"/>
+          </a:effectRef>
+          <a:fontRef idx="minor">
+            <a:schemeClr val="lt1"/>
+          </a:fontRef>
+        </p:style>
+        <p:txBody>
+          <a:bodyPr rtlCol="0" anchor="ctr"/>
+          <a:lstStyle/>
+          <a:p>
+            <a:pPr algn="ctr"/>
+          </a:p>
+        </p:txBody>
+      </p:sp>
+      <p:sp>
+        <p:nvSpPr>
+          <p:cNvPr id="12" name="TextBox 11"/>
+          <p:cNvSpPr txBox="1"/>
+          <p:nvPr/>
+        </p:nvSpPr>
+        <p:spPr>
+          <a:xfrm>
+            <a:off x="8275320" y="1207008"/>
+            <a:ext cx="3611880" cy="5120640"/>
+          </a:xfrm>
+          <a:prstGeom prst="rect">
+            <a:avLst/>
+          </a:prstGeom>
+          <a:noFill/>
+        </p:spPr>
+        <p:txBody>
+          <a:bodyPr wrap="square">
+            <a:spAutoFit/>
+          </a:bodyPr>
+          <a:lstStyle/>
+          <a:p>
+            <a:r>
+              <a:rPr sz="1400" b="1">
+                <a:solidFill>
+                  <a:srgbClr val="FFC800"/>
+                </a:solidFill>
+                <a:latin typeface="Sarabun"/>
+              </a:rPr>
+              <a:t>Backup Reference</a:t>
+            </a:r>
+          </a:p>
+          <a:p>
+            <a:pPr algn="l"/>
+            <a:r>
+              <a:rPr sz="1200" b="0">
+                <a:solidFill>
+                  <a:srgbClr val="FFFFFF"/>
+                </a:solidFill>
+                <a:latin typeface="Sarabun"/>
+              </a:rPr>
+              <a:t>• ## Layer 1 — Local (every 6h)</a:t>
+            </a:r>
+          </a:p>
+          <a:p>
+            <a:pPr algn="l"/>
+            <a:r>
+              <a:rPr sz="1200" b="0">
+                <a:solidFill>
+                  <a:srgbClr val="FFFFFF"/>
+                </a:solidFill>
+                <a:latin typeface="Segoe UI"/>
+              </a:rPr>
+              <a:t>• influx backup /backups/influx/$(date)</a:t>
+            </a:r>
+          </a:p>
+          <a:p>
+            <a:pPr algn="l"/>
+            <a:r>
+              <a:rPr sz="1200" b="0">
+                <a:solidFill>
+                  <a:srgbClr val="FFFFFF"/>
+                </a:solidFill>
+                <a:latin typeface="Segoe UI"/>
+              </a:rPr>
+              <a:t>• pg_dump powerview_db &gt; pg_backup.sql</a:t>
+            </a:r>
+          </a:p>
+          <a:p>
+            <a:pPr algn="l"/>
+            <a:r>
+              <a:rPr sz="1200" b="0">
+                <a:solidFill>
+                  <a:srgbClr val="FFFFFF"/>
+                </a:solidFill>
+                <a:latin typeface="Sarabun"/>
+              </a:rPr>
+              <a:t>• ## Layer 2 — Remote R2 (daily)</a:t>
+            </a:r>
+          </a:p>
+          <a:p>
+            <a:pPr algn="l"/>
+            <a:r>
+              <a:rPr sz="1200" b="0">
+                <a:solidFill>
+                  <a:srgbClr val="FFFFFF"/>
+                </a:solidFill>
+                <a:latin typeface="Segoe UI"/>
+              </a:rPr>
+              <a:t>• rclone sync /backups r2:powerview-backup</a:t>
+            </a:r>
+          </a:p>
+          <a:p>
+            <a:pPr algn="l"/>
+            <a:r>
+              <a:rPr sz="1200" b="0">
+                <a:solidFill>
+                  <a:srgbClr val="FFFFFF"/>
+                </a:solidFill>
+                <a:latin typeface="Segoe UI"/>
+              </a:rPr>
+              <a:t>• Free: 10 GB/month + zero egress fee</a:t>
+            </a:r>
+          </a:p>
+          <a:p>
+            <a:pPr algn="l"/>
+            <a:r>
+              <a:rPr sz="1200" b="0">
+                <a:solidFill>
+                  <a:srgbClr val="FFFFFF"/>
+                </a:solidFill>
+                <a:latin typeface="Sarabun"/>
+              </a:rPr>
+              <a:t>• ## Layer 3 — VPS Snapshot (weekly)</a:t>
+            </a:r>
+          </a:p>
+          <a:p>
+            <a:pPr algn="l"/>
+            <a:r>
+              <a:rPr sz="1200" b="0">
+                <a:solidFill>
+                  <a:srgbClr val="FFFFFF"/>
+                </a:solidFill>
+                <a:latin typeface="Segoe UI"/>
+              </a:rPr>
+              <a:t>• Hostinger hPanel automated backup</a:t>
+            </a:r>
+          </a:p>
+          <a:p>
+            <a:pPr algn="l"/>
+            <a:r>
+              <a:rPr sz="1200" b="0">
+                <a:solidFill>
+                  <a:srgbClr val="FFFFFF"/>
+                </a:solidFill>
+                <a:latin typeface="Segoe UI"/>
+              </a:rPr>
+              <a:t>• ## RTO / RPO Targets</a:t>
+            </a:r>
+          </a:p>
+          <a:p>
+            <a:pPr algn="l"/>
+            <a:r>
+              <a:rPr sz="1200" b="0">
+                <a:solidFill>
+                  <a:srgbClr val="FFFFFF"/>
+                </a:solidFill>
+                <a:latin typeface="Sarabun"/>
+              </a:rPr>
+              <a:t>• RPO: 6 ชั่วโมง (max data loss)</a:t>
+            </a:r>
+          </a:p>
+          <a:p>
+            <a:pPr algn="l"/>
+            <a:r>
+              <a:rPr sz="1200" b="0">
+                <a:solidFill>
+                  <a:srgbClr val="FFFFFF"/>
+                </a:solidFill>
+                <a:latin typeface="Sarabun"/>
+              </a:rPr>
+              <a:t>• RTO: 2-4 ชั่วโมง (restore time)</a:t>
+            </a:r>
+          </a:p>
+          <a:p>
+            <a:pPr algn="l"/>
+            <a:r>
+              <a:rPr sz="1200" b="0">
+                <a:solidFill>
+                  <a:srgbClr val="FFFFFF"/>
+                </a:solidFill>
+                <a:latin typeface="Segoe UI"/>
+              </a:rPr>
+              <a:t>• ## Restore Steps</a:t>
+            </a:r>
+          </a:p>
+          <a:p>
+            <a:pPr algn="l"/>
+            <a:r>
+              <a:rPr sz="1200" b="0">
+                <a:solidFill>
+                  <a:srgbClr val="FFFFFF"/>
+                </a:solidFill>
+                <a:latin typeface="Segoe UI"/>
+              </a:rPr>
+              <a:t>• 1. Spin up new KVM VPS</a:t>
+            </a:r>
+          </a:p>
+          <a:p>
+            <a:pPr algn="l"/>
+            <a:r>
+              <a:rPr sz="1200" b="0">
+                <a:solidFill>
+                  <a:srgbClr val="FFFFFF"/>
+                </a:solidFill>
+                <a:latin typeface="Segoe UI"/>
+              </a:rPr>
+              <a:t>• 2. rclone download from R2</a:t>
+            </a:r>
+          </a:p>
+          <a:p>
+            <a:pPr algn="l"/>
+            <a:r>
+              <a:rPr sz="1200" b="0">
+                <a:solidFill>
+                  <a:srgbClr val="FFFFFF"/>
+                </a:solidFill>
+                <a:latin typeface="Segoe UI"/>
+              </a:rPr>
+              <a:t>• 3. influx restore + pg_restore</a:t>
+            </a:r>
+          </a:p>
+          <a:p>
+            <a:pPr algn="l"/>
+            <a:r>
+              <a:rPr sz="1200" b="0">
+                <a:solidFill>
+                  <a:srgbClr val="FFFFFF"/>
+                </a:solidFill>
+                <a:latin typeface="Segoe UI"/>
+              </a:rPr>
+              <a:t>• 4. Update DNS A record</a:t>
+            </a:r>
+          </a:p>
+        </p:txBody>
+      </p:sp>
+    </p:spTree>
+  </p:cSld>
+  <p:clrMapOvr>
+    <a:masterClrMapping/>
+  </p:clrMapOvr>
+</p:sld>
+</file>
+
+<file path=ppt/slides/slide18.xml><?xml version="1.0" encoding="utf-8"?>
+<p:sld xmlns:a="http://schemas.openxmlformats.org/drawingml/2006/main" xmlns:p="http://schemas.openxmlformats.org/presentationml/2006/main" xmlns:r="http://schemas.openxmlformats.org/officeDocument/2006/relationships">
+  <p:cSld>
+    <p:bg>
+      <p:bgPr>
+        <a:solidFill>
+          <a:srgbClr val="0D1B2A"/>
+        </a:solidFill>
+        <a:effectLst/>
+      </p:bgPr>
+    </p:bg>
+    <p:spTree>
+      <p:nvGrpSpPr>
+        <p:cNvPr id="1" name=""/>
+        <p:cNvGrpSpPr/>
+        <p:nvPr/>
+      </p:nvGrpSpPr>
+      <p:grpSpPr/>
+      <p:sp>
+        <p:nvSpPr>
+          <p:cNvPr id="2" name="Rectangle 1"/>
+          <p:cNvSpPr/>
+          <p:nvPr/>
+        </p:nvSpPr>
+        <p:spPr>
+          <a:xfrm>
+            <a:off x="0" y="0"/>
+            <a:ext cx="12188952" cy="1097280"/>
+          </a:xfrm>
+          <a:prstGeom prst="rect">
+            <a:avLst/>
+          </a:prstGeom>
+          <a:solidFill>
+            <a:srgbClr val="1E3A5F"/>
+          </a:solidFill>
+          <a:ln>
+            <a:noFill/>
+          </a:ln>
+        </p:spPr>
+        <p:style>
+          <a:lnRef idx="1">
+            <a:schemeClr val="accent1"/>
+          </a:lnRef>
+          <a:fillRef idx="3">
+            <a:schemeClr val="accent1"/>
+          </a:fillRef>
+          <a:effectRef idx="2">
+            <a:schemeClr val="accent1"/>
+          </a:effectRef>
+          <a:fontRef idx="minor">
+            <a:schemeClr val="lt1"/>
+          </a:fontRef>
+        </p:style>
+        <p:txBody>
+          <a:bodyPr rtlCol="0" anchor="ctr"/>
+          <a:lstStyle/>
+          <a:p>
+            <a:pPr algn="ctr"/>
+          </a:p>
+        </p:txBody>
+      </p:sp>
+      <p:sp>
+        <p:nvSpPr>
+          <p:cNvPr id="3" name="Rectangle 2"/>
+          <p:cNvSpPr/>
+          <p:nvPr/>
+        </p:nvSpPr>
+        <p:spPr>
+          <a:xfrm>
+            <a:off x="0" y="0"/>
+            <a:ext cx="73152" cy="1097280"/>
+          </a:xfrm>
+          <a:prstGeom prst="rect">
+            <a:avLst/>
+          </a:prstGeom>
+          <a:solidFill>
+            <a:srgbClr val="00D4E8"/>
+          </a:solidFill>
+          <a:ln>
+            <a:noFill/>
+          </a:ln>
+        </p:spPr>
+        <p:style>
+          <a:lnRef idx="1">
+            <a:schemeClr val="accent1"/>
+          </a:lnRef>
+          <a:fillRef idx="3">
+            <a:schemeClr val="accent1"/>
+          </a:fillRef>
+          <a:effectRef idx="2">
+            <a:schemeClr val="accent1"/>
+          </a:effectRef>
+          <a:fontRef idx="minor">
+            <a:schemeClr val="lt1"/>
+          </a:fontRef>
+        </p:style>
+        <p:txBody>
+          <a:bodyPr rtlCol="0" anchor="ctr"/>
+          <a:lstStyle/>
+          <a:p>
+            <a:pPr algn="ctr"/>
+          </a:p>
+        </p:txBody>
+      </p:sp>
+      <p:sp>
+        <p:nvSpPr>
+          <p:cNvPr id="4" name="Rectangle 3"/>
+          <p:cNvSpPr/>
+          <p:nvPr/>
+        </p:nvSpPr>
+        <p:spPr>
+          <a:xfrm>
+            <a:off x="137160" y="137160"/>
+            <a:ext cx="640080" cy="502920"/>
+          </a:xfrm>
+          <a:prstGeom prst="rect">
+            <a:avLst/>
+          </a:prstGeom>
+          <a:solidFill>
+            <a:srgbClr val="00D4E8"/>
+          </a:solidFill>
+          <a:ln>
+            <a:noFill/>
+          </a:ln>
+        </p:spPr>
+        <p:style>
+          <a:lnRef idx="1">
+            <a:schemeClr val="accent1"/>
+          </a:lnRef>
+          <a:fillRef idx="3">
+            <a:schemeClr val="accent1"/>
+          </a:fillRef>
+          <a:effectRef idx="2">
+            <a:schemeClr val="accent1"/>
+          </a:effectRef>
+          <a:fontRef idx="minor">
+            <a:schemeClr val="lt1"/>
+          </a:fontRef>
+        </p:style>
+        <p:txBody>
+          <a:bodyPr rtlCol="0" anchor="ctr"/>
+          <a:lstStyle/>
+          <a:p>
+            <a:pPr algn="ctr"/>
+          </a:p>
+        </p:txBody>
+      </p:sp>
+      <p:sp>
+        <p:nvSpPr>
+          <p:cNvPr id="5" name="TextBox 4"/>
+          <p:cNvSpPr txBox="1"/>
+          <p:nvPr/>
+        </p:nvSpPr>
+        <p:spPr>
+          <a:xfrm>
+            <a:off x="137160" y="137160"/>
+            <a:ext cx="640080" cy="502920"/>
+          </a:xfrm>
+          <a:prstGeom prst="rect">
+            <a:avLst/>
+          </a:prstGeom>
+          <a:noFill/>
+        </p:spPr>
+        <p:txBody>
+          <a:bodyPr wrap="square">
+            <a:spAutoFit/>
+          </a:bodyPr>
+          <a:lstStyle/>
+          <a:p>
+            <a:pPr algn="ctr"/>
+            <a:r>
+              <a:rPr sz="2000" b="1">
+                <a:solidFill>
+                  <a:srgbClr val="0D1B2A"/>
+                </a:solidFill>
+                <a:latin typeface="Segoe UI"/>
+              </a:rPr>
+              <a:t>A8</a:t>
+            </a:r>
+          </a:p>
+        </p:txBody>
+      </p:sp>
+      <p:sp>
+        <p:nvSpPr>
+          <p:cNvPr id="6" name="TextBox 5"/>
+          <p:cNvSpPr txBox="1"/>
+          <p:nvPr/>
+        </p:nvSpPr>
+        <p:spPr>
+          <a:xfrm>
+            <a:off x="137160" y="621792"/>
+            <a:ext cx="640080" cy="274320"/>
+          </a:xfrm>
+          <a:prstGeom prst="rect">
+            <a:avLst/>
+          </a:prstGeom>
+          <a:noFill/>
+        </p:spPr>
+        <p:txBody>
+          <a:bodyPr wrap="square">
+            <a:spAutoFit/>
+          </a:bodyPr>
+          <a:lstStyle/>
+          <a:p>
+            <a:pPr algn="ctr"/>
+            <a:r>
+              <a:rPr sz="800" b="0">
+                <a:solidFill>
+                  <a:srgbClr val="00D4E8"/>
+                </a:solidFill>
+                <a:latin typeface="Segoe UI"/>
+              </a:rPr>
+              <a:t>APPENDIX</a:t>
+            </a:r>
+          </a:p>
+        </p:txBody>
+      </p:sp>
+      <p:sp>
+        <p:nvSpPr>
+          <p:cNvPr id="7" name="TextBox 6"/>
+          <p:cNvSpPr txBox="1"/>
+          <p:nvPr/>
+        </p:nvSpPr>
+        <p:spPr>
+          <a:xfrm>
+            <a:off x="914400" y="73152"/>
+            <a:ext cx="10515600" cy="640080"/>
+          </a:xfrm>
+          <a:prstGeom prst="rect">
+            <a:avLst/>
+          </a:prstGeom>
+          <a:noFill/>
+        </p:spPr>
+        <p:txBody>
+          <a:bodyPr wrap="square">
+            <a:spAutoFit/>
+          </a:bodyPr>
+          <a:lstStyle/>
+          <a:p>
+            <a:pPr algn="l"/>
+            <a:r>
+              <a:rPr sz="2600" b="1">
+                <a:solidFill>
+                  <a:srgbClr val="FFFFFF"/>
+                </a:solidFill>
+                <a:latin typeface="Sarabun"/>
+              </a:rPr>
+              <a:t>Technical Reference — InfluxDB</a:t>
+            </a:r>
+          </a:p>
+        </p:txBody>
+      </p:sp>
+      <p:sp>
+        <p:nvSpPr>
+          <p:cNvPr id="8" name="TextBox 7"/>
+          <p:cNvSpPr txBox="1"/>
+          <p:nvPr/>
+        </p:nvSpPr>
+        <p:spPr>
+          <a:xfrm>
+            <a:off x="914400" y="713232"/>
+            <a:ext cx="10515600" cy="347472"/>
+          </a:xfrm>
+          <a:prstGeom prst="rect">
+            <a:avLst/>
+          </a:prstGeom>
+          <a:noFill/>
+        </p:spPr>
+        <p:txBody>
+          <a:bodyPr wrap="square">
+            <a:spAutoFit/>
+          </a:bodyPr>
+          <a:lstStyle/>
+          <a:p>
+            <a:pPr algn="l"/>
+            <a:r>
+              <a:rPr sz="1300" b="0">
+                <a:solidFill>
+                  <a:srgbClr val="B0C4DE"/>
+                </a:solidFill>
+                <a:latin typeface="Sarabun"/>
+              </a:rPr>
+              <a:t>ข้อมูลอ้างอิงทางเทคนิค: InfluxDB Concepts &amp; Sizing</a:t>
+            </a:r>
+          </a:p>
+        </p:txBody>
+      </p:sp>
+      <p:sp>
+        <p:nvSpPr>
+          <p:cNvPr id="9" name="Rectangle 8"/>
+          <p:cNvSpPr/>
+          <p:nvPr/>
+        </p:nvSpPr>
+        <p:spPr>
+          <a:xfrm>
+            <a:off x="274320" y="1188720"/>
+            <a:ext cx="5760720" cy="5394960"/>
+          </a:xfrm>
+          <a:prstGeom prst="rect">
+            <a:avLst/>
+          </a:prstGeom>
+          <a:solidFill>
+            <a:srgbClr val="162A44"/>
+          </a:solidFill>
+          <a:ln>
+            <a:noFill/>
+          </a:ln>
+        </p:spPr>
+        <p:style>
+          <a:lnRef idx="1">
+            <a:schemeClr val="accent1"/>
+          </a:lnRef>
+          <a:fillRef idx="3">
+            <a:schemeClr val="accent1"/>
+          </a:fillRef>
+          <a:effectRef idx="2">
+            <a:schemeClr val="accent1"/>
+          </a:effectRef>
+          <a:fontRef idx="minor">
+            <a:schemeClr val="lt1"/>
+          </a:fontRef>
+        </p:style>
+        <p:txBody>
+          <a:bodyPr rtlCol="0" anchor="ctr"/>
+          <a:lstStyle/>
+          <a:p>
+            <a:pPr algn="ctr"/>
+          </a:p>
+        </p:txBody>
+      </p:sp>
+      <p:sp>
+        <p:nvSpPr>
+          <p:cNvPr id="10" name="Rectangle 9"/>
+          <p:cNvSpPr/>
+          <p:nvPr/>
+        </p:nvSpPr>
+        <p:spPr>
+          <a:xfrm>
+            <a:off x="274320" y="1188720"/>
+            <a:ext cx="5760720" cy="54864"/>
+          </a:xfrm>
+          <a:prstGeom prst="rect">
+            <a:avLst/>
+          </a:prstGeom>
+          <a:solidFill>
+            <a:srgbClr val="00D4E8"/>
+          </a:solidFill>
+          <a:ln>
+            <a:noFill/>
+          </a:ln>
+        </p:spPr>
+        <p:style>
+          <a:lnRef idx="1">
+            <a:schemeClr val="accent1"/>
+          </a:lnRef>
+          <a:fillRef idx="3">
+            <a:schemeClr val="accent1"/>
+          </a:fillRef>
+          <a:effectRef idx="2">
+            <a:schemeClr val="accent1"/>
+          </a:effectRef>
+          <a:fontRef idx="minor">
+            <a:schemeClr val="lt1"/>
+          </a:fontRef>
+        </p:style>
+        <p:txBody>
+          <a:bodyPr rtlCol="0" anchor="ctr"/>
+          <a:lstStyle/>
+          <a:p>
+            <a:pPr algn="ctr"/>
+          </a:p>
+        </p:txBody>
+      </p:sp>
+      <p:sp>
+        <p:nvSpPr>
+          <p:cNvPr id="11" name="TextBox 10"/>
+          <p:cNvSpPr txBox="1"/>
+          <p:nvPr/>
+        </p:nvSpPr>
+        <p:spPr>
+          <a:xfrm>
+            <a:off x="384048" y="1261872"/>
+            <a:ext cx="5550407" cy="5257800"/>
+          </a:xfrm>
+          <a:prstGeom prst="rect">
+            <a:avLst/>
+          </a:prstGeom>
+          <a:noFill/>
+        </p:spPr>
+        <p:txBody>
+          <a:bodyPr wrap="square">
+            <a:spAutoFit/>
+          </a:bodyPr>
+          <a:lstStyle/>
+          <a:p>
+            <a:r>
+              <a:rPr sz="1500" b="1">
+                <a:solidFill>
+                  <a:srgbClr val="00D4E8"/>
+                </a:solidFill>
+                <a:latin typeface="Sarabun"/>
+              </a:rPr>
+              <a:t>InfluxDB Key Concepts</a:t>
+            </a:r>
+          </a:p>
+          <a:p>
+            <a:r>
+              <a:rPr sz="1300" b="1">
+                <a:solidFill>
+                  <a:srgbClr val="00D4E8"/>
+                </a:solidFill>
+              </a:rPr>
+              <a:t> Measurement &amp; Fields</a:t>
+            </a:r>
+          </a:p>
+          <a:p>
+            <a:pPr algn="l"/>
+            <a:r>
+              <a:rPr sz="1200" b="0">
+                <a:solidFill>
+                  <a:srgbClr val="FFFFFF"/>
+                </a:solidFill>
+                <a:latin typeface="Segoe UI"/>
+              </a:rPr>
+              <a:t>• Measurement = Table: electricity_usage</a:t>
+            </a:r>
+          </a:p>
+          <a:p>
+            <a:pPr algn="l"/>
+            <a:r>
+              <a:rPr sz="1200" b="0">
+                <a:solidFill>
+                  <a:srgbClr val="FFFFFF"/>
+                </a:solidFill>
+                <a:latin typeface="Segoe UI"/>
+              </a:rPr>
+              <a:t>• Tag: device_id (indexed, low cardinality)</a:t>
+            </a:r>
+          </a:p>
+          <a:p>
+            <a:pPr algn="l"/>
+            <a:r>
+              <a:rPr sz="1200" b="0">
+                <a:solidFill>
+                  <a:srgbClr val="FFFFFF"/>
+                </a:solidFill>
+                <a:latin typeface="Segoe UI"/>
+              </a:rPr>
+              <a:t>• Fields: 33 float64 values (not indexed)</a:t>
+            </a:r>
+          </a:p>
+          <a:p>
+            <a:pPr algn="l"/>
+            <a:r>
+              <a:rPr sz="1200" b="0">
+                <a:solidFill>
+                  <a:srgbClr val="FFFFFF"/>
+                </a:solidFill>
+                <a:latin typeface="Segoe UI"/>
+              </a:rPr>
+              <a:t>• Timestamp: nanosecond precision</a:t>
+            </a:r>
+          </a:p>
+          <a:p>
+            <a:r>
+              <a:t/>
+            </a:r>
+          </a:p>
+          <a:p>
+            <a:r>
+              <a:rPr sz="1300" b="1">
+                <a:solidFill>
+                  <a:srgbClr val="00D4E8"/>
+                </a:solidFill>
+              </a:rPr>
+              <a:t> TSM Engine</a:t>
+            </a:r>
+          </a:p>
+          <a:p>
+            <a:pPr algn="l"/>
+            <a:r>
+              <a:rPr sz="1200" b="0">
+                <a:solidFill>
+                  <a:srgbClr val="FFFFFF"/>
+                </a:solidFill>
+                <a:latin typeface="Segoe UI"/>
+              </a:rPr>
+              <a:t>• WAL (Write-Ahead Log): durability</a:t>
+            </a:r>
+          </a:p>
+          <a:p>
+            <a:pPr algn="l"/>
+            <a:r>
+              <a:rPr sz="1200" b="0">
+                <a:solidFill>
+                  <a:srgbClr val="FFFFFF"/>
+                </a:solidFill>
+                <a:latin typeface="Segoe UI"/>
+              </a:rPr>
+              <a:t>• In-memory Cache: fast reads</a:t>
+            </a:r>
+          </a:p>
+          <a:p>
+            <a:pPr algn="l"/>
+            <a:r>
+              <a:rPr sz="1200" b="0">
+                <a:solidFill>
+                  <a:srgbClr val="FFFFFF"/>
+                </a:solidFill>
+                <a:latin typeface="Segoe UI"/>
+              </a:rPr>
+              <a:t>• TSM Files: compressed on disk</a:t>
+            </a:r>
+          </a:p>
+          <a:p>
+            <a:pPr algn="l"/>
+            <a:r>
+              <a:rPr sz="1200" b="0">
+                <a:solidFill>
+                  <a:srgbClr val="FFFFFF"/>
+                </a:solidFill>
+                <a:latin typeface="Segoe UI"/>
+              </a:rPr>
+              <a:t>• Shard: data file by time range</a:t>
+            </a:r>
+          </a:p>
+          <a:p>
+            <a:pPr algn="l"/>
+            <a:r>
+              <a:rPr sz="1200" b="0">
+                <a:solidFill>
+                  <a:srgbClr val="FFFFFF"/>
+                </a:solidFill>
+                <a:latin typeface="Segoe UI"/>
+              </a:rPr>
+              <a:t>• Shard Drop: delete whole file = zero CPU</a:t>
+            </a:r>
+          </a:p>
+          <a:p>
+            <a:r>
+              <a:t/>
+            </a:r>
+          </a:p>
+          <a:p>
+            <a:r>
+              <a:rPr sz="1300" b="1">
+                <a:solidFill>
+                  <a:srgbClr val="00D4E8"/>
+                </a:solidFill>
+              </a:rPr>
+              <a:t> Retention Policy</a:t>
+            </a:r>
+          </a:p>
+          <a:p>
+            <a:pPr algn="l"/>
+            <a:r>
+              <a:rPr sz="1200" b="0">
+                <a:solidFill>
+                  <a:srgbClr val="FFFFFF"/>
+                </a:solidFill>
+                <a:latin typeface="Segoe UI"/>
+              </a:rPr>
+              <a:t>• Set per-bucket, not per-measurement</a:t>
+            </a:r>
+          </a:p>
+          <a:p>
+            <a:pPr algn="l"/>
+            <a:r>
+              <a:rPr sz="1200" b="0">
+                <a:solidFill>
+                  <a:srgbClr val="FFFFFF"/>
+                </a:solidFill>
+                <a:latin typeface="Sarabun"/>
+              </a:rPr>
+              <a:t>• Cannot set per device/tag (จึงต้องแยก Bucket)</a:t>
+            </a:r>
+          </a:p>
+          <a:p>
+            <a:pPr algn="l"/>
+            <a:r>
+              <a:rPr sz="1200" b="0">
+                <a:solidFill>
+                  <a:srgbClr val="FFFFFF"/>
+                </a:solidFill>
+                <a:latin typeface="Segoe UI"/>
+              </a:rPr>
+              <a:t>• Gorilla compression: ~3x float reduction</a:t>
+            </a:r>
+          </a:p>
+          <a:p>
+            <a:pPr algn="l"/>
+            <a:r>
+              <a:rPr sz="1200" b="0">
+                <a:solidFill>
+                  <a:srgbClr val="FFFFFF"/>
+                </a:solidFill>
+                <a:latin typeface="Segoe UI"/>
+              </a:rPr>
+              <a:t>• Delta encoding: ~8x timestamp reduction</a:t>
+            </a:r>
+          </a:p>
+        </p:txBody>
+      </p:sp>
+      <p:sp>
+        <p:nvSpPr>
+          <p:cNvPr id="12" name="Rectangle 11"/>
+          <p:cNvSpPr/>
+          <p:nvPr/>
+        </p:nvSpPr>
+        <p:spPr>
+          <a:xfrm>
+            <a:off x="6126479" y="1188720"/>
+            <a:ext cx="5760720" cy="5394960"/>
+          </a:xfrm>
+          <a:prstGeom prst="rect">
+            <a:avLst/>
+          </a:prstGeom>
+          <a:solidFill>
+            <a:srgbClr val="162A44"/>
+          </a:solidFill>
+          <a:ln>
+            <a:noFill/>
+          </a:ln>
+        </p:spPr>
+        <p:style>
+          <a:lnRef idx="1">
+            <a:schemeClr val="accent1"/>
+          </a:lnRef>
+          <a:fillRef idx="3">
+            <a:schemeClr val="accent1"/>
+          </a:fillRef>
+          <a:effectRef idx="2">
+            <a:schemeClr val="accent1"/>
+          </a:effectRef>
+          <a:fontRef idx="minor">
+            <a:schemeClr val="lt1"/>
+          </a:fontRef>
+        </p:style>
+        <p:txBody>
+          <a:bodyPr rtlCol="0" anchor="ctr"/>
+          <a:lstStyle/>
+          <a:p>
+            <a:pPr algn="ctr"/>
+          </a:p>
+        </p:txBody>
+      </p:sp>
+      <p:sp>
+        <p:nvSpPr>
+          <p:cNvPr id="13" name="Rectangle 12"/>
+          <p:cNvSpPr/>
+          <p:nvPr/>
+        </p:nvSpPr>
+        <p:spPr>
+          <a:xfrm>
+            <a:off x="6126479" y="1188720"/>
+            <a:ext cx="5760720" cy="54864"/>
+          </a:xfrm>
+          <a:prstGeom prst="rect">
+            <a:avLst/>
+          </a:prstGeom>
+          <a:solidFill>
+            <a:srgbClr val="00E596"/>
+          </a:solidFill>
+          <a:ln>
+            <a:noFill/>
+          </a:ln>
+        </p:spPr>
+        <p:style>
+          <a:lnRef idx="1">
+            <a:schemeClr val="accent1"/>
+          </a:lnRef>
+          <a:fillRef idx="3">
+            <a:schemeClr val="accent1"/>
+          </a:fillRef>
+          <a:effectRef idx="2">
+            <a:schemeClr val="accent1"/>
+          </a:effectRef>
+          <a:fontRef idx="minor">
+            <a:schemeClr val="lt1"/>
+          </a:fontRef>
+        </p:style>
+        <p:txBody>
+          <a:bodyPr rtlCol="0" anchor="ctr"/>
+          <a:lstStyle/>
+          <a:p>
+            <a:pPr algn="ctr"/>
+          </a:p>
+        </p:txBody>
+      </p:sp>
+      <p:sp>
+        <p:nvSpPr>
+          <p:cNvPr id="14" name="TextBox 13"/>
+          <p:cNvSpPr txBox="1"/>
+          <p:nvPr/>
+        </p:nvSpPr>
+        <p:spPr>
+          <a:xfrm>
+            <a:off x="6236207" y="1261872"/>
+            <a:ext cx="5550407" cy="5257800"/>
+          </a:xfrm>
+          <a:prstGeom prst="rect">
+            <a:avLst/>
+          </a:prstGeom>
+          <a:noFill/>
+        </p:spPr>
+        <p:txBody>
+          <a:bodyPr wrap="square">
+            <a:spAutoFit/>
+          </a:bodyPr>
+          <a:lstStyle/>
+          <a:p>
+            <a:r>
+              <a:rPr sz="1500" b="1">
+                <a:solidFill>
+                  <a:srgbClr val="00E596"/>
+                </a:solidFill>
+                <a:latin typeface="Sarabun"/>
+              </a:rPr>
+              <a:t>Sizing at Scale</a:t>
+            </a:r>
+          </a:p>
+          <a:p>
+            <a:r>
+              <a:rPr sz="1300" b="1">
+                <a:solidFill>
+                  <a:srgbClr val="00E596"/>
+                </a:solidFill>
+              </a:rPr>
+              <a:t> Storage per Device/Month (compressed)</a:t>
+            </a:r>
+          </a:p>
+          <a:p>
+            <a:pPr algn="l"/>
+            <a:r>
+              <a:rPr sz="1200" b="0">
+                <a:solidFill>
+                  <a:srgbClr val="FFFFFF"/>
+                </a:solidFill>
+                <a:latin typeface="Segoe UI"/>
+              </a:rPr>
+              <a:t>• Free tier (7d raw): ~47.8 MB</a:t>
+            </a:r>
+          </a:p>
+          <a:p>
+            <a:pPr algn="l"/>
+            <a:r>
+              <a:rPr sz="1200" b="0">
+                <a:solidFill>
+                  <a:srgbClr val="FFFFFF"/>
+                </a:solidFill>
+                <a:latin typeface="Segoe UI"/>
+              </a:rPr>
+              <a:t>• Pro tier (90d raw): ~612 MB</a:t>
+            </a:r>
+          </a:p>
+          <a:p>
+            <a:pPr algn="l"/>
+            <a:r>
+              <a:rPr sz="1200" b="0">
+                <a:solidFill>
+                  <a:srgbClr val="FFFFFF"/>
+                </a:solidFill>
+                <a:latin typeface="Segoe UI"/>
+              </a:rPr>
+              <a:t>• Enterprise (365d raw): ~2.46 GB</a:t>
+            </a:r>
+          </a:p>
+          <a:p>
+            <a:pPr algn="l"/>
+            <a:r>
+              <a:rPr sz="1200" b="0">
+                <a:solidFill>
+                  <a:srgbClr val="FFFFFF"/>
+                </a:solidFill>
+                <a:latin typeface="Segoe UI"/>
+              </a:rPr>
+              <a:t>• 1-min 30d: ~3.4 MB</a:t>
+            </a:r>
+          </a:p>
+          <a:p>
+            <a:pPr algn="l"/>
+            <a:r>
+              <a:rPr sz="1200" b="0">
+                <a:solidFill>
+                  <a:srgbClr val="FFFFFF"/>
+                </a:solidFill>
+                <a:latin typeface="Segoe UI"/>
+              </a:rPr>
+              <a:t>• 1-hour 1yr: ~680 KB</a:t>
+            </a:r>
+          </a:p>
+          <a:p>
+            <a:r>
+              <a:t/>
+            </a:r>
+          </a:p>
+          <a:p>
+            <a:r>
+              <a:rPr sz="1300" b="1">
+                <a:solidFill>
+                  <a:srgbClr val="00E596"/>
+                </a:solidFill>
+              </a:rPr>
+              <a:t> VPS RAM Usage (InfluxDB)</a:t>
+            </a:r>
+          </a:p>
+          <a:p>
+            <a:pPr algn="l"/>
+            <a:r>
+              <a:rPr sz="1200" b="0">
+                <a:solidFill>
+                  <a:srgbClr val="FFFFFF"/>
+                </a:solidFill>
+                <a:latin typeface="Segoe UI"/>
+              </a:rPr>
+              <a:t>• Series Cardinality = device_count</a:t>
+            </a:r>
+          </a:p>
+          <a:p>
+            <a:pPr algn="l"/>
+            <a:r>
+              <a:rPr sz="1200" b="0">
+                <a:solidFill>
+                  <a:srgbClr val="FFFFFF"/>
+                </a:solidFill>
+                <a:latin typeface="Segoe UI"/>
+              </a:rPr>
+              <a:t>• 1,000 devices: ~800 MB RAM for index</a:t>
+            </a:r>
+          </a:p>
+          <a:p>
+            <a:pPr algn="l"/>
+            <a:r>
+              <a:rPr sz="1200" b="0">
+                <a:solidFill>
+                  <a:srgbClr val="FFFFFF"/>
+                </a:solidFill>
+                <a:latin typeface="Segoe UI"/>
+              </a:rPr>
+              <a:t>• 10,000 devices: ~4 GB RAM for index</a:t>
+            </a:r>
+          </a:p>
+          <a:p>
+            <a:pPr algn="l"/>
+            <a:r>
+              <a:rPr sz="1200" b="0">
+                <a:solidFill>
+                  <a:srgbClr val="FFFFFF"/>
+                </a:solidFill>
+                <a:latin typeface="Segoe UI"/>
+              </a:rPr>
+              <a:t>• 9 Buckets overhead: negligible (KB)</a:t>
+            </a:r>
+          </a:p>
+          <a:p>
+            <a:r>
+              <a:t/>
+            </a:r>
+          </a:p>
+          <a:p>
+            <a:r>
+              <a:rPr sz="1300" b="1">
+                <a:solidFill>
+                  <a:srgbClr val="00E596"/>
+                </a:solidFill>
+              </a:rPr>
+              <a:t> Write Throughput</a:t>
+            </a:r>
+          </a:p>
+          <a:p>
+            <a:pPr algn="l"/>
+            <a:r>
+              <a:rPr sz="1200" b="0">
+                <a:solidFill>
+                  <a:srgbClr val="FFFFFF"/>
+                </a:solidFill>
+                <a:latin typeface="Segoe UI"/>
+              </a:rPr>
+              <a:t>• Telegraf batch: 1000 points/write</a:t>
+            </a:r>
+          </a:p>
+          <a:p>
+            <a:pPr algn="l"/>
+            <a:r>
+              <a:rPr sz="1200" b="0">
+                <a:solidFill>
+                  <a:srgbClr val="FFFFFF"/>
+                </a:solidFill>
+                <a:latin typeface="Segoe UI"/>
+              </a:rPr>
+              <a:t>• 100 devices x 33 fields = 3,300 pts/s</a:t>
+            </a:r>
+          </a:p>
+          <a:p>
+            <a:pPr algn="l"/>
+            <a:r>
+              <a:rPr sz="1200" b="0">
+                <a:solidFill>
+                  <a:srgbClr val="FFFFFF"/>
+                </a:solidFill>
+                <a:latin typeface="Segoe UI"/>
+              </a:rPr>
+              <a:t>• KVM 2 limit: ~100,000 pts/s</a:t>
+            </a:r>
+          </a:p>
+          <a:p>
+            <a:pPr algn="l"/>
+            <a:r>
+              <a:rPr sz="1200" b="0">
+                <a:solidFill>
+                  <a:srgbClr val="FFFFFF"/>
+                </a:solidFill>
+                <a:latin typeface="Segoe UI"/>
+              </a:rPr>
+              <a:t>• Well within capacity at 1,000 devices</a:t>
+            </a:r>
+          </a:p>
+        </p:txBody>
+      </p:sp>
+    </p:spTree>
+  </p:cSld>
+  <p:clrMapOvr>
+    <a:masterClrMapping/>
+  </p:clrMapOvr>
+</p:sld>
+</file>
+
+<file path=ppt/slides/slide19.xml><?xml version="1.0" encoding="utf-8"?>
+<p:sld xmlns:a="http://schemas.openxmlformats.org/drawingml/2006/main" xmlns:p="http://schemas.openxmlformats.org/presentationml/2006/main" xmlns:r="http://schemas.openxmlformats.org/officeDocument/2006/relationships">
+  <p:cSld>
+    <p:bg>
+      <p:bgPr>
+        <a:solidFill>
+          <a:srgbClr val="0D1B2A"/>
+        </a:solidFill>
+        <a:effectLst/>
+      </p:bgPr>
+    </p:bg>
+    <p:spTree>
+      <p:nvGrpSpPr>
+        <p:cNvPr id="1" name=""/>
+        <p:cNvGrpSpPr/>
+        <p:nvPr/>
+      </p:nvGrpSpPr>
+      <p:grpSpPr/>
+      <p:sp>
+        <p:nvSpPr>
+          <p:cNvPr id="2" name="Rectangle 1"/>
+          <p:cNvSpPr/>
+          <p:nvPr/>
+        </p:nvSpPr>
+        <p:spPr>
+          <a:xfrm>
+            <a:off x="0" y="0"/>
+            <a:ext cx="12188952" cy="1097280"/>
+          </a:xfrm>
+          <a:prstGeom prst="rect">
+            <a:avLst/>
+          </a:prstGeom>
+          <a:solidFill>
+            <a:srgbClr val="1E3A5F"/>
+          </a:solidFill>
+          <a:ln>
+            <a:noFill/>
+          </a:ln>
+        </p:spPr>
+        <p:style>
+          <a:lnRef idx="1">
+            <a:schemeClr val="accent1"/>
+          </a:lnRef>
+          <a:fillRef idx="3">
+            <a:schemeClr val="accent1"/>
+          </a:fillRef>
+          <a:effectRef idx="2">
+            <a:schemeClr val="accent1"/>
+          </a:effectRef>
+          <a:fontRef idx="minor">
+            <a:schemeClr val="lt1"/>
+          </a:fontRef>
+        </p:style>
+        <p:txBody>
+          <a:bodyPr rtlCol="0" anchor="ctr"/>
+          <a:lstStyle/>
+          <a:p>
+            <a:pPr algn="ctr"/>
+          </a:p>
+        </p:txBody>
+      </p:sp>
+      <p:sp>
+        <p:nvSpPr>
+          <p:cNvPr id="3" name="Rectangle 2"/>
+          <p:cNvSpPr/>
+          <p:nvPr/>
+        </p:nvSpPr>
+        <p:spPr>
+          <a:xfrm>
+            <a:off x="0" y="0"/>
+            <a:ext cx="73152" cy="1097280"/>
+          </a:xfrm>
+          <a:prstGeom prst="rect">
+            <a:avLst/>
+          </a:prstGeom>
+          <a:solidFill>
+            <a:srgbClr val="FFC800"/>
+          </a:solidFill>
+          <a:ln>
+            <a:noFill/>
+          </a:ln>
+        </p:spPr>
+        <p:style>
+          <a:lnRef idx="1">
+            <a:schemeClr val="accent1"/>
+          </a:lnRef>
+          <a:fillRef idx="3">
+            <a:schemeClr val="accent1"/>
+          </a:fillRef>
+          <a:effectRef idx="2">
+            <a:schemeClr val="accent1"/>
+          </a:effectRef>
+          <a:fontRef idx="minor">
+            <a:schemeClr val="lt1"/>
+          </a:fontRef>
+        </p:style>
+        <p:txBody>
+          <a:bodyPr rtlCol="0" anchor="ctr"/>
+          <a:lstStyle/>
+          <a:p>
+            <a:pPr algn="ctr"/>
+          </a:p>
+        </p:txBody>
+      </p:sp>
+      <p:sp>
+        <p:nvSpPr>
+          <p:cNvPr id="4" name="Rectangle 3"/>
+          <p:cNvSpPr/>
+          <p:nvPr/>
+        </p:nvSpPr>
+        <p:spPr>
+          <a:xfrm>
+            <a:off x="137160" y="137160"/>
+            <a:ext cx="640080" cy="502920"/>
+          </a:xfrm>
+          <a:prstGeom prst="rect">
+            <a:avLst/>
+          </a:prstGeom>
+          <a:solidFill>
+            <a:srgbClr val="FFC800"/>
+          </a:solidFill>
+          <a:ln>
+            <a:noFill/>
+          </a:ln>
+        </p:spPr>
+        <p:style>
+          <a:lnRef idx="1">
+            <a:schemeClr val="accent1"/>
+          </a:lnRef>
+          <a:fillRef idx="3">
+            <a:schemeClr val="accent1"/>
+          </a:fillRef>
+          <a:effectRef idx="2">
+            <a:schemeClr val="accent1"/>
+          </a:effectRef>
+          <a:fontRef idx="minor">
+            <a:schemeClr val="lt1"/>
+          </a:fontRef>
+        </p:style>
+        <p:txBody>
+          <a:bodyPr rtlCol="0" anchor="ctr"/>
+          <a:lstStyle/>
+          <a:p>
+            <a:pPr algn="ctr"/>
+          </a:p>
+        </p:txBody>
+      </p:sp>
+      <p:sp>
+        <p:nvSpPr>
+          <p:cNvPr id="5" name="TextBox 4"/>
+          <p:cNvSpPr txBox="1"/>
+          <p:nvPr/>
+        </p:nvSpPr>
+        <p:spPr>
+          <a:xfrm>
+            <a:off x="137160" y="137160"/>
+            <a:ext cx="640080" cy="502920"/>
+          </a:xfrm>
+          <a:prstGeom prst="rect">
+            <a:avLst/>
+          </a:prstGeom>
+          <a:noFill/>
+        </p:spPr>
+        <p:txBody>
+          <a:bodyPr wrap="square">
+            <a:spAutoFit/>
+          </a:bodyPr>
+          <a:lstStyle/>
+          <a:p>
+            <a:pPr algn="ctr"/>
+            <a:r>
+              <a:rPr sz="2000" b="1">
+                <a:solidFill>
+                  <a:srgbClr val="0D1B2A"/>
+                </a:solidFill>
+                <a:latin typeface="Segoe UI"/>
+              </a:rPr>
+              <a:t>A9</a:t>
+            </a:r>
+          </a:p>
+        </p:txBody>
+      </p:sp>
+      <p:sp>
+        <p:nvSpPr>
+          <p:cNvPr id="6" name="TextBox 5"/>
+          <p:cNvSpPr txBox="1"/>
+          <p:nvPr/>
+        </p:nvSpPr>
+        <p:spPr>
+          <a:xfrm>
+            <a:off x="137160" y="621792"/>
+            <a:ext cx="640080" cy="274320"/>
+          </a:xfrm>
+          <a:prstGeom prst="rect">
+            <a:avLst/>
+          </a:prstGeom>
+          <a:noFill/>
+        </p:spPr>
+        <p:txBody>
+          <a:bodyPr wrap="square">
+            <a:spAutoFit/>
+          </a:bodyPr>
+          <a:lstStyle/>
+          <a:p>
+            <a:pPr algn="ctr"/>
+            <a:r>
+              <a:rPr sz="800" b="0">
+                <a:solidFill>
+                  <a:srgbClr val="FFC800"/>
+                </a:solidFill>
+                <a:latin typeface="Segoe UI"/>
+              </a:rPr>
+              <a:t>APPENDIX</a:t>
+            </a:r>
+          </a:p>
+        </p:txBody>
+      </p:sp>
+      <p:sp>
+        <p:nvSpPr>
+          <p:cNvPr id="7" name="TextBox 6"/>
+          <p:cNvSpPr txBox="1"/>
+          <p:nvPr/>
+        </p:nvSpPr>
+        <p:spPr>
+          <a:xfrm>
+            <a:off x="914400" y="73152"/>
+            <a:ext cx="10515600" cy="640080"/>
+          </a:xfrm>
+          <a:prstGeom prst="rect">
+            <a:avLst/>
+          </a:prstGeom>
+          <a:noFill/>
+        </p:spPr>
+        <p:txBody>
+          <a:bodyPr wrap="square">
+            <a:spAutoFit/>
+          </a:bodyPr>
+          <a:lstStyle/>
+          <a:p>
+            <a:pPr algn="l"/>
+            <a:r>
+              <a:rPr sz="2600" b="1">
+                <a:solidFill>
+                  <a:srgbClr val="FFFFFF"/>
+                </a:solidFill>
+                <a:latin typeface="Segoe UI"/>
+              </a:rPr>
+              <a:t>API &amp; Flux Query Reference</a:t>
+            </a:r>
+          </a:p>
+        </p:txBody>
+      </p:sp>
+      <p:sp>
+        <p:nvSpPr>
+          <p:cNvPr id="8" name="TextBox 7"/>
+          <p:cNvSpPr txBox="1"/>
+          <p:nvPr/>
+        </p:nvSpPr>
+        <p:spPr>
+          <a:xfrm>
+            <a:off x="914400" y="713232"/>
+            <a:ext cx="10515600" cy="347472"/>
+          </a:xfrm>
+          <a:prstGeom prst="rect">
+            <a:avLst/>
+          </a:prstGeom>
+          <a:noFill/>
+        </p:spPr>
+        <p:txBody>
+          <a:bodyPr wrap="square">
+            <a:spAutoFit/>
+          </a:bodyPr>
+          <a:lstStyle/>
+          <a:p>
+            <a:pPr algn="l"/>
+            <a:r>
+              <a:rPr sz="1300" b="0">
+                <a:solidFill>
+                  <a:srgbClr val="B0C4DE"/>
+                </a:solidFill>
+                <a:latin typeface="Sarabun"/>
+              </a:rPr>
+              <a:t>ตัวอย่าง Flux Query และ API Endpoint ที่สำคัญ</a:t>
+            </a:r>
+          </a:p>
+        </p:txBody>
+      </p:sp>
+      <p:sp>
+        <p:nvSpPr>
+          <p:cNvPr id="9" name="Rectangle 8"/>
+          <p:cNvSpPr/>
+          <p:nvPr/>
+        </p:nvSpPr>
+        <p:spPr>
+          <a:xfrm>
+            <a:off x="274320" y="1188720"/>
+            <a:ext cx="5760720" cy="5394960"/>
+          </a:xfrm>
+          <a:prstGeom prst="rect">
+            <a:avLst/>
+          </a:prstGeom>
+          <a:solidFill>
+            <a:srgbClr val="162A44"/>
+          </a:solidFill>
+          <a:ln>
+            <a:noFill/>
+          </a:ln>
+        </p:spPr>
+        <p:style>
+          <a:lnRef idx="1">
+            <a:schemeClr val="accent1"/>
+          </a:lnRef>
+          <a:fillRef idx="3">
+            <a:schemeClr val="accent1"/>
+          </a:fillRef>
+          <a:effectRef idx="2">
+            <a:schemeClr val="accent1"/>
+          </a:effectRef>
+          <a:fontRef idx="minor">
+            <a:schemeClr val="lt1"/>
+          </a:fontRef>
+        </p:style>
+        <p:txBody>
+          <a:bodyPr rtlCol="0" anchor="ctr"/>
+          <a:lstStyle/>
+          <a:p>
+            <a:pPr algn="ctr"/>
+          </a:p>
+        </p:txBody>
+      </p:sp>
+      <p:sp>
+        <p:nvSpPr>
+          <p:cNvPr id="10" name="Rectangle 9"/>
+          <p:cNvSpPr/>
+          <p:nvPr/>
+        </p:nvSpPr>
+        <p:spPr>
+          <a:xfrm>
+            <a:off x="274320" y="1188720"/>
+            <a:ext cx="5760720" cy="54864"/>
+          </a:xfrm>
+          <a:prstGeom prst="rect">
+            <a:avLst/>
+          </a:prstGeom>
+          <a:solidFill>
+            <a:srgbClr val="008BFF"/>
+          </a:solidFill>
+          <a:ln>
+            <a:noFill/>
+          </a:ln>
+        </p:spPr>
+        <p:style>
+          <a:lnRef idx="1">
+            <a:schemeClr val="accent1"/>
+          </a:lnRef>
+          <a:fillRef idx="3">
+            <a:schemeClr val="accent1"/>
+          </a:fillRef>
+          <a:effectRef idx="2">
+            <a:schemeClr val="accent1"/>
+          </a:effectRef>
+          <a:fontRef idx="minor">
+            <a:schemeClr val="lt1"/>
+          </a:fontRef>
+        </p:style>
+        <p:txBody>
+          <a:bodyPr rtlCol="0" anchor="ctr"/>
+          <a:lstStyle/>
+          <a:p>
+            <a:pPr algn="ctr"/>
+          </a:p>
+        </p:txBody>
+      </p:sp>
+      <p:sp>
+        <p:nvSpPr>
+          <p:cNvPr id="11" name="TextBox 10"/>
+          <p:cNvSpPr txBox="1"/>
+          <p:nvPr/>
+        </p:nvSpPr>
+        <p:spPr>
+          <a:xfrm>
+            <a:off x="384048" y="1261872"/>
+            <a:ext cx="5550407" cy="5257800"/>
+          </a:xfrm>
+          <a:prstGeom prst="rect">
+            <a:avLst/>
+          </a:prstGeom>
+          <a:noFill/>
+        </p:spPr>
+        <p:txBody>
+          <a:bodyPr wrap="square">
+            <a:spAutoFit/>
+          </a:bodyPr>
+          <a:lstStyle/>
+          <a:p>
+            <a:r>
+              <a:rPr sz="1500" b="1">
+                <a:solidFill>
+                  <a:srgbClr val="008BFF"/>
+                </a:solidFill>
+                <a:latin typeface="Sarabun"/>
+              </a:rPr>
+              <a:t>Flux Query Patterns</a:t>
+            </a:r>
+          </a:p>
+          <a:p>
+            <a:r>
+              <a:rPr sz="1300" b="1">
+                <a:solidFill>
+                  <a:srgbClr val="008BFF"/>
+                </a:solidFill>
+              </a:rPr>
+              <a:t> Basic Query (Free Tier)</a:t>
+            </a:r>
+          </a:p>
+          <a:p>
+            <a:pPr algn="l"/>
+            <a:r>
+              <a:rPr sz="1200" b="0">
+                <a:solidFill>
+                  <a:srgbClr val="FFFFFF"/>
+                </a:solidFill>
+                <a:latin typeface="Segoe UI"/>
+              </a:rPr>
+              <a:t>• from(bucket:"power_data_free")</a:t>
+            </a:r>
+          </a:p>
+          <a:p>
+            <a:pPr algn="l"/>
+            <a:r>
+              <a:rPr sz="1200" b="0">
+                <a:solidFill>
+                  <a:srgbClr val="FFFFFF"/>
+                </a:solidFill>
+                <a:latin typeface="Segoe UI"/>
+              </a:rPr>
+              <a:t>  |&gt; range(start: -7d)</a:t>
+            </a:r>
+          </a:p>
+          <a:p>
+            <a:pPr algn="l"/>
+            <a:r>
+              <a:rPr sz="1200" b="0">
+                <a:solidFill>
+                  <a:srgbClr val="FFFFFF"/>
+                </a:solidFill>
+                <a:latin typeface="Segoe UI"/>
+              </a:rPr>
+              <a:t>  |&gt; filter(fn:(r) =&gt; r.device_id == "DEV-001")</a:t>
+            </a:r>
+          </a:p>
+          <a:p>
+            <a:pPr algn="l"/>
+            <a:r>
+              <a:rPr sz="1200" b="0">
+                <a:solidFill>
+                  <a:srgbClr val="FFFFFF"/>
+                </a:solidFill>
+                <a:latin typeface="Segoe UI"/>
+              </a:rPr>
+              <a:t>  |&gt; filter(fn:(r) =&gt; r._field == "active_power_total")</a:t>
+            </a:r>
+          </a:p>
+          <a:p>
+            <a:r>
+              <a:t/>
+            </a:r>
+          </a:p>
+          <a:p>
+            <a:r>
+              <a:rPr sz="1300" b="1">
+                <a:solidFill>
+                  <a:srgbClr val="008BFF"/>
+                </a:solidFill>
+              </a:rPr>
+              <a:t> Union Query (Seamless Graph)</a:t>
+            </a:r>
+          </a:p>
+          <a:p>
+            <a:pPr algn="l"/>
+            <a:r>
+              <a:rPr sz="1200" b="0">
+                <a:solidFill>
+                  <a:srgbClr val="FFFFFF"/>
+                </a:solidFill>
+                <a:latin typeface="Segoe UI"/>
+              </a:rPr>
+              <a:t>• data_free = from(bucket:"power_data_free")</a:t>
+            </a:r>
+          </a:p>
+          <a:p>
+            <a:pPr algn="l"/>
+            <a:r>
+              <a:rPr sz="1200" b="0">
+                <a:solidFill>
+                  <a:srgbClr val="FFFFFF"/>
+                </a:solidFill>
+                <a:latin typeface="Segoe UI"/>
+              </a:rPr>
+              <a:t>  |&gt; range(start: -7d)</a:t>
+            </a:r>
+          </a:p>
+          <a:p>
+            <a:pPr algn="l"/>
+            <a:r>
+              <a:rPr sz="1200" b="0">
+                <a:solidFill>
+                  <a:srgbClr val="FFFFFF"/>
+                </a:solidFill>
+                <a:latin typeface="Segoe UI"/>
+              </a:rPr>
+              <a:t>  |&gt; filter(fn:(r) =&gt; r.device_id == id)</a:t>
+            </a:r>
+          </a:p>
+          <a:p>
+            <a:pPr algn="l"/>
+            <a:r>
+              <a:rPr sz="1200" b="0">
+                <a:solidFill>
+                  <a:srgbClr val="FFFFFF"/>
+                </a:solidFill>
+                <a:latin typeface="Segoe UI"/>
+              </a:rPr>
+              <a:t>• data_pro = from(bucket:"power_data_pro")</a:t>
+            </a:r>
+          </a:p>
+          <a:p>
+            <a:pPr algn="l"/>
+            <a:r>
+              <a:rPr sz="1200" b="0">
+                <a:solidFill>
+                  <a:srgbClr val="FFFFFF"/>
+                </a:solidFill>
+                <a:latin typeface="Segoe UI"/>
+              </a:rPr>
+              <a:t>  |&gt; range(start: -7d)</a:t>
+            </a:r>
+          </a:p>
+          <a:p>
+            <a:pPr algn="l"/>
+            <a:r>
+              <a:rPr sz="1200" b="0">
+                <a:solidFill>
+                  <a:srgbClr val="FFFFFF"/>
+                </a:solidFill>
+                <a:latin typeface="Segoe UI"/>
+              </a:rPr>
+              <a:t>  |&gt; filter(fn:(r) =&gt; r.device_id == id)</a:t>
+            </a:r>
+          </a:p>
+          <a:p>
+            <a:pPr algn="l"/>
+            <a:r>
+              <a:rPr sz="1200" b="0">
+                <a:solidFill>
+                  <a:srgbClr val="FFFFFF"/>
+                </a:solidFill>
+                <a:latin typeface="Segoe UI"/>
+              </a:rPr>
+              <a:t>• union(tables:[data_free, data_pro])</a:t>
+            </a:r>
+          </a:p>
+          <a:p>
+            <a:r>
+              <a:t/>
+            </a:r>
+          </a:p>
+          <a:p>
+            <a:r>
+              <a:rPr sz="1300" b="1">
+                <a:solidFill>
+                  <a:srgbClr val="008BFF"/>
+                </a:solidFill>
+              </a:rPr>
+              <a:t> Billing Calculation</a:t>
+            </a:r>
+          </a:p>
+          <a:p>
+            <a:pPr algn="l"/>
+            <a:r>
+              <a:rPr sz="1200" b="0">
+                <a:solidFill>
+                  <a:srgbClr val="FFFFFF"/>
+                </a:solidFill>
+                <a:latin typeface="Segoe UI"/>
+              </a:rPr>
+              <a:t>• from(bucket:"power_data_free")</a:t>
+            </a:r>
+          </a:p>
+          <a:p>
+            <a:pPr algn="l"/>
+            <a:r>
+              <a:rPr sz="1200" b="0">
+                <a:solidFill>
+                  <a:srgbClr val="FFFFFF"/>
+                </a:solidFill>
+                <a:latin typeface="Segoe UI"/>
+              </a:rPr>
+              <a:t>  |&gt; range(start: -30d)</a:t>
+            </a:r>
+          </a:p>
+          <a:p>
+            <a:pPr algn="l"/>
+            <a:r>
+              <a:rPr sz="1200" b="0">
+                <a:solidFill>
+                  <a:srgbClr val="FFFFFF"/>
+                </a:solidFill>
+                <a:latin typeface="Segoe UI"/>
+              </a:rPr>
+              <a:t>  |&gt; filter(fn:(r) =&gt; r._field == "active_power_total")</a:t>
+            </a:r>
+          </a:p>
+          <a:p>
+            <a:pPr algn="l"/>
+            <a:r>
+              <a:rPr sz="1200" b="0">
+                <a:solidFill>
+                  <a:srgbClr val="FFFFFF"/>
+                </a:solidFill>
+                <a:latin typeface="Segoe UI"/>
+              </a:rPr>
+              <a:t>  |&gt; integral(unit: 1h)</a:t>
+            </a:r>
+          </a:p>
+        </p:txBody>
+      </p:sp>
+      <p:sp>
+        <p:nvSpPr>
+          <p:cNvPr id="12" name="Rectangle 11"/>
+          <p:cNvSpPr/>
+          <p:nvPr/>
+        </p:nvSpPr>
+        <p:spPr>
+          <a:xfrm>
+            <a:off x="6126479" y="1188720"/>
+            <a:ext cx="5760720" cy="5394960"/>
+          </a:xfrm>
+          <a:prstGeom prst="rect">
+            <a:avLst/>
+          </a:prstGeom>
+          <a:solidFill>
+            <a:srgbClr val="162A44"/>
+          </a:solidFill>
+          <a:ln>
+            <a:noFill/>
+          </a:ln>
+        </p:spPr>
+        <p:style>
+          <a:lnRef idx="1">
+            <a:schemeClr val="accent1"/>
+          </a:lnRef>
+          <a:fillRef idx="3">
+            <a:schemeClr val="accent1"/>
+          </a:fillRef>
+          <a:effectRef idx="2">
+            <a:schemeClr val="accent1"/>
+          </a:effectRef>
+          <a:fontRef idx="minor">
+            <a:schemeClr val="lt1"/>
+          </a:fontRef>
+        </p:style>
+        <p:txBody>
+          <a:bodyPr rtlCol="0" anchor="ctr"/>
+          <a:lstStyle/>
+          <a:p>
+            <a:pPr algn="ctr"/>
+          </a:p>
+        </p:txBody>
+      </p:sp>
+      <p:sp>
+        <p:nvSpPr>
+          <p:cNvPr id="13" name="Rectangle 12"/>
+          <p:cNvSpPr/>
+          <p:nvPr/>
+        </p:nvSpPr>
+        <p:spPr>
+          <a:xfrm>
+            <a:off x="6126479" y="1188720"/>
+            <a:ext cx="5760720" cy="54864"/>
+          </a:xfrm>
+          <a:prstGeom prst="rect">
+            <a:avLst/>
+          </a:prstGeom>
+          <a:solidFill>
+            <a:srgbClr val="FFC800"/>
+          </a:solidFill>
+          <a:ln>
+            <a:noFill/>
+          </a:ln>
+        </p:spPr>
+        <p:style>
+          <a:lnRef idx="1">
+            <a:schemeClr val="accent1"/>
+          </a:lnRef>
+          <a:fillRef idx="3">
+            <a:schemeClr val="accent1"/>
+          </a:fillRef>
+          <a:effectRef idx="2">
+            <a:schemeClr val="accent1"/>
+          </a:effectRef>
+          <a:fontRef idx="minor">
+            <a:schemeClr val="lt1"/>
+          </a:fontRef>
+        </p:style>
+        <p:txBody>
+          <a:bodyPr rtlCol="0" anchor="ctr"/>
+          <a:lstStyle/>
+          <a:p>
+            <a:pPr algn="ctr"/>
+          </a:p>
+        </p:txBody>
+      </p:sp>
+      <p:sp>
+        <p:nvSpPr>
+          <p:cNvPr id="14" name="TextBox 13"/>
+          <p:cNvSpPr txBox="1"/>
+          <p:nvPr/>
+        </p:nvSpPr>
+        <p:spPr>
+          <a:xfrm>
+            <a:off x="6236207" y="1261872"/>
+            <a:ext cx="5550407" cy="5257800"/>
+          </a:xfrm>
+          <a:prstGeom prst="rect">
+            <a:avLst/>
+          </a:prstGeom>
+          <a:noFill/>
+        </p:spPr>
+        <p:txBody>
+          <a:bodyPr wrap="square">
+            <a:spAutoFit/>
+          </a:bodyPr>
+          <a:lstStyle/>
+          <a:p>
+            <a:r>
+              <a:rPr sz="1500" b="1">
+                <a:solidFill>
+                  <a:srgbClr val="FFC800"/>
+                </a:solidFill>
+                <a:latin typeface="Sarabun"/>
+              </a:rPr>
+              <a:t>Core API Endpoints</a:t>
+            </a:r>
+          </a:p>
+          <a:p>
+            <a:r>
+              <a:rPr sz="1300" b="1">
+                <a:solidFill>
+                  <a:srgbClr val="FFC800"/>
+                </a:solidFill>
+              </a:rPr>
+              <a:t> Auth</a:t>
+            </a:r>
+          </a:p>
+          <a:p>
+            <a:pPr algn="l"/>
+            <a:r>
+              <a:rPr sz="1200" b="0">
+                <a:solidFill>
+                  <a:srgbClr val="FFFFFF"/>
+                </a:solidFill>
+                <a:latin typeface="Segoe UI"/>
+              </a:rPr>
+              <a:t>• POST /auth/register</a:t>
+            </a:r>
+          </a:p>
+          <a:p>
+            <a:pPr algn="l"/>
+            <a:r>
+              <a:rPr sz="1200" b="0">
+                <a:solidFill>
+                  <a:srgbClr val="FFFFFF"/>
+                </a:solidFill>
+                <a:latin typeface="Segoe UI"/>
+              </a:rPr>
+              <a:t>• POST /auth/login</a:t>
+            </a:r>
+          </a:p>
+          <a:p>
+            <a:pPr algn="l"/>
+            <a:r>
+              <a:rPr sz="1200" b="0">
+                <a:solidFill>
+                  <a:srgbClr val="FFFFFF"/>
+                </a:solidFill>
+                <a:latin typeface="Segoe UI"/>
+              </a:rPr>
+              <a:t>• GET /auth/google</a:t>
+            </a:r>
+          </a:p>
+          <a:p>
+            <a:r>
+              <a:t/>
+            </a:r>
+          </a:p>
+          <a:p>
+            <a:r>
+              <a:rPr sz="1300" b="1">
+                <a:solidFill>
+                  <a:srgbClr val="FFC800"/>
+                </a:solidFill>
+              </a:rPr>
+              <a:t> Devices</a:t>
+            </a:r>
+          </a:p>
+          <a:p>
+            <a:pPr algn="l"/>
+            <a:r>
+              <a:rPr sz="1200" b="0">
+                <a:solidFill>
+                  <a:srgbClr val="FFFFFF"/>
+                </a:solidFill>
+                <a:latin typeface="Sarabun"/>
+              </a:rPr>
+              <a:t>• GET /devices — list user devices</a:t>
+            </a:r>
+          </a:p>
+          <a:p>
+            <a:pPr algn="l"/>
+            <a:r>
+              <a:rPr sz="1200" b="0">
+                <a:solidFill>
+                  <a:srgbClr val="FFFFFF"/>
+                </a:solidFill>
+                <a:latin typeface="Sarabun"/>
+              </a:rPr>
+              <a:t>• GET /devices/{id}/data — sensor history</a:t>
+            </a:r>
+          </a:p>
+          <a:p>
+            <a:pPr algn="l"/>
+            <a:r>
+              <a:rPr sz="1200" b="0">
+                <a:solidFill>
+                  <a:srgbClr val="FFFFFF"/>
+                </a:solidFill>
+                <a:latin typeface="Sarabun"/>
+              </a:rPr>
+              <a:t>• GET /devices/{id}/realtime — WebSocket</a:t>
+            </a:r>
+          </a:p>
+          <a:p>
+            <a:r>
+              <a:t/>
+            </a:r>
+          </a:p>
+          <a:p>
+            <a:r>
+              <a:rPr sz="1300" b="1">
+                <a:solidFill>
+                  <a:srgbClr val="FFC800"/>
+                </a:solidFill>
+              </a:rPr>
+              <a:t> Billing</a:t>
+            </a:r>
+          </a:p>
+          <a:p>
+            <a:pPr algn="l"/>
+            <a:r>
+              <a:rPr sz="1200" b="0">
+                <a:solidFill>
+                  <a:srgbClr val="FFFFFF"/>
+                </a:solidFill>
+                <a:latin typeface="Segoe UI"/>
+              </a:rPr>
+              <a:t>• POST /billing/checkout-session</a:t>
+            </a:r>
+          </a:p>
+          <a:p>
+            <a:pPr algn="l"/>
+            <a:r>
+              <a:rPr sz="1200" b="0">
+                <a:solidFill>
+                  <a:srgbClr val="FFFFFF"/>
+                </a:solidFill>
+                <a:latin typeface="Segoe UI"/>
+              </a:rPr>
+              <a:t>• GET /billing/subscription/{device_id}</a:t>
+            </a:r>
+          </a:p>
+          <a:p>
+            <a:pPr algn="l"/>
+            <a:r>
+              <a:rPr sz="1200" b="0">
+                <a:solidFill>
+                  <a:srgbClr val="FFFFFF"/>
+                </a:solidFill>
+                <a:latin typeface="Segoe UI"/>
+              </a:rPr>
+              <a:t>• POST /billing/webhook (Stripe)</a:t>
+            </a:r>
+          </a:p>
+          <a:p>
+            <a:pPr algn="l"/>
+            <a:r>
+              <a:rPr sz="1200" b="0">
+                <a:solidFill>
+                  <a:srgbClr val="FFFFFF"/>
+                </a:solidFill>
+                <a:latin typeface="Segoe UI"/>
+              </a:rPr>
+              <a:t>• GET /billing/invoice/{device_id}</a:t>
+            </a:r>
+          </a:p>
+          <a:p>
+            <a:r>
+              <a:t/>
+            </a:r>
+          </a:p>
+          <a:p>
+            <a:r>
+              <a:rPr sz="1300" b="1">
+                <a:solidFill>
+                  <a:srgbClr val="FFC800"/>
+                </a:solidFill>
+              </a:rPr>
+              <a:t> Admin</a:t>
+            </a:r>
+          </a:p>
+          <a:p>
+            <a:pPr algn="l"/>
+            <a:r>
+              <a:rPr sz="1200" b="0">
+                <a:solidFill>
+                  <a:srgbClr val="FFFFFF"/>
+                </a:solidFill>
+                <a:latin typeface="Segoe UI"/>
+              </a:rPr>
+              <a:t>• GET /admin/migration-status</a:t>
+            </a:r>
+          </a:p>
+          <a:p>
+            <a:pPr algn="l"/>
+            <a:r>
+              <a:rPr sz="1200" b="0">
+                <a:solidFill>
+                  <a:srgbClr val="FFFFFF"/>
+                </a:solidFill>
+                <a:latin typeface="Segoe UI"/>
+              </a:rPr>
+              <a:t>• POST /admin/trigger-migration</a:t>
+            </a:r>
+          </a:p>
+          <a:p>
+            <a:pPr algn="l"/>
+            <a:r>
+              <a:rPr sz="1200" b="0">
+                <a:solidFill>
+                  <a:srgbClr val="FFFFFF"/>
+                </a:solidFill>
+                <a:latin typeface="Segoe UI"/>
+              </a:rPr>
+              <a:t>• GET /health</a:t>
+            </a:r>
+          </a:p>
+        </p:txBody>
+      </p:sp>
+    </p:spTree>
+  </p:cSld>
+  <p:clrMapOvr>
+    <a:masterClrMapping/>
+  </p:clrMapOvr>
+</p:sld>
+</file>
+
 <file path=ppt/slides/slide2.xml><?xml version="1.0" encoding="utf-8"?>
 <p:sld xmlns:a="http://schemas.openxmlformats.org/drawingml/2006/main" xmlns:p="http://schemas.openxmlformats.org/presentationml/2006/main" xmlns:r="http://schemas.openxmlformats.org/officeDocument/2006/relationships">
   <p:cSld>
@@ -5872,6 +12024,747 @@
                 <a:latin typeface="Sarabun"/>
               </a:rPr>
               <a:t>    MQTT → App มือถือ Latency ต่ำ</a:t>
+            </a:r>
+          </a:p>
+        </p:txBody>
+      </p:sp>
+    </p:spTree>
+  </p:cSld>
+  <p:clrMapOvr>
+    <a:masterClrMapping/>
+  </p:clrMapOvr>
+</p:sld>
+</file>
+
+<file path=ppt/slides/slide20.xml><?xml version="1.0" encoding="utf-8"?>
+<p:sld xmlns:a="http://schemas.openxmlformats.org/drawingml/2006/main" xmlns:p="http://schemas.openxmlformats.org/presentationml/2006/main" xmlns:r="http://schemas.openxmlformats.org/officeDocument/2006/relationships">
+  <p:cSld>
+    <p:bg>
+      <p:bgPr>
+        <a:solidFill>
+          <a:srgbClr val="0D1B2A"/>
+        </a:solidFill>
+        <a:effectLst/>
+      </p:bgPr>
+    </p:bg>
+    <p:spTree>
+      <p:nvGrpSpPr>
+        <p:cNvPr id="1" name=""/>
+        <p:cNvGrpSpPr/>
+        <p:nvPr/>
+      </p:nvGrpSpPr>
+      <p:grpSpPr/>
+      <p:sp>
+        <p:nvSpPr>
+          <p:cNvPr id="2" name="Rectangle 1"/>
+          <p:cNvSpPr/>
+          <p:nvPr/>
+        </p:nvSpPr>
+        <p:spPr>
+          <a:xfrm>
+            <a:off x="0" y="0"/>
+            <a:ext cx="12188952" cy="1097280"/>
+          </a:xfrm>
+          <a:prstGeom prst="rect">
+            <a:avLst/>
+          </a:prstGeom>
+          <a:solidFill>
+            <a:srgbClr val="1E3A5F"/>
+          </a:solidFill>
+          <a:ln>
+            <a:noFill/>
+          </a:ln>
+        </p:spPr>
+        <p:style>
+          <a:lnRef idx="1">
+            <a:schemeClr val="accent1"/>
+          </a:lnRef>
+          <a:fillRef idx="3">
+            <a:schemeClr val="accent1"/>
+          </a:fillRef>
+          <a:effectRef idx="2">
+            <a:schemeClr val="accent1"/>
+          </a:effectRef>
+          <a:fontRef idx="minor">
+            <a:schemeClr val="lt1"/>
+          </a:fontRef>
+        </p:style>
+        <p:txBody>
+          <a:bodyPr rtlCol="0" anchor="ctr"/>
+          <a:lstStyle/>
+          <a:p>
+            <a:pPr algn="ctr"/>
+          </a:p>
+        </p:txBody>
+      </p:sp>
+      <p:sp>
+        <p:nvSpPr>
+          <p:cNvPr id="3" name="Rectangle 2"/>
+          <p:cNvSpPr/>
+          <p:nvPr/>
+        </p:nvSpPr>
+        <p:spPr>
+          <a:xfrm>
+            <a:off x="0" y="0"/>
+            <a:ext cx="73152" cy="1097280"/>
+          </a:xfrm>
+          <a:prstGeom prst="rect">
+            <a:avLst/>
+          </a:prstGeom>
+          <a:solidFill>
+            <a:srgbClr val="FF4D6D"/>
+          </a:solidFill>
+          <a:ln>
+            <a:noFill/>
+          </a:ln>
+        </p:spPr>
+        <p:style>
+          <a:lnRef idx="1">
+            <a:schemeClr val="accent1"/>
+          </a:lnRef>
+          <a:fillRef idx="3">
+            <a:schemeClr val="accent1"/>
+          </a:fillRef>
+          <a:effectRef idx="2">
+            <a:schemeClr val="accent1"/>
+          </a:effectRef>
+          <a:fontRef idx="minor">
+            <a:schemeClr val="lt1"/>
+          </a:fontRef>
+        </p:style>
+        <p:txBody>
+          <a:bodyPr rtlCol="0" anchor="ctr"/>
+          <a:lstStyle/>
+          <a:p>
+            <a:pPr algn="ctr"/>
+          </a:p>
+        </p:txBody>
+      </p:sp>
+      <p:sp>
+        <p:nvSpPr>
+          <p:cNvPr id="4" name="Rectangle 3"/>
+          <p:cNvSpPr/>
+          <p:nvPr/>
+        </p:nvSpPr>
+        <p:spPr>
+          <a:xfrm>
+            <a:off x="137160" y="137160"/>
+            <a:ext cx="640080" cy="502920"/>
+          </a:xfrm>
+          <a:prstGeom prst="rect">
+            <a:avLst/>
+          </a:prstGeom>
+          <a:solidFill>
+            <a:srgbClr val="FF4D6D"/>
+          </a:solidFill>
+          <a:ln>
+            <a:noFill/>
+          </a:ln>
+        </p:spPr>
+        <p:style>
+          <a:lnRef idx="1">
+            <a:schemeClr val="accent1"/>
+          </a:lnRef>
+          <a:fillRef idx="3">
+            <a:schemeClr val="accent1"/>
+          </a:fillRef>
+          <a:effectRef idx="2">
+            <a:schemeClr val="accent1"/>
+          </a:effectRef>
+          <a:fontRef idx="minor">
+            <a:schemeClr val="lt1"/>
+          </a:fontRef>
+        </p:style>
+        <p:txBody>
+          <a:bodyPr rtlCol="0" anchor="ctr"/>
+          <a:lstStyle/>
+          <a:p>
+            <a:pPr algn="ctr"/>
+          </a:p>
+        </p:txBody>
+      </p:sp>
+      <p:sp>
+        <p:nvSpPr>
+          <p:cNvPr id="5" name="TextBox 4"/>
+          <p:cNvSpPr txBox="1"/>
+          <p:nvPr/>
+        </p:nvSpPr>
+        <p:spPr>
+          <a:xfrm>
+            <a:off x="137160" y="137160"/>
+            <a:ext cx="640080" cy="502920"/>
+          </a:xfrm>
+          <a:prstGeom prst="rect">
+            <a:avLst/>
+          </a:prstGeom>
+          <a:noFill/>
+        </p:spPr>
+        <p:txBody>
+          <a:bodyPr wrap="square">
+            <a:spAutoFit/>
+          </a:bodyPr>
+          <a:lstStyle/>
+          <a:p>
+            <a:pPr algn="ctr"/>
+            <a:r>
+              <a:rPr sz="2000" b="1">
+                <a:solidFill>
+                  <a:srgbClr val="0D1B2A"/>
+                </a:solidFill>
+                <a:latin typeface="Segoe UI"/>
+              </a:rPr>
+              <a:t>A10</a:t>
+            </a:r>
+          </a:p>
+        </p:txBody>
+      </p:sp>
+      <p:sp>
+        <p:nvSpPr>
+          <p:cNvPr id="6" name="TextBox 5"/>
+          <p:cNvSpPr txBox="1"/>
+          <p:nvPr/>
+        </p:nvSpPr>
+        <p:spPr>
+          <a:xfrm>
+            <a:off x="137160" y="621792"/>
+            <a:ext cx="640080" cy="274320"/>
+          </a:xfrm>
+          <a:prstGeom prst="rect">
+            <a:avLst/>
+          </a:prstGeom>
+          <a:noFill/>
+        </p:spPr>
+        <p:txBody>
+          <a:bodyPr wrap="square">
+            <a:spAutoFit/>
+          </a:bodyPr>
+          <a:lstStyle/>
+          <a:p>
+            <a:pPr algn="ctr"/>
+            <a:r>
+              <a:rPr sz="800" b="0">
+                <a:solidFill>
+                  <a:srgbClr val="FF4D6D"/>
+                </a:solidFill>
+                <a:latin typeface="Segoe UI"/>
+              </a:rPr>
+              <a:t>APPENDIX</a:t>
+            </a:r>
+          </a:p>
+        </p:txBody>
+      </p:sp>
+      <p:sp>
+        <p:nvSpPr>
+          <p:cNvPr id="7" name="TextBox 6"/>
+          <p:cNvSpPr txBox="1"/>
+          <p:nvPr/>
+        </p:nvSpPr>
+        <p:spPr>
+          <a:xfrm>
+            <a:off x="914400" y="73152"/>
+            <a:ext cx="10515600" cy="640080"/>
+          </a:xfrm>
+          <a:prstGeom prst="rect">
+            <a:avLst/>
+          </a:prstGeom>
+          <a:noFill/>
+        </p:spPr>
+        <p:txBody>
+          <a:bodyPr wrap="square">
+            <a:spAutoFit/>
+          </a:bodyPr>
+          <a:lstStyle/>
+          <a:p>
+            <a:pPr algn="l"/>
+            <a:r>
+              <a:rPr sz="2600" b="1">
+                <a:solidFill>
+                  <a:srgbClr val="FFFFFF"/>
+                </a:solidFill>
+                <a:latin typeface="Sarabun"/>
+              </a:rPr>
+              <a:t>FAQ — คำถามที่พบบ่อย</a:t>
+            </a:r>
+          </a:p>
+        </p:txBody>
+      </p:sp>
+      <p:sp>
+        <p:nvSpPr>
+          <p:cNvPr id="8" name="TextBox 7"/>
+          <p:cNvSpPr txBox="1"/>
+          <p:nvPr/>
+        </p:nvSpPr>
+        <p:spPr>
+          <a:xfrm>
+            <a:off x="914400" y="713232"/>
+            <a:ext cx="10515600" cy="347472"/>
+          </a:xfrm>
+          <a:prstGeom prst="rect">
+            <a:avLst/>
+          </a:prstGeom>
+          <a:noFill/>
+        </p:spPr>
+        <p:txBody>
+          <a:bodyPr wrap="square">
+            <a:spAutoFit/>
+          </a:bodyPr>
+          <a:lstStyle/>
+          <a:p>
+            <a:pPr algn="l"/>
+            <a:r>
+              <a:rPr sz="1300" b="0">
+                <a:solidFill>
+                  <a:srgbClr val="B0C4DE"/>
+                </a:solidFill>
+                <a:latin typeface="Sarabun"/>
+              </a:rPr>
+              <a:t>เตรียมคำตอบสำหรับคำถามจากผู้บริหารและทีมงาน</a:t>
+            </a:r>
+          </a:p>
+        </p:txBody>
+      </p:sp>
+      <p:sp>
+        <p:nvSpPr>
+          <p:cNvPr id="9" name="Rectangle 8"/>
+          <p:cNvSpPr/>
+          <p:nvPr/>
+        </p:nvSpPr>
+        <p:spPr>
+          <a:xfrm>
+            <a:off x="274320" y="1188720"/>
+            <a:ext cx="5760720" cy="5394960"/>
+          </a:xfrm>
+          <a:prstGeom prst="rect">
+            <a:avLst/>
+          </a:prstGeom>
+          <a:solidFill>
+            <a:srgbClr val="162A44"/>
+          </a:solidFill>
+          <a:ln>
+            <a:noFill/>
+          </a:ln>
+        </p:spPr>
+        <p:style>
+          <a:lnRef idx="1">
+            <a:schemeClr val="accent1"/>
+          </a:lnRef>
+          <a:fillRef idx="3">
+            <a:schemeClr val="accent1"/>
+          </a:fillRef>
+          <a:effectRef idx="2">
+            <a:schemeClr val="accent1"/>
+          </a:effectRef>
+          <a:fontRef idx="minor">
+            <a:schemeClr val="lt1"/>
+          </a:fontRef>
+        </p:style>
+        <p:txBody>
+          <a:bodyPr rtlCol="0" anchor="ctr"/>
+          <a:lstStyle/>
+          <a:p>
+            <a:pPr algn="ctr"/>
+          </a:p>
+        </p:txBody>
+      </p:sp>
+      <p:sp>
+        <p:nvSpPr>
+          <p:cNvPr id="10" name="Rectangle 9"/>
+          <p:cNvSpPr/>
+          <p:nvPr/>
+        </p:nvSpPr>
+        <p:spPr>
+          <a:xfrm>
+            <a:off x="274320" y="1188720"/>
+            <a:ext cx="5760720" cy="54864"/>
+          </a:xfrm>
+          <a:prstGeom prst="rect">
+            <a:avLst/>
+          </a:prstGeom>
+          <a:solidFill>
+            <a:srgbClr val="00D4E8"/>
+          </a:solidFill>
+          <a:ln>
+            <a:noFill/>
+          </a:ln>
+        </p:spPr>
+        <p:style>
+          <a:lnRef idx="1">
+            <a:schemeClr val="accent1"/>
+          </a:lnRef>
+          <a:fillRef idx="3">
+            <a:schemeClr val="accent1"/>
+          </a:fillRef>
+          <a:effectRef idx="2">
+            <a:schemeClr val="accent1"/>
+          </a:effectRef>
+          <a:fontRef idx="minor">
+            <a:schemeClr val="lt1"/>
+          </a:fontRef>
+        </p:style>
+        <p:txBody>
+          <a:bodyPr rtlCol="0" anchor="ctr"/>
+          <a:lstStyle/>
+          <a:p>
+            <a:pPr algn="ctr"/>
+          </a:p>
+        </p:txBody>
+      </p:sp>
+      <p:sp>
+        <p:nvSpPr>
+          <p:cNvPr id="11" name="TextBox 10"/>
+          <p:cNvSpPr txBox="1"/>
+          <p:nvPr/>
+        </p:nvSpPr>
+        <p:spPr>
+          <a:xfrm>
+            <a:off x="384048" y="1261872"/>
+            <a:ext cx="5550407" cy="5257800"/>
+          </a:xfrm>
+          <a:prstGeom prst="rect">
+            <a:avLst/>
+          </a:prstGeom>
+          <a:noFill/>
+        </p:spPr>
+        <p:txBody>
+          <a:bodyPr wrap="square">
+            <a:spAutoFit/>
+          </a:bodyPr>
+          <a:lstStyle/>
+          <a:p>
+            <a:r>
+              <a:rPr sz="1500" b="1">
+                <a:solidFill>
+                  <a:srgbClr val="00D4E8"/>
+                </a:solidFill>
+                <a:latin typeface="Sarabun"/>
+              </a:rPr>
+              <a:t>คำถามทางธุรกิจ</a:t>
+            </a:r>
+          </a:p>
+          <a:p>
+            <a:r>
+              <a:rPr sz="1300" b="1">
+                <a:solidFill>
+                  <a:srgbClr val="00D4E8"/>
+                </a:solidFill>
+              </a:rPr>
+              <a:t> Q: ถ้าลูกค้า Free ใช้งาน 10,000 เครื่อง ขาดทุนไหม?</a:t>
+            </a:r>
+          </a:p>
+          <a:p>
+            <a:pPr algn="l"/>
+            <a:r>
+              <a:rPr sz="1200" b="0">
+                <a:solidFill>
+                  <a:srgbClr val="FFFFFF"/>
+                </a:solidFill>
+                <a:latin typeface="Sarabun"/>
+              </a:rPr>
+              <a:t>• A: ขาดทุนต้นทุน Storage ~0.40 บาท/เครื่อง/เดือน = 4,000 บาท/เดือน แต่ถือเป็น Customer Acquisition Cost ที่คาดหวัง Conversion Rate 10% เป็น Pro</a:t>
+            </a:r>
+          </a:p>
+          <a:p>
+            <a:r>
+              <a:t/>
+            </a:r>
+          </a:p>
+          <a:p>
+            <a:r>
+              <a:rPr sz="1300" b="1">
+                <a:solidFill>
+                  <a:srgbClr val="00D4E8"/>
+                </a:solidFill>
+              </a:rPr>
+              <a:t> Q: ลูกค้าหยุดจ่ายเงิน จะเห็นข้อมูลเก่าไหม?</a:t>
+            </a:r>
+          </a:p>
+          <a:p>
+            <a:pPr algn="l"/>
+            <a:r>
+              <a:rPr sz="1200" b="0">
+                <a:solidFill>
+                  <a:srgbClr val="FFFFFF"/>
+                </a:solidFill>
+                <a:latin typeface="Sarabun"/>
+              </a:rPr>
+              <a:t>• A: ไม่เห็นครับ range(start: -7d) ทำหน้าที่ Paywall อัตโนมัติ ข้อมูลเก่ายังอยู่ใน DB แต่ API ไม่ดึงให้</a:t>
+            </a:r>
+          </a:p>
+          <a:p>
+            <a:r>
+              <a:t/>
+            </a:r>
+          </a:p>
+          <a:p>
+            <a:r>
+              <a:rPr sz="1300" b="1">
+                <a:solidFill>
+                  <a:srgbClr val="00D4E8"/>
+                </a:solidFill>
+              </a:rPr>
+              <a:t> Q: ถ้าต่ออายุใหม่ หลังหยุด 40 วัน ข้อมูลหายไหม?</a:t>
+            </a:r>
+          </a:p>
+          <a:p>
+            <a:pPr algn="l"/>
+            <a:r>
+              <a:rPr sz="1200" b="0">
+                <a:solidFill>
+                  <a:srgbClr val="FFFFFF"/>
+                </a:solidFill>
+                <a:latin typeface="Sarabun"/>
+              </a:rPr>
+              <a:t>• A: หายครับ ข้อมูล 33 วันแรกถูก Free bucket ลบตาม Retention แล้ว กู้ไม่ได้ ซึ่งเป็น Incentive ให้ต่ออายุต่อเนื่อง</a:t>
+            </a:r>
+          </a:p>
+          <a:p>
+            <a:r>
+              <a:t/>
+            </a:r>
+          </a:p>
+          <a:p>
+            <a:r>
+              <a:rPr sz="1300" b="1">
+                <a:solidFill>
+                  <a:srgbClr val="00D4E8"/>
+                </a:solidFill>
+              </a:rPr>
+              <a:t> Q: ราคา Pro 99 บาท ถูกหรือแพงเกินไป?</a:t>
+            </a:r>
+          </a:p>
+          <a:p>
+            <a:pPr algn="l"/>
+            <a:r>
+              <a:rPr sz="1200" b="0">
+                <a:solidFill>
+                  <a:srgbClr val="FFFFFF"/>
+                </a:solidFill>
+                <a:latin typeface="Sarabun"/>
+              </a:rPr>
+              <a:t>• A: ต้นทุนจริง ~3.20 บาท Margin 96% สามารถทำโปรลดได้ถึง 50-60% ยังมี margin ครับ</a:t>
+            </a:r>
+          </a:p>
+        </p:txBody>
+      </p:sp>
+      <p:sp>
+        <p:nvSpPr>
+          <p:cNvPr id="12" name="Rectangle 11"/>
+          <p:cNvSpPr/>
+          <p:nvPr/>
+        </p:nvSpPr>
+        <p:spPr>
+          <a:xfrm>
+            <a:off x="6126479" y="1188720"/>
+            <a:ext cx="5760720" cy="5394960"/>
+          </a:xfrm>
+          <a:prstGeom prst="rect">
+            <a:avLst/>
+          </a:prstGeom>
+          <a:solidFill>
+            <a:srgbClr val="162A44"/>
+          </a:solidFill>
+          <a:ln>
+            <a:noFill/>
+          </a:ln>
+        </p:spPr>
+        <p:style>
+          <a:lnRef idx="1">
+            <a:schemeClr val="accent1"/>
+          </a:lnRef>
+          <a:fillRef idx="3">
+            <a:schemeClr val="accent1"/>
+          </a:fillRef>
+          <a:effectRef idx="2">
+            <a:schemeClr val="accent1"/>
+          </a:effectRef>
+          <a:fontRef idx="minor">
+            <a:schemeClr val="lt1"/>
+          </a:fontRef>
+        </p:style>
+        <p:txBody>
+          <a:bodyPr rtlCol="0" anchor="ctr"/>
+          <a:lstStyle/>
+          <a:p>
+            <a:pPr algn="ctr"/>
+          </a:p>
+        </p:txBody>
+      </p:sp>
+      <p:sp>
+        <p:nvSpPr>
+          <p:cNvPr id="13" name="Rectangle 12"/>
+          <p:cNvSpPr/>
+          <p:nvPr/>
+        </p:nvSpPr>
+        <p:spPr>
+          <a:xfrm>
+            <a:off x="6126479" y="1188720"/>
+            <a:ext cx="5760720" cy="54864"/>
+          </a:xfrm>
+          <a:prstGeom prst="rect">
+            <a:avLst/>
+          </a:prstGeom>
+          <a:solidFill>
+            <a:srgbClr val="00E596"/>
+          </a:solidFill>
+          <a:ln>
+            <a:noFill/>
+          </a:ln>
+        </p:spPr>
+        <p:style>
+          <a:lnRef idx="1">
+            <a:schemeClr val="accent1"/>
+          </a:lnRef>
+          <a:fillRef idx="3">
+            <a:schemeClr val="accent1"/>
+          </a:fillRef>
+          <a:effectRef idx="2">
+            <a:schemeClr val="accent1"/>
+          </a:effectRef>
+          <a:fontRef idx="minor">
+            <a:schemeClr val="lt1"/>
+          </a:fontRef>
+        </p:style>
+        <p:txBody>
+          <a:bodyPr rtlCol="0" anchor="ctr"/>
+          <a:lstStyle/>
+          <a:p>
+            <a:pPr algn="ctr"/>
+          </a:p>
+        </p:txBody>
+      </p:sp>
+      <p:sp>
+        <p:nvSpPr>
+          <p:cNvPr id="14" name="TextBox 13"/>
+          <p:cNvSpPr txBox="1"/>
+          <p:nvPr/>
+        </p:nvSpPr>
+        <p:spPr>
+          <a:xfrm>
+            <a:off x="6236207" y="1261872"/>
+            <a:ext cx="5550407" cy="5257800"/>
+          </a:xfrm>
+          <a:prstGeom prst="rect">
+            <a:avLst/>
+          </a:prstGeom>
+          <a:noFill/>
+        </p:spPr>
+        <p:txBody>
+          <a:bodyPr wrap="square">
+            <a:spAutoFit/>
+          </a:bodyPr>
+          <a:lstStyle/>
+          <a:p>
+            <a:r>
+              <a:rPr sz="1500" b="1">
+                <a:solidFill>
+                  <a:srgbClr val="00E596"/>
+                </a:solidFill>
+                <a:latin typeface="Sarabun"/>
+              </a:rPr>
+              <a:t>คำถามทางเทคนิค</a:t>
+            </a:r>
+          </a:p>
+          <a:p>
+            <a:r>
+              <a:rPr sz="1300" b="1">
+                <a:solidFill>
+                  <a:srgbClr val="00E596"/>
+                </a:solidFill>
+              </a:rPr>
+              <a:t> Q: ถ้า Server ล่ม ข้อมูลจะหายไหม?</a:t>
+            </a:r>
+          </a:p>
+          <a:p>
+            <a:pPr algn="l"/>
+            <a:r>
+              <a:rPr sz="1200" b="0">
+                <a:solidFill>
+                  <a:srgbClr val="FFFFFF"/>
+                </a:solidFill>
+                <a:latin typeface="Sarabun"/>
+              </a:rPr>
+              <a:t>• A: ไม่หายครับ Backup ทุก 6 ชม. ไปที่ Cloudflare R2 RPO = 6 ชั่วโมง RTO = 2-4 ชั่วโมง</a:t>
+            </a:r>
+          </a:p>
+          <a:p>
+            <a:r>
+              <a:t/>
+            </a:r>
+          </a:p>
+          <a:p>
+            <a:r>
+              <a:rPr sz="1300" b="1">
+                <a:solidFill>
+                  <a:srgbClr val="00E596"/>
+                </a:solidFill>
+              </a:rPr>
+              <a:t> Q: InfluxDB รับโหลด 10,000 เครื่องได้ไหม?</a:t>
+            </a:r>
+          </a:p>
+          <a:p>
+            <a:pPr algn="l"/>
+            <a:r>
+              <a:rPr sz="1200" b="0">
+                <a:solidFill>
+                  <a:srgbClr val="FFFFFF"/>
+                </a:solidFill>
+                <a:latin typeface="Sarabun"/>
+              </a:rPr>
+              <a:t>• A: ได้ครับ Telegraf batching รองรับได้ แต่ต้อง Upgrade VPS เป็น KVM 4 (16GB RAM) เมื่อถึง ~500-1,000 เครื่อง</a:t>
+            </a:r>
+          </a:p>
+          <a:p>
+            <a:r>
+              <a:t/>
+            </a:r>
+          </a:p>
+          <a:p>
+            <a:r>
+              <a:rPr sz="1300" b="1">
+                <a:solidFill>
+                  <a:srgbClr val="00E596"/>
+                </a:solidFill>
+              </a:rPr>
+              <a:t> Q: union() ช้าไหมถ้าถังว่างเปล่า?</a:t>
+            </a:r>
+          </a:p>
+          <a:p>
+            <a:pPr algn="l"/>
+            <a:r>
+              <a:rPr sz="1200" b="0">
+                <a:solidFill>
+                  <a:srgbClr val="FFFFFF"/>
+                </a:solidFill>
+                <a:latin typeface="Sarabun"/>
+              </a:rPr>
+              <a:t>• A: เร็วมากระดับ millisecond InfluxDB ใช้ Shard index เช็กก่อน ถ้าไม่มีข้อมูลตาม range ก็ return empty ทันที</a:t>
+            </a:r>
+          </a:p>
+          <a:p>
+            <a:r>
+              <a:t/>
+            </a:r>
+          </a:p>
+          <a:p>
+            <a:r>
+              <a:rPr sz="1300" b="1">
+                <a:solidFill>
+                  <a:srgbClr val="00E596"/>
+                </a:solidFill>
+              </a:rPr>
+              <a:t> Q: Background Job ใช้ Library อะไร?</a:t>
+            </a:r>
+          </a:p>
+          <a:p>
+            <a:pPr algn="l"/>
+            <a:r>
+              <a:rPr sz="1200" b="0">
+                <a:solidFill>
+                  <a:srgbClr val="FFFFFF"/>
+                </a:solidFill>
+                <a:latin typeface="Sarabun"/>
+              </a:rPr>
+              <a:t>• A: Python = Celery + Redis หรือ RQ (Redis Queue) Node.js = BullMQ รองรับ retry, priority queue, และ monitoring</a:t>
             </a:r>
           </a:p>
         </p:txBody>

--- a/PowerView_Billing_Presentation.pptx
+++ b/PowerView_Billing_Presentation.pptx
@@ -25,6 +25,7 @@
     <p:sldId id="273" r:id="rId24"/>
     <p:sldId id="274" r:id="rId25"/>
     <p:sldId id="275" r:id="rId26"/>
+    <p:sldId id="276" r:id="rId27"/>
   </p:sldIdLst>
   <p:sldSz cx="12188952" cy="6858000" type="screen4x3"/>
   <p:notesSz cx="6858000" cy="9144000"/>
@@ -12765,6 +12766,822 @@
                 <a:latin typeface="Sarabun"/>
               </a:rPr>
               <a:t>• A: Python = Celery + Redis หรือ RQ (Redis Queue) Node.js = BullMQ รองรับ retry, priority queue, และ monitoring</a:t>
+            </a:r>
+          </a:p>
+        </p:txBody>
+      </p:sp>
+    </p:spTree>
+  </p:cSld>
+  <p:clrMapOvr>
+    <a:masterClrMapping/>
+  </p:clrMapOvr>
+</p:sld>
+</file>
+
+<file path=ppt/slides/slide21.xml><?xml version="1.0" encoding="utf-8"?>
+<p:sld xmlns:a="http://schemas.openxmlformats.org/drawingml/2006/main" xmlns:p="http://schemas.openxmlformats.org/presentationml/2006/main" xmlns:r="http://schemas.openxmlformats.org/officeDocument/2006/relationships">
+  <p:cSld>
+    <p:bg>
+      <p:bgPr>
+        <a:solidFill>
+          <a:srgbClr val="0D1B2A"/>
+        </a:solidFill>
+        <a:effectLst/>
+      </p:bgPr>
+    </p:bg>
+    <p:spTree>
+      <p:nvGrpSpPr>
+        <p:cNvPr id="1" name=""/>
+        <p:cNvGrpSpPr/>
+        <p:nvPr/>
+      </p:nvGrpSpPr>
+      <p:grpSpPr/>
+      <p:sp>
+        <p:nvSpPr>
+          <p:cNvPr id="2" name="Rectangle 1"/>
+          <p:cNvSpPr/>
+          <p:nvPr/>
+        </p:nvSpPr>
+        <p:spPr>
+          <a:xfrm>
+            <a:off x="0" y="0"/>
+            <a:ext cx="12188952" cy="1097280"/>
+          </a:xfrm>
+          <a:prstGeom prst="rect">
+            <a:avLst/>
+          </a:prstGeom>
+          <a:solidFill>
+            <a:srgbClr val="1E3A5F"/>
+          </a:solidFill>
+          <a:ln>
+            <a:noFill/>
+          </a:ln>
+        </p:spPr>
+        <p:style>
+          <a:lnRef idx="1">
+            <a:schemeClr val="accent1"/>
+          </a:lnRef>
+          <a:fillRef idx="3">
+            <a:schemeClr val="accent1"/>
+          </a:fillRef>
+          <a:effectRef idx="2">
+            <a:schemeClr val="accent1"/>
+          </a:effectRef>
+          <a:fontRef idx="minor">
+            <a:schemeClr val="lt1"/>
+          </a:fontRef>
+        </p:style>
+        <p:txBody>
+          <a:bodyPr rtlCol="0" anchor="ctr"/>
+          <a:lstStyle/>
+          <a:p>
+            <a:pPr algn="ctr"/>
+          </a:p>
+        </p:txBody>
+      </p:sp>
+      <p:sp>
+        <p:nvSpPr>
+          <p:cNvPr id="3" name="Rectangle 2"/>
+          <p:cNvSpPr/>
+          <p:nvPr/>
+        </p:nvSpPr>
+        <p:spPr>
+          <a:xfrm>
+            <a:off x="0" y="0"/>
+            <a:ext cx="73152" cy="1097280"/>
+          </a:xfrm>
+          <a:prstGeom prst="rect">
+            <a:avLst/>
+          </a:prstGeom>
+          <a:solidFill>
+            <a:srgbClr val="008BFF"/>
+          </a:solidFill>
+          <a:ln>
+            <a:noFill/>
+          </a:ln>
+        </p:spPr>
+        <p:style>
+          <a:lnRef idx="1">
+            <a:schemeClr val="accent1"/>
+          </a:lnRef>
+          <a:fillRef idx="3">
+            <a:schemeClr val="accent1"/>
+          </a:fillRef>
+          <a:effectRef idx="2">
+            <a:schemeClr val="accent1"/>
+          </a:effectRef>
+          <a:fontRef idx="minor">
+            <a:schemeClr val="lt1"/>
+          </a:fontRef>
+        </p:style>
+        <p:txBody>
+          <a:bodyPr rtlCol="0" anchor="ctr"/>
+          <a:lstStyle/>
+          <a:p>
+            <a:pPr algn="ctr"/>
+          </a:p>
+        </p:txBody>
+      </p:sp>
+      <p:sp>
+        <p:nvSpPr>
+          <p:cNvPr id="4" name="Rectangle 3"/>
+          <p:cNvSpPr/>
+          <p:nvPr/>
+        </p:nvSpPr>
+        <p:spPr>
+          <a:xfrm>
+            <a:off x="137160" y="137160"/>
+            <a:ext cx="640080" cy="502920"/>
+          </a:xfrm>
+          <a:prstGeom prst="rect">
+            <a:avLst/>
+          </a:prstGeom>
+          <a:solidFill>
+            <a:srgbClr val="008BFF"/>
+          </a:solidFill>
+          <a:ln>
+            <a:noFill/>
+          </a:ln>
+        </p:spPr>
+        <p:style>
+          <a:lnRef idx="1">
+            <a:schemeClr val="accent1"/>
+          </a:lnRef>
+          <a:fillRef idx="3">
+            <a:schemeClr val="accent1"/>
+          </a:fillRef>
+          <a:effectRef idx="2">
+            <a:schemeClr val="accent1"/>
+          </a:effectRef>
+          <a:fontRef idx="minor">
+            <a:schemeClr val="lt1"/>
+          </a:fontRef>
+        </p:style>
+        <p:txBody>
+          <a:bodyPr rtlCol="0" anchor="ctr"/>
+          <a:lstStyle/>
+          <a:p>
+            <a:pPr algn="ctr"/>
+          </a:p>
+        </p:txBody>
+      </p:sp>
+      <p:sp>
+        <p:nvSpPr>
+          <p:cNvPr id="5" name="TextBox 4"/>
+          <p:cNvSpPr txBox="1"/>
+          <p:nvPr/>
+        </p:nvSpPr>
+        <p:spPr>
+          <a:xfrm>
+            <a:off x="137160" y="137160"/>
+            <a:ext cx="640080" cy="502920"/>
+          </a:xfrm>
+          <a:prstGeom prst="rect">
+            <a:avLst/>
+          </a:prstGeom>
+          <a:noFill/>
+        </p:spPr>
+        <p:txBody>
+          <a:bodyPr wrap="square">
+            <a:spAutoFit/>
+          </a:bodyPr>
+          <a:lstStyle/>
+          <a:p>
+            <a:pPr algn="ctr"/>
+            <a:r>
+              <a:rPr sz="2000" b="1">
+                <a:solidFill>
+                  <a:srgbClr val="0D1B2A"/>
+                </a:solidFill>
+                <a:latin typeface="Segoe UI"/>
+              </a:rPr>
+              <a:t>A11</a:t>
+            </a:r>
+          </a:p>
+        </p:txBody>
+      </p:sp>
+      <p:sp>
+        <p:nvSpPr>
+          <p:cNvPr id="6" name="TextBox 5"/>
+          <p:cNvSpPr txBox="1"/>
+          <p:nvPr/>
+        </p:nvSpPr>
+        <p:spPr>
+          <a:xfrm>
+            <a:off x="137160" y="621792"/>
+            <a:ext cx="640080" cy="274320"/>
+          </a:xfrm>
+          <a:prstGeom prst="rect">
+            <a:avLst/>
+          </a:prstGeom>
+          <a:noFill/>
+        </p:spPr>
+        <p:txBody>
+          <a:bodyPr wrap="square">
+            <a:spAutoFit/>
+          </a:bodyPr>
+          <a:lstStyle/>
+          <a:p>
+            <a:pPr algn="ctr"/>
+            <a:r>
+              <a:rPr sz="800" b="0">
+                <a:solidFill>
+                  <a:srgbClr val="008BFF"/>
+                </a:solidFill>
+                <a:latin typeface="Segoe UI"/>
+              </a:rPr>
+              <a:t>APPENDIX</a:t>
+            </a:r>
+          </a:p>
+        </p:txBody>
+      </p:sp>
+      <p:sp>
+        <p:nvSpPr>
+          <p:cNvPr id="7" name="TextBox 6"/>
+          <p:cNvSpPr txBox="1"/>
+          <p:nvPr/>
+        </p:nvSpPr>
+        <p:spPr>
+          <a:xfrm>
+            <a:off x="914400" y="73152"/>
+            <a:ext cx="10515600" cy="640080"/>
+          </a:xfrm>
+          <a:prstGeom prst="rect">
+            <a:avLst/>
+          </a:prstGeom>
+          <a:noFill/>
+        </p:spPr>
+        <p:txBody>
+          <a:bodyPr wrap="square">
+            <a:spAutoFit/>
+          </a:bodyPr>
+          <a:lstStyle/>
+          <a:p>
+            <a:pPr algn="l"/>
+            <a:r>
+              <a:rPr sz="2600" b="1">
+                <a:solidFill>
+                  <a:srgbClr val="FFFFFF"/>
+                </a:solidFill>
+                <a:latin typeface="Segoe UI"/>
+              </a:rPr>
+              <a:t>Architecture Deep Dive: API vs Background Worker</a:t>
+            </a:r>
+          </a:p>
+        </p:txBody>
+      </p:sp>
+      <p:sp>
+        <p:nvSpPr>
+          <p:cNvPr id="8" name="TextBox 7"/>
+          <p:cNvSpPr txBox="1"/>
+          <p:nvPr/>
+        </p:nvSpPr>
+        <p:spPr>
+          <a:xfrm>
+            <a:off x="914400" y="713232"/>
+            <a:ext cx="10515600" cy="347472"/>
+          </a:xfrm>
+          <a:prstGeom prst="rect">
+            <a:avLst/>
+          </a:prstGeom>
+          <a:noFill/>
+        </p:spPr>
+        <p:txBody>
+          <a:bodyPr wrap="square">
+            <a:spAutoFit/>
+          </a:bodyPr>
+          <a:lstStyle/>
+          <a:p>
+            <a:pPr algn="l"/>
+            <a:r>
+              <a:rPr sz="1300" b="0">
+                <a:solidFill>
+                  <a:srgbClr val="B0C4DE"/>
+                </a:solidFill>
+                <a:latin typeface="Sarabun"/>
+              </a:rPr>
+              <a:t>ความสัมพันธ์ระหว่าง Core API และ Celery Worker ใน Codebase เดียวกัน</a:t>
+            </a:r>
+          </a:p>
+        </p:txBody>
+      </p:sp>
+      <p:sp>
+        <p:nvSpPr>
+          <p:cNvPr id="9" name="Rectangle 8"/>
+          <p:cNvSpPr/>
+          <p:nvPr/>
+        </p:nvSpPr>
+        <p:spPr>
+          <a:xfrm>
+            <a:off x="274320" y="1188720"/>
+            <a:ext cx="5760720" cy="5394960"/>
+          </a:xfrm>
+          <a:prstGeom prst="rect">
+            <a:avLst/>
+          </a:prstGeom>
+          <a:solidFill>
+            <a:srgbClr val="162A44"/>
+          </a:solidFill>
+          <a:ln>
+            <a:noFill/>
+          </a:ln>
+        </p:spPr>
+        <p:style>
+          <a:lnRef idx="1">
+            <a:schemeClr val="accent1"/>
+          </a:lnRef>
+          <a:fillRef idx="3">
+            <a:schemeClr val="accent1"/>
+          </a:fillRef>
+          <a:effectRef idx="2">
+            <a:schemeClr val="accent1"/>
+          </a:effectRef>
+          <a:fontRef idx="minor">
+            <a:schemeClr val="lt1"/>
+          </a:fontRef>
+        </p:style>
+        <p:txBody>
+          <a:bodyPr rtlCol="0" anchor="ctr"/>
+          <a:lstStyle/>
+          <a:p>
+            <a:pPr algn="ctr"/>
+          </a:p>
+        </p:txBody>
+      </p:sp>
+      <p:sp>
+        <p:nvSpPr>
+          <p:cNvPr id="10" name="Rectangle 9"/>
+          <p:cNvSpPr/>
+          <p:nvPr/>
+        </p:nvSpPr>
+        <p:spPr>
+          <a:xfrm>
+            <a:off x="274320" y="1188720"/>
+            <a:ext cx="5760720" cy="54864"/>
+          </a:xfrm>
+          <a:prstGeom prst="rect">
+            <a:avLst/>
+          </a:prstGeom>
+          <a:solidFill>
+            <a:srgbClr val="00D4E8"/>
+          </a:solidFill>
+          <a:ln>
+            <a:noFill/>
+          </a:ln>
+        </p:spPr>
+        <p:style>
+          <a:lnRef idx="1">
+            <a:schemeClr val="accent1"/>
+          </a:lnRef>
+          <a:fillRef idx="3">
+            <a:schemeClr val="accent1"/>
+          </a:fillRef>
+          <a:effectRef idx="2">
+            <a:schemeClr val="accent1"/>
+          </a:effectRef>
+          <a:fontRef idx="minor">
+            <a:schemeClr val="lt1"/>
+          </a:fontRef>
+        </p:style>
+        <p:txBody>
+          <a:bodyPr rtlCol="0" anchor="ctr"/>
+          <a:lstStyle/>
+          <a:p>
+            <a:pPr algn="ctr"/>
+          </a:p>
+        </p:txBody>
+      </p:sp>
+      <p:sp>
+        <p:nvSpPr>
+          <p:cNvPr id="11" name="TextBox 10"/>
+          <p:cNvSpPr txBox="1"/>
+          <p:nvPr/>
+        </p:nvSpPr>
+        <p:spPr>
+          <a:xfrm>
+            <a:off x="384048" y="1261872"/>
+            <a:ext cx="5550407" cy="5257800"/>
+          </a:xfrm>
+          <a:prstGeom prst="rect">
+            <a:avLst/>
+          </a:prstGeom>
+          <a:noFill/>
+        </p:spPr>
+        <p:txBody>
+          <a:bodyPr wrap="square">
+            <a:spAutoFit/>
+          </a:bodyPr>
+          <a:lstStyle/>
+          <a:p>
+            <a:r>
+              <a:rPr sz="1500" b="1">
+                <a:solidFill>
+                  <a:srgbClr val="00D4E8"/>
+                </a:solidFill>
+                <a:latin typeface="Sarabun"/>
+              </a:rPr>
+              <a:t>Runtime &amp; Structure (การทำงานจริง)</a:t>
+            </a:r>
+          </a:p>
+          <a:p>
+            <a:r>
+              <a:rPr sz="1300" b="1">
+                <a:solidFill>
+                  <a:srgbClr val="00D4E8"/>
+                </a:solidFill>
+              </a:rPr>
+              <a:t> 1. เป็นคนละ Process แต่ใช้ Code เดียวกัน</a:t>
+            </a:r>
+          </a:p>
+          <a:p>
+            <a:pPr algn="l"/>
+            <a:r>
+              <a:rPr sz="1200" b="0">
+                <a:solidFill>
+                  <a:srgbClr val="FFFFFF"/>
+                </a:solidFill>
+                <a:latin typeface="Sarabun"/>
+              </a:rPr>
+              <a:t>• Core API และ Worker อาศัยอยู่ในโฟลเดอร์ `backend/core-api/` เหมือนกัน เพื่อแชร์ `models.py` (ฐานข้อมูล) และ Logic ต่างๆ</a:t>
+            </a:r>
+          </a:p>
+          <a:p>
+            <a:pPr algn="l"/>
+            <a:r>
+              <a:rPr sz="1200" b="0">
+                <a:solidFill>
+                  <a:srgbClr val="FFFFFF"/>
+                </a:solidFill>
+                <a:latin typeface="Sarabun"/>
+              </a:rPr>
+              <a:t>• เวลาทำงานจริง Docker จะสั่งรันแยกกัน:</a:t>
+            </a:r>
+          </a:p>
+          <a:p>
+            <a:pPr algn="l"/>
+            <a:r>
+              <a:rPr sz="1200" b="0">
+                <a:solidFill>
+                  <a:srgbClr val="FFFFFF"/>
+                </a:solidFill>
+                <a:latin typeface="Sarabun"/>
+              </a:rPr>
+              <a:t> - API: `uvicorn main:app` (ทำหน้าที่รับแขก)</a:t>
+            </a:r>
+          </a:p>
+          <a:p>
+            <a:pPr algn="l"/>
+            <a:r>
+              <a:rPr sz="1200" b="0">
+                <a:solidFill>
+                  <a:srgbClr val="FFFFFF"/>
+                </a:solidFill>
+                <a:latin typeface="Sarabun"/>
+              </a:rPr>
+              <a:t> - Worker: `celery worker` (ทำหน้าที่หลังบ้าน)</a:t>
+            </a:r>
+          </a:p>
+          <a:p>
+            <a:r>
+              <a:t/>
+            </a:r>
+          </a:p>
+          <a:p>
+            <a:r>
+              <a:rPr sz="1300" b="1">
+                <a:solidFill>
+                  <a:srgbClr val="00D4E8"/>
+                </a:solidFill>
+              </a:rPr>
+              <a:t> 2. การคุยกันผ่าน Redis (Message Broker)</a:t>
+            </a:r>
+          </a:p>
+          <a:p>
+            <a:pPr algn="l"/>
+            <a:r>
+              <a:rPr sz="1200" b="0">
+                <a:solidFill>
+                  <a:srgbClr val="FFFFFF"/>
+                </a:solidFill>
+                <a:latin typeface="Sarabun"/>
+              </a:rPr>
+              <a:t>• เมื่อ API รับเงินจากลูกค้าเสร็จ จะไม่ย้ายข้อมูลเองให้เสียเวลา แต่จะโยนใบสั่งงาน (Task) ลงกล่อง Redis</a:t>
+            </a:r>
+          </a:p>
+          <a:p>
+            <a:pPr algn="l"/>
+            <a:r>
+              <a:rPr sz="1200" b="0">
+                <a:solidFill>
+                  <a:srgbClr val="FFFFFF"/>
+                </a:solidFill>
+                <a:latin typeface="Sarabun"/>
+              </a:rPr>
+              <a:t>• Worker ที่ว่างอยู่จะหยิบงานจาก Redis ไปทำต่อ</a:t>
+            </a:r>
+          </a:p>
+          <a:p>
+            <a:r>
+              <a:t/>
+            </a:r>
+          </a:p>
+          <a:p>
+            <a:r>
+              <a:rPr sz="1300" b="1">
+                <a:solidFill>
+                  <a:srgbClr val="00D4E8"/>
+                </a:solidFill>
+              </a:rPr>
+              <a:t> 3. Celery Beat (Cron Scheduler)</a:t>
+            </a:r>
+          </a:p>
+          <a:p>
+            <a:pPr algn="l"/>
+            <a:r>
+              <a:rPr sz="1200" b="0">
+                <a:solidFill>
+                  <a:srgbClr val="FFFFFF"/>
+                </a:solidFill>
+                <a:latin typeface="Sarabun"/>
+              </a:rPr>
+              <a:t>• เปรียบเสมือนนาฬิกาปลุก ทำหน้าที่สร้าง Task ใส่ Redis ทุกๆ ต้นชั่วโมง (เช่น ตรวจสอบ Subscription หมดอายุ)</a:t>
+            </a:r>
+          </a:p>
+          <a:p>
+            <a:pPr algn="l"/>
+            <a:r>
+              <a:rPr sz="1200" b="0">
+                <a:solidFill>
+                  <a:srgbClr val="FFFFFF"/>
+                </a:solidFill>
+                <a:latin typeface="Sarabun"/>
+              </a:rPr>
+              <a:t>• ไม่ได้รับ Request จากใคร ทำงานตามเวลาที่ตั้งไว้</a:t>
+            </a:r>
+          </a:p>
+        </p:txBody>
+      </p:sp>
+      <p:sp>
+        <p:nvSpPr>
+          <p:cNvPr id="12" name="Rectangle 11"/>
+          <p:cNvSpPr/>
+          <p:nvPr/>
+        </p:nvSpPr>
+        <p:spPr>
+          <a:xfrm>
+            <a:off x="6126479" y="1188720"/>
+            <a:ext cx="5760720" cy="5394960"/>
+          </a:xfrm>
+          <a:prstGeom prst="rect">
+            <a:avLst/>
+          </a:prstGeom>
+          <a:solidFill>
+            <a:srgbClr val="162A44"/>
+          </a:solidFill>
+          <a:ln>
+            <a:noFill/>
+          </a:ln>
+        </p:spPr>
+        <p:style>
+          <a:lnRef idx="1">
+            <a:schemeClr val="accent1"/>
+          </a:lnRef>
+          <a:fillRef idx="3">
+            <a:schemeClr val="accent1"/>
+          </a:fillRef>
+          <a:effectRef idx="2">
+            <a:schemeClr val="accent1"/>
+          </a:effectRef>
+          <a:fontRef idx="minor">
+            <a:schemeClr val="lt1"/>
+          </a:fontRef>
+        </p:style>
+        <p:txBody>
+          <a:bodyPr rtlCol="0" anchor="ctr"/>
+          <a:lstStyle/>
+          <a:p>
+            <a:pPr algn="ctr"/>
+          </a:p>
+        </p:txBody>
+      </p:sp>
+      <p:sp>
+        <p:nvSpPr>
+          <p:cNvPr id="13" name="Rectangle 12"/>
+          <p:cNvSpPr/>
+          <p:nvPr/>
+        </p:nvSpPr>
+        <p:spPr>
+          <a:xfrm>
+            <a:off x="6126479" y="1188720"/>
+            <a:ext cx="5760720" cy="54864"/>
+          </a:xfrm>
+          <a:prstGeom prst="rect">
+            <a:avLst/>
+          </a:prstGeom>
+          <a:solidFill>
+            <a:srgbClr val="00E596"/>
+          </a:solidFill>
+          <a:ln>
+            <a:noFill/>
+          </a:ln>
+        </p:spPr>
+        <p:style>
+          <a:lnRef idx="1">
+            <a:schemeClr val="accent1"/>
+          </a:lnRef>
+          <a:fillRef idx="3">
+            <a:schemeClr val="accent1"/>
+          </a:fillRef>
+          <a:effectRef idx="2">
+            <a:schemeClr val="accent1"/>
+          </a:effectRef>
+          <a:fontRef idx="minor">
+            <a:schemeClr val="lt1"/>
+          </a:fontRef>
+        </p:style>
+        <p:txBody>
+          <a:bodyPr rtlCol="0" anchor="ctr"/>
+          <a:lstStyle/>
+          <a:p>
+            <a:pPr algn="ctr"/>
+          </a:p>
+        </p:txBody>
+      </p:sp>
+      <p:sp>
+        <p:nvSpPr>
+          <p:cNvPr id="14" name="TextBox 13"/>
+          <p:cNvSpPr txBox="1"/>
+          <p:nvPr/>
+        </p:nvSpPr>
+        <p:spPr>
+          <a:xfrm>
+            <a:off x="6236207" y="1261872"/>
+            <a:ext cx="5550407" cy="5257800"/>
+          </a:xfrm>
+          <a:prstGeom prst="rect">
+            <a:avLst/>
+          </a:prstGeom>
+          <a:noFill/>
+        </p:spPr>
+        <p:txBody>
+          <a:bodyPr wrap="square">
+            <a:spAutoFit/>
+          </a:bodyPr>
+          <a:lstStyle/>
+          <a:p>
+            <a:r>
+              <a:rPr sz="1500" b="1">
+                <a:solidFill>
+                  <a:srgbClr val="00E596"/>
+                </a:solidFill>
+                <a:latin typeface="Sarabun"/>
+              </a:rPr>
+              <a:t>Future Code Structure (โครงสร้างโฟลเดอร์ในอนาคต)</a:t>
+            </a:r>
+          </a:p>
+          <a:p>
+            <a:r>
+              <a:rPr sz="1300" b="1">
+                <a:solidFill>
+                  <a:srgbClr val="00E596"/>
+                </a:solidFill>
+              </a:rPr>
+              <a:t> โฟลเดอร์ปัจจุบัน vs อนาคต</a:t>
+            </a:r>
+          </a:p>
+          <a:p>
+            <a:pPr algn="l"/>
+            <a:r>
+              <a:rPr sz="1200" b="0">
+                <a:solidFill>
+                  <a:srgbClr val="FFFFFF"/>
+                </a:solidFill>
+                <a:latin typeface="Sarabun"/>
+              </a:rPr>
+              <a:t>• ปัจจุบันเรามีแค่ `main.py`, `models.py`, `database.py`</a:t>
+            </a:r>
+          </a:p>
+          <a:p>
+            <a:pPr algn="l"/>
+            <a:r>
+              <a:rPr sz="1200" b="0">
+                <a:solidFill>
+                  <a:srgbClr val="FFFFFF"/>
+                </a:solidFill>
+                <a:latin typeface="Sarabun"/>
+              </a:rPr>
+              <a:t>• เมื่อเริ่มเขียนระบบ Worker เราจะเพิ่มไฟล์ดังนี้:</a:t>
+            </a:r>
+          </a:p>
+          <a:p>
+            <a:r>
+              <a:t/>
+            </a:r>
+          </a:p>
+          <a:p>
+            <a:r>
+              <a:rPr sz="1300" b="1">
+                <a:solidFill>
+                  <a:srgbClr val="00E596"/>
+                </a:solidFill>
+              </a:rPr>
+              <a:t> โครงสร้างที่จะเพิ่มเข้ามา:</a:t>
+            </a:r>
+          </a:p>
+          <a:p>
+            <a:pPr algn="l"/>
+            <a:r>
+              <a:rPr sz="1200" b="0">
+                <a:solidFill>
+                  <a:srgbClr val="FFFFFF"/>
+                </a:solidFill>
+                <a:latin typeface="Segoe UI"/>
+              </a:rPr>
+              <a:t>• backend/</a:t>
+            </a:r>
+          </a:p>
+          <a:p>
+            <a:pPr algn="l"/>
+            <a:r>
+              <a:rPr sz="1200" b="0">
+                <a:solidFill>
+                  <a:srgbClr val="FFFFFF"/>
+                </a:solidFill>
+                <a:latin typeface="Sarabun"/>
+              </a:rPr>
+              <a:t> ├── docker-compose.yml  &lt;-- เพิ่ม service redis, worker, beat</a:t>
+            </a:r>
+          </a:p>
+          <a:p>
+            <a:pPr algn="l"/>
+            <a:r>
+              <a:rPr sz="1200" b="0">
+                <a:solidFill>
+                  <a:srgbClr val="FFFFFF"/>
+                </a:solidFill>
+                <a:latin typeface="Sarabun"/>
+              </a:rPr>
+              <a:t> └── core-api/</a:t>
+            </a:r>
+          </a:p>
+          <a:p>
+            <a:pPr algn="l"/>
+            <a:r>
+              <a:rPr sz="1200" b="0">
+                <a:solidFill>
+                  <a:srgbClr val="FFFFFF"/>
+                </a:solidFill>
+                <a:latin typeface="Sarabun"/>
+              </a:rPr>
+              <a:t>      ├── main.py        &lt;-- (API เดิม) เพิ่มโค้ดส่งงาน</a:t>
+            </a:r>
+          </a:p>
+          <a:p>
+            <a:pPr algn="l"/>
+            <a:r>
+              <a:rPr sz="1200" b="0">
+                <a:solidFill>
+                  <a:srgbClr val="FFFFFF"/>
+                </a:solidFill>
+                <a:latin typeface="Sarabun"/>
+              </a:rPr>
+              <a:t>      ├── worker.py      &lt;-- [ใหม่] ตั้งค่า Celery</a:t>
+            </a:r>
+          </a:p>
+          <a:p>
+            <a:pPr algn="l"/>
+            <a:r>
+              <a:rPr sz="1200" b="0">
+                <a:solidFill>
+                  <a:srgbClr val="FFFFFF"/>
+                </a:solidFill>
+                <a:latin typeface="Sarabun"/>
+              </a:rPr>
+              <a:t>      └── tasks/         &lt;-- [ใหม่] โฟลเดอร์เก็บฟังก์ชันงาน</a:t>
+            </a:r>
+          </a:p>
+          <a:p>
+            <a:pPr algn="l"/>
+            <a:r>
+              <a:rPr sz="1200" b="0">
+                <a:solidFill>
+                  <a:srgbClr val="FFFFFF"/>
+                </a:solidFill>
+                <a:latin typeface="Sarabun"/>
+              </a:rPr>
+              <a:t>           ├── billing.py &lt;-- [ใหม่] โค้ด Cron เช็คหมดอายุ</a:t>
+            </a:r>
+          </a:p>
+          <a:p>
+            <a:pPr algn="l"/>
+            <a:r>
+              <a:rPr sz="1200" b="0">
+                <a:solidFill>
+                  <a:srgbClr val="FFFFFF"/>
+                </a:solidFill>
+                <a:latin typeface="Sarabun"/>
+              </a:rPr>
+              <a:t>           └── migrate.py &lt;-- [ใหม่] โค้ด Worker ย้ายถัง</a:t>
             </a:r>
           </a:p>
         </p:txBody>
